--- a/DocumentationPresentation/Presentation.pptx
+++ b/DocumentationPresentation/Presentation.pptx
@@ -1,32 +1,32 @@
 
 <file path=ppt/presentation.xml><?xml version="1.0" encoding="utf-8"?>
-<p:presentation xmlns:a="http://schemas.openxmlformats.org/drawingml/2006/main" xmlns:r="http://schemas.openxmlformats.org/officeDocument/2006/relationships" xmlns:mc="http://schemas.openxmlformats.org/markup-compatibility/2006" xmlns:mv="urn:schemas-microsoft-com:mac:vml" xmlns:p="http://schemas.openxmlformats.org/presentationml/2006/main" xmlns:c="http://schemas.openxmlformats.org/drawingml/2006/chart" xmlns:dgm="http://schemas.openxmlformats.org/drawingml/2006/diagram" xmlns:o="urn:schemas-microsoft-com:office:office" xmlns:v="urn:schemas-microsoft-com:vml" xmlns:pvml="urn:schemas-microsoft-com:office:powerpoint" xmlns:com="http://schemas.openxmlformats.org/drawingml/2006/compatibility" xmlns:p14="http://schemas.microsoft.com/office/powerpoint/2010/main" xmlns:p15="http://schemas.microsoft.com/office/powerpoint/2012/main" xmlns:ahyp="http://schemas.microsoft.com/office/drawing/2018/hyperlinkcolor" autoCompressPictures="0" strictFirstAndLastChars="0" saveSubsetFonts="1">
+<p:presentation xmlns:a="http://schemas.openxmlformats.org/drawingml/2006/main" xmlns:r="http://schemas.openxmlformats.org/officeDocument/2006/relationships" xmlns:p="http://schemas.openxmlformats.org/presentationml/2006/main" strictFirstAndLastChars="0" saveSubsetFonts="1" autoCompressPictures="0">
   <p:sldMasterIdLst>
-    <p:sldMasterId id="2147483659" r:id="rId4"/>
+    <p:sldMasterId id="2147483659" r:id="rId1"/>
   </p:sldMasterIdLst>
   <p:notesMasterIdLst>
-    <p:notesMasterId r:id="rId5"/>
+    <p:notesMasterId r:id="rId16"/>
   </p:notesMasterIdLst>
   <p:sldIdLst>
-    <p:sldId id="256" r:id="rId6"/>
-    <p:sldId id="257" r:id="rId7"/>
-    <p:sldId id="258" r:id="rId8"/>
-    <p:sldId id="259" r:id="rId9"/>
-    <p:sldId id="260" r:id="rId10"/>
-    <p:sldId id="261" r:id="rId11"/>
-    <p:sldId id="262" r:id="rId12"/>
-    <p:sldId id="263" r:id="rId13"/>
-    <p:sldId id="264" r:id="rId14"/>
-    <p:sldId id="265" r:id="rId15"/>
-    <p:sldId id="266" r:id="rId16"/>
-    <p:sldId id="267" r:id="rId17"/>
-    <p:sldId id="268" r:id="rId18"/>
-    <p:sldId id="269" r:id="rId19"/>
+    <p:sldId id="256" r:id="rId2"/>
+    <p:sldId id="257" r:id="rId3"/>
+    <p:sldId id="269" r:id="rId4"/>
+    <p:sldId id="258" r:id="rId5"/>
+    <p:sldId id="259" r:id="rId6"/>
+    <p:sldId id="260" r:id="rId7"/>
+    <p:sldId id="261" r:id="rId8"/>
+    <p:sldId id="262" r:id="rId9"/>
+    <p:sldId id="263" r:id="rId10"/>
+    <p:sldId id="264" r:id="rId11"/>
+    <p:sldId id="265" r:id="rId12"/>
+    <p:sldId id="266" r:id="rId13"/>
+    <p:sldId id="267" r:id="rId14"/>
+    <p:sldId id="268" r:id="rId15"/>
   </p:sldIdLst>
-  <p:sldSz cy="5143500" cx="9144000"/>
+  <p:sldSz cx="9144000" cy="5143500" type="screen16x9"/>
   <p:notesSz cx="6858000" cy="9144000"/>
   <p:defaultTextStyle>
-    <a:defPPr lvl="0" marR="0" rtl="0" algn="l">
+    <a:defPPr marR="0" lvl="0" algn="l" rtl="0">
       <a:lnSpc>
         <a:spcPct val="100000"/>
       </a:lnSpc>
@@ -37,7 +37,7 @@
         <a:spcPts val="0"/>
       </a:spcAft>
     </a:defPPr>
-    <a:lvl1pPr lvl="0" marR="0" rtl="0" algn="l">
+    <a:lvl1pPr marR="0" lvl="0" algn="l" rtl="0">
       <a:lnSpc>
         <a:spcPct val="100000"/>
       </a:lnSpc>
@@ -51,7 +51,7 @@
         <a:srgbClr val="000000"/>
       </a:buClr>
       <a:buFont typeface="Arial"/>
-      <a:defRPr b="0" i="0" sz="1400" u="none" cap="none" strike="noStrike">
+      <a:defRPr sz="1400" b="0" i="0" u="none" strike="noStrike" cap="none">
         <a:solidFill>
           <a:srgbClr val="000000"/>
         </a:solidFill>
@@ -61,7 +61,7 @@
         <a:sym typeface="Arial"/>
       </a:defRPr>
     </a:lvl1pPr>
-    <a:lvl2pPr lvl="1" marR="0" rtl="0" algn="l">
+    <a:lvl2pPr marR="0" lvl="1" algn="l" rtl="0">
       <a:lnSpc>
         <a:spcPct val="100000"/>
       </a:lnSpc>
@@ -75,7 +75,7 @@
         <a:srgbClr val="000000"/>
       </a:buClr>
       <a:buFont typeface="Arial"/>
-      <a:defRPr b="0" i="0" sz="1400" u="none" cap="none" strike="noStrike">
+      <a:defRPr sz="1400" b="0" i="0" u="none" strike="noStrike" cap="none">
         <a:solidFill>
           <a:srgbClr val="000000"/>
         </a:solidFill>
@@ -85,7 +85,7 @@
         <a:sym typeface="Arial"/>
       </a:defRPr>
     </a:lvl2pPr>
-    <a:lvl3pPr lvl="2" marR="0" rtl="0" algn="l">
+    <a:lvl3pPr marR="0" lvl="2" algn="l" rtl="0">
       <a:lnSpc>
         <a:spcPct val="100000"/>
       </a:lnSpc>
@@ -99,7 +99,7 @@
         <a:srgbClr val="000000"/>
       </a:buClr>
       <a:buFont typeface="Arial"/>
-      <a:defRPr b="0" i="0" sz="1400" u="none" cap="none" strike="noStrike">
+      <a:defRPr sz="1400" b="0" i="0" u="none" strike="noStrike" cap="none">
         <a:solidFill>
           <a:srgbClr val="000000"/>
         </a:solidFill>
@@ -109,7 +109,7 @@
         <a:sym typeface="Arial"/>
       </a:defRPr>
     </a:lvl3pPr>
-    <a:lvl4pPr lvl="3" marR="0" rtl="0" algn="l">
+    <a:lvl4pPr marR="0" lvl="3" algn="l" rtl="0">
       <a:lnSpc>
         <a:spcPct val="100000"/>
       </a:lnSpc>
@@ -123,7 +123,7 @@
         <a:srgbClr val="000000"/>
       </a:buClr>
       <a:buFont typeface="Arial"/>
-      <a:defRPr b="0" i="0" sz="1400" u="none" cap="none" strike="noStrike">
+      <a:defRPr sz="1400" b="0" i="0" u="none" strike="noStrike" cap="none">
         <a:solidFill>
           <a:srgbClr val="000000"/>
         </a:solidFill>
@@ -133,7 +133,7 @@
         <a:sym typeface="Arial"/>
       </a:defRPr>
     </a:lvl4pPr>
-    <a:lvl5pPr lvl="4" marR="0" rtl="0" algn="l">
+    <a:lvl5pPr marR="0" lvl="4" algn="l" rtl="0">
       <a:lnSpc>
         <a:spcPct val="100000"/>
       </a:lnSpc>
@@ -147,7 +147,7 @@
         <a:srgbClr val="000000"/>
       </a:buClr>
       <a:buFont typeface="Arial"/>
-      <a:defRPr b="0" i="0" sz="1400" u="none" cap="none" strike="noStrike">
+      <a:defRPr sz="1400" b="0" i="0" u="none" strike="noStrike" cap="none">
         <a:solidFill>
           <a:srgbClr val="000000"/>
         </a:solidFill>
@@ -157,7 +157,7 @@
         <a:sym typeface="Arial"/>
       </a:defRPr>
     </a:lvl5pPr>
-    <a:lvl6pPr lvl="5" marR="0" rtl="0" algn="l">
+    <a:lvl6pPr marR="0" lvl="5" algn="l" rtl="0">
       <a:lnSpc>
         <a:spcPct val="100000"/>
       </a:lnSpc>
@@ -171,7 +171,7 @@
         <a:srgbClr val="000000"/>
       </a:buClr>
       <a:buFont typeface="Arial"/>
-      <a:defRPr b="0" i="0" sz="1400" u="none" cap="none" strike="noStrike">
+      <a:defRPr sz="1400" b="0" i="0" u="none" strike="noStrike" cap="none">
         <a:solidFill>
           <a:srgbClr val="000000"/>
         </a:solidFill>
@@ -181,7 +181,7 @@
         <a:sym typeface="Arial"/>
       </a:defRPr>
     </a:lvl6pPr>
-    <a:lvl7pPr lvl="6" marR="0" rtl="0" algn="l">
+    <a:lvl7pPr marR="0" lvl="6" algn="l" rtl="0">
       <a:lnSpc>
         <a:spcPct val="100000"/>
       </a:lnSpc>
@@ -195,7 +195,7 @@
         <a:srgbClr val="000000"/>
       </a:buClr>
       <a:buFont typeface="Arial"/>
-      <a:defRPr b="0" i="0" sz="1400" u="none" cap="none" strike="noStrike">
+      <a:defRPr sz="1400" b="0" i="0" u="none" strike="noStrike" cap="none">
         <a:solidFill>
           <a:srgbClr val="000000"/>
         </a:solidFill>
@@ -205,7 +205,7 @@
         <a:sym typeface="Arial"/>
       </a:defRPr>
     </a:lvl7pPr>
-    <a:lvl8pPr lvl="7" marR="0" rtl="0" algn="l">
+    <a:lvl8pPr marR="0" lvl="7" algn="l" rtl="0">
       <a:lnSpc>
         <a:spcPct val="100000"/>
       </a:lnSpc>
@@ -219,7 +219,7 @@
         <a:srgbClr val="000000"/>
       </a:buClr>
       <a:buFont typeface="Arial"/>
-      <a:defRPr b="0" i="0" sz="1400" u="none" cap="none" strike="noStrike">
+      <a:defRPr sz="1400" b="0" i="0" u="none" strike="noStrike" cap="none">
         <a:solidFill>
           <a:srgbClr val="000000"/>
         </a:solidFill>
@@ -229,7 +229,7 @@
         <a:sym typeface="Arial"/>
       </a:defRPr>
     </a:lvl8pPr>
-    <a:lvl9pPr lvl="8" marR="0" rtl="0" algn="l">
+    <a:lvl9pPr marR="0" lvl="8" algn="l" rtl="0">
       <a:lnSpc>
         <a:spcPct val="100000"/>
       </a:lnSpc>
@@ -243,7 +243,7 @@
         <a:srgbClr val="000000"/>
       </a:buClr>
       <a:buFont typeface="Arial"/>
-      <a:defRPr b="0" i="0" sz="1400" u="none" cap="none" strike="noStrike">
+      <a:defRPr sz="1400" b="0" i="0" u="none" strike="noStrike" cap="none">
         <a:solidFill>
           <a:srgbClr val="000000"/>
         </a:solidFill>
@@ -256,7 +256,7 @@
   </p:defaultTextStyle>
   <p:extLst>
     <p:ext uri="{EFAFB233-063F-42B5-8137-9DF3F51BA10A}">
-      <p15:sldGuideLst>
+      <p15:sldGuideLst xmlns:p15="http://schemas.microsoft.com/office/powerpoint/2012/main">
         <p15:guide id="1" orient="horz" pos="1620">
           <p15:clr>
             <a:srgbClr val="747775"/>
@@ -273,12 +273,61 @@
 </p:presentation>
 </file>
 
+<file path=ppt/changesInfos/changesInfo1.xml><?xml version="1.0" encoding="utf-8"?>
+<pc:chgInfo xmlns:a="http://schemas.openxmlformats.org/drawingml/2006/main" xmlns:r="http://schemas.openxmlformats.org/officeDocument/2006/relationships" xmlns:ac="http://schemas.microsoft.com/office/drawing/2013/main/command" xmlns:pc="http://schemas.microsoft.com/office/powerpoint/2013/main/command">
+  <pc:docChgLst>
+    <pc:chgData name="Andrew Brain" userId="c9d3030eaea05e55" providerId="LiveId" clId="{789CACEA-7DCD-4B95-BF0A-76ACB2D052A1}"/>
+    <pc:docChg chg="custSel modSld sldOrd">
+      <pc:chgData name="Andrew Brain" userId="c9d3030eaea05e55" providerId="LiveId" clId="{789CACEA-7DCD-4B95-BF0A-76ACB2D052A1}" dt="2026-04-29T17:36:41.508" v="8"/>
+      <pc:docMkLst>
+        <pc:docMk/>
+      </pc:docMkLst>
+      <pc:sldChg chg="addSp delSp modSp mod">
+        <pc:chgData name="Andrew Brain" userId="c9d3030eaea05e55" providerId="LiveId" clId="{789CACEA-7DCD-4B95-BF0A-76ACB2D052A1}" dt="2026-04-29T17:20:06.715" v="6" actId="1076"/>
+        <pc:sldMkLst>
+          <pc:docMk/>
+          <pc:sldMk cId="0" sldId="259"/>
+        </pc:sldMkLst>
+        <pc:picChg chg="add mod">
+          <ac:chgData name="Andrew Brain" userId="c9d3030eaea05e55" providerId="LiveId" clId="{789CACEA-7DCD-4B95-BF0A-76ACB2D052A1}" dt="2026-04-29T17:20:06.715" v="6" actId="1076"/>
+          <ac:picMkLst>
+            <pc:docMk/>
+            <pc:sldMk cId="0" sldId="259"/>
+            <ac:picMk id="3" creationId="{1907078C-6959-98D9-24C4-67C55CA7A8FC}"/>
+          </ac:picMkLst>
+        </pc:picChg>
+        <pc:picChg chg="del">
+          <ac:chgData name="Andrew Brain" userId="c9d3030eaea05e55" providerId="LiveId" clId="{789CACEA-7DCD-4B95-BF0A-76ACB2D052A1}" dt="2026-04-29T17:19:50.123" v="1" actId="478"/>
+          <ac:picMkLst>
+            <pc:docMk/>
+            <pc:sldMk cId="0" sldId="259"/>
+            <ac:picMk id="72" creationId="{00000000-0000-0000-0000-000000000000}"/>
+          </ac:picMkLst>
+        </pc:picChg>
+      </pc:sldChg>
+      <pc:sldChg chg="ord modNotes">
+        <pc:chgData name="Andrew Brain" userId="c9d3030eaea05e55" providerId="LiveId" clId="{789CACEA-7DCD-4B95-BF0A-76ACB2D052A1}" dt="2026-04-29T17:36:41.508" v="8"/>
+        <pc:sldMkLst>
+          <pc:docMk/>
+          <pc:sldMk cId="0" sldId="269"/>
+        </pc:sldMkLst>
+      </pc:sldChg>
+    </pc:docChg>
+  </pc:docChgLst>
+</pc:chgInfo>
+</file>
+
 <file path=ppt/notesMasters/notesMaster1.xml><?xml version="1.0" encoding="utf-8"?>
-<p:notesMaster xmlns:a="http://schemas.openxmlformats.org/drawingml/2006/main" xmlns:r="http://schemas.openxmlformats.org/officeDocument/2006/relationships" xmlns:mc="http://schemas.openxmlformats.org/markup-compatibility/2006" xmlns:mv="urn:schemas-microsoft-com:mac:vml" xmlns:p="http://schemas.openxmlformats.org/presentationml/2006/main" xmlns:c="http://schemas.openxmlformats.org/drawingml/2006/chart" xmlns:dgm="http://schemas.openxmlformats.org/drawingml/2006/diagram" xmlns:o="urn:schemas-microsoft-com:office:office" xmlns:v="urn:schemas-microsoft-com:vml" xmlns:pvml="urn:schemas-microsoft-com:office:powerpoint" xmlns:com="http://schemas.openxmlformats.org/drawingml/2006/compatibility" xmlns:p14="http://schemas.microsoft.com/office/powerpoint/2010/main" xmlns:p15="http://schemas.microsoft.com/office/powerpoint/2012/main" xmlns:ahyp="http://schemas.microsoft.com/office/drawing/2018/hyperlinkcolor">
+<p:notesMaster xmlns:a="http://schemas.openxmlformats.org/drawingml/2006/main" xmlns:r="http://schemas.openxmlformats.org/officeDocument/2006/relationships" xmlns:p="http://schemas.openxmlformats.org/presentationml/2006/main">
   <p:cSld>
+    <p:bg>
+      <p:bgRef idx="1001">
+        <a:schemeClr val="bg1"/>
+      </p:bgRef>
+    </p:bg>
     <p:spTree>
       <p:nvGrpSpPr>
-        <p:cNvPr id="2" name="Shape 2"/>
+        <p:cNvPr id="1" name="Shape 2"/>
         <p:cNvGrpSpPr/>
         <p:nvPr/>
       </p:nvGrpSpPr>
@@ -293,9 +342,11 @@
       <p:sp>
         <p:nvSpPr>
           <p:cNvPr id="3" name="Google Shape;3;n"/>
-          <p:cNvSpPr/>
+          <p:cNvSpPr>
+            <a:spLocks noGrp="1" noRot="1" noChangeAspect="1"/>
+          </p:cNvSpPr>
           <p:nvPr>
-            <p:ph idx="2" type="sldImg"/>
+            <p:ph type="sldImg" idx="2"/>
           </p:nvPr>
         </p:nvSpPr>
         <p:spPr>
@@ -304,9 +355,13 @@
             <a:ext cx="6096075" cy="3429000"/>
           </a:xfrm>
           <a:custGeom>
-            <a:rect b="b" l="l" r="r" t="t"/>
+            <a:avLst/>
+            <a:gdLst/>
+            <a:ahLst/>
+            <a:cxnLst/>
+            <a:rect l="l" t="t" r="r" b="b"/>
             <a:pathLst>
-              <a:path extrusionOk="0" h="120000" w="120000">
+              <a:path w="120000" h="120000" extrusionOk="0">
                 <a:moveTo>
                   <a:pt x="0" y="0"/>
                 </a:moveTo>
@@ -324,23 +379,25 @@
             </a:pathLst>
           </a:custGeom>
           <a:noFill/>
-          <a:ln cap="flat" cmpd="sng" w="9525">
+          <a:ln w="9525" cap="flat" cmpd="sng">
             <a:solidFill>
               <a:srgbClr val="000000"/>
             </a:solidFill>
             <a:prstDash val="solid"/>
             <a:round/>
-            <a:headEnd len="sm" w="sm" type="none"/>
-            <a:tailEnd len="sm" w="sm" type="none"/>
+            <a:headEnd type="none" w="sm" len="sm"/>
+            <a:tailEnd type="none" w="sm" len="sm"/>
           </a:ln>
         </p:spPr>
       </p:sp>
       <p:sp>
         <p:nvSpPr>
           <p:cNvPr id="4" name="Google Shape;4;n"/>
-          <p:cNvSpPr txBox="1"/>
+          <p:cNvSpPr txBox="1">
+            <a:spLocks noGrp="1"/>
+          </p:cNvSpPr>
           <p:nvPr>
-            <p:ph idx="1" type="body"/>
+            <p:ph type="body" idx="1"/>
           </p:nvPr>
         </p:nvSpPr>
         <p:spPr>
@@ -357,11 +414,11 @@
           </a:ln>
         </p:spPr>
         <p:txBody>
-          <a:bodyPr anchorCtr="0" anchor="t" bIns="91425" lIns="91425" spcFirstLastPara="1" rIns="91425" wrap="square" tIns="91425">
+          <a:bodyPr spcFirstLastPara="1" wrap="square" lIns="91425" tIns="91425" rIns="91425" bIns="91425" anchor="t" anchorCtr="0">
             <a:noAutofit/>
           </a:bodyPr>
           <a:lstStyle>
-            <a:lvl1pPr indent="-298450" lvl="0" marL="457200">
+            <a:lvl1pPr marL="457200" lvl="0" indent="-298450">
               <a:spcBef>
                 <a:spcPts val="0"/>
               </a:spcBef>
@@ -372,7 +429,7 @@
               <a:buChar char="●"/>
               <a:defRPr sz="1100"/>
             </a:lvl1pPr>
-            <a:lvl2pPr indent="-298450" lvl="1" marL="914400">
+            <a:lvl2pPr marL="914400" lvl="1" indent="-298450">
               <a:spcBef>
                 <a:spcPts val="0"/>
               </a:spcBef>
@@ -383,7 +440,7 @@
               <a:buChar char="○"/>
               <a:defRPr sz="1100"/>
             </a:lvl2pPr>
-            <a:lvl3pPr indent="-298450" lvl="2" marL="1371600">
+            <a:lvl3pPr marL="1371600" lvl="2" indent="-298450">
               <a:spcBef>
                 <a:spcPts val="0"/>
               </a:spcBef>
@@ -394,7 +451,7 @@
               <a:buChar char="■"/>
               <a:defRPr sz="1100"/>
             </a:lvl3pPr>
-            <a:lvl4pPr indent="-298450" lvl="3" marL="1828800">
+            <a:lvl4pPr marL="1828800" lvl="3" indent="-298450">
               <a:spcBef>
                 <a:spcPts val="0"/>
               </a:spcBef>
@@ -405,7 +462,7 @@
               <a:buChar char="●"/>
               <a:defRPr sz="1100"/>
             </a:lvl4pPr>
-            <a:lvl5pPr indent="-298450" lvl="4" marL="2286000">
+            <a:lvl5pPr marL="2286000" lvl="4" indent="-298450">
               <a:spcBef>
                 <a:spcPts val="0"/>
               </a:spcBef>
@@ -416,7 +473,7 @@
               <a:buChar char="○"/>
               <a:defRPr sz="1100"/>
             </a:lvl5pPr>
-            <a:lvl6pPr indent="-298450" lvl="5" marL="2743200">
+            <a:lvl6pPr marL="2743200" lvl="5" indent="-298450">
               <a:spcBef>
                 <a:spcPts val="0"/>
               </a:spcBef>
@@ -427,7 +484,7 @@
               <a:buChar char="■"/>
               <a:defRPr sz="1100"/>
             </a:lvl6pPr>
-            <a:lvl7pPr indent="-298450" lvl="6" marL="3200400">
+            <a:lvl7pPr marL="3200400" lvl="6" indent="-298450">
               <a:spcBef>
                 <a:spcPts val="0"/>
               </a:spcBef>
@@ -438,7 +495,7 @@
               <a:buChar char="●"/>
               <a:defRPr sz="1100"/>
             </a:lvl7pPr>
-            <a:lvl8pPr indent="-298450" lvl="7" marL="3657600">
+            <a:lvl8pPr marL="3657600" lvl="7" indent="-298450">
               <a:spcBef>
                 <a:spcPts val="0"/>
               </a:spcBef>
@@ -449,7 +506,7 @@
               <a:buChar char="○"/>
               <a:defRPr sz="1100"/>
             </a:lvl8pPr>
-            <a:lvl9pPr indent="-298450" lvl="8" marL="4114800">
+            <a:lvl9pPr marL="4114800" lvl="8" indent="-298450">
               <a:spcBef>
                 <a:spcPts val="0"/>
               </a:spcBef>
@@ -461,14 +518,16 @@
               <a:defRPr sz="1100"/>
             </a:lvl9pPr>
           </a:lstStyle>
-          <a:p/>
+          <a:p>
+            <a:endParaRPr/>
+          </a:p>
         </p:txBody>
       </p:sp>
     </p:spTree>
   </p:cSld>
-  <p:clrMap accent1="accent1" accent2="accent2" accent3="accent3" accent4="accent4" accent5="accent5" accent6="accent6" bg1="lt1" bg2="dk2" tx1="dk1" tx2="lt2" folHlink="folHlink" hlink="hlink"/>
+  <p:clrMap bg1="lt1" tx1="dk1" bg2="dk2" tx2="lt2" accent1="accent1" accent2="accent2" accent3="accent3" accent4="accent4" accent5="accent5" accent6="accent6" hlink="hlink" folHlink="folHlink"/>
   <p:notesStyle>
-    <a:defPPr lvl="0" marR="0" rtl="0" algn="l">
+    <a:defPPr marR="0" lvl="0" algn="l" rtl="0">
       <a:lnSpc>
         <a:spcPct val="100000"/>
       </a:lnSpc>
@@ -479,7 +538,7 @@
         <a:spcPts val="0"/>
       </a:spcAft>
     </a:defPPr>
-    <a:lvl1pPr lvl="0" marR="0" rtl="0" algn="l">
+    <a:lvl1pPr marR="0" lvl="0" algn="l" rtl="0">
       <a:lnSpc>
         <a:spcPct val="100000"/>
       </a:lnSpc>
@@ -493,7 +552,7 @@
         <a:srgbClr val="000000"/>
       </a:buClr>
       <a:buFont typeface="Arial"/>
-      <a:defRPr b="0" i="0" sz="1400" u="none" cap="none" strike="noStrike">
+      <a:defRPr sz="1400" b="0" i="0" u="none" strike="noStrike" cap="none">
         <a:solidFill>
           <a:srgbClr val="000000"/>
         </a:solidFill>
@@ -503,7 +562,7 @@
         <a:sym typeface="Arial"/>
       </a:defRPr>
     </a:lvl1pPr>
-    <a:lvl2pPr lvl="1" marR="0" rtl="0" algn="l">
+    <a:lvl2pPr marR="0" lvl="1" algn="l" rtl="0">
       <a:lnSpc>
         <a:spcPct val="100000"/>
       </a:lnSpc>
@@ -517,7 +576,7 @@
         <a:srgbClr val="000000"/>
       </a:buClr>
       <a:buFont typeface="Arial"/>
-      <a:defRPr b="0" i="0" sz="1400" u="none" cap="none" strike="noStrike">
+      <a:defRPr sz="1400" b="0" i="0" u="none" strike="noStrike" cap="none">
         <a:solidFill>
           <a:srgbClr val="000000"/>
         </a:solidFill>
@@ -527,7 +586,7 @@
         <a:sym typeface="Arial"/>
       </a:defRPr>
     </a:lvl2pPr>
-    <a:lvl3pPr lvl="2" marR="0" rtl="0" algn="l">
+    <a:lvl3pPr marR="0" lvl="2" algn="l" rtl="0">
       <a:lnSpc>
         <a:spcPct val="100000"/>
       </a:lnSpc>
@@ -541,7 +600,7 @@
         <a:srgbClr val="000000"/>
       </a:buClr>
       <a:buFont typeface="Arial"/>
-      <a:defRPr b="0" i="0" sz="1400" u="none" cap="none" strike="noStrike">
+      <a:defRPr sz="1400" b="0" i="0" u="none" strike="noStrike" cap="none">
         <a:solidFill>
           <a:srgbClr val="000000"/>
         </a:solidFill>
@@ -551,7 +610,7 @@
         <a:sym typeface="Arial"/>
       </a:defRPr>
     </a:lvl3pPr>
-    <a:lvl4pPr lvl="3" marR="0" rtl="0" algn="l">
+    <a:lvl4pPr marR="0" lvl="3" algn="l" rtl="0">
       <a:lnSpc>
         <a:spcPct val="100000"/>
       </a:lnSpc>
@@ -565,7 +624,7 @@
         <a:srgbClr val="000000"/>
       </a:buClr>
       <a:buFont typeface="Arial"/>
-      <a:defRPr b="0" i="0" sz="1400" u="none" cap="none" strike="noStrike">
+      <a:defRPr sz="1400" b="0" i="0" u="none" strike="noStrike" cap="none">
         <a:solidFill>
           <a:srgbClr val="000000"/>
         </a:solidFill>
@@ -575,7 +634,7 @@
         <a:sym typeface="Arial"/>
       </a:defRPr>
     </a:lvl4pPr>
-    <a:lvl5pPr lvl="4" marR="0" rtl="0" algn="l">
+    <a:lvl5pPr marR="0" lvl="4" algn="l" rtl="0">
       <a:lnSpc>
         <a:spcPct val="100000"/>
       </a:lnSpc>
@@ -589,7 +648,7 @@
         <a:srgbClr val="000000"/>
       </a:buClr>
       <a:buFont typeface="Arial"/>
-      <a:defRPr b="0" i="0" sz="1400" u="none" cap="none" strike="noStrike">
+      <a:defRPr sz="1400" b="0" i="0" u="none" strike="noStrike" cap="none">
         <a:solidFill>
           <a:srgbClr val="000000"/>
         </a:solidFill>
@@ -599,7 +658,7 @@
         <a:sym typeface="Arial"/>
       </a:defRPr>
     </a:lvl5pPr>
-    <a:lvl6pPr lvl="5" marR="0" rtl="0" algn="l">
+    <a:lvl6pPr marR="0" lvl="5" algn="l" rtl="0">
       <a:lnSpc>
         <a:spcPct val="100000"/>
       </a:lnSpc>
@@ -613,7 +672,7 @@
         <a:srgbClr val="000000"/>
       </a:buClr>
       <a:buFont typeface="Arial"/>
-      <a:defRPr b="0" i="0" sz="1400" u="none" cap="none" strike="noStrike">
+      <a:defRPr sz="1400" b="0" i="0" u="none" strike="noStrike" cap="none">
         <a:solidFill>
           <a:srgbClr val="000000"/>
         </a:solidFill>
@@ -623,7 +682,7 @@
         <a:sym typeface="Arial"/>
       </a:defRPr>
     </a:lvl6pPr>
-    <a:lvl7pPr lvl="6" marR="0" rtl="0" algn="l">
+    <a:lvl7pPr marR="0" lvl="6" algn="l" rtl="0">
       <a:lnSpc>
         <a:spcPct val="100000"/>
       </a:lnSpc>
@@ -637,7 +696,7 @@
         <a:srgbClr val="000000"/>
       </a:buClr>
       <a:buFont typeface="Arial"/>
-      <a:defRPr b="0" i="0" sz="1400" u="none" cap="none" strike="noStrike">
+      <a:defRPr sz="1400" b="0" i="0" u="none" strike="noStrike" cap="none">
         <a:solidFill>
           <a:srgbClr val="000000"/>
         </a:solidFill>
@@ -647,7 +706,7 @@
         <a:sym typeface="Arial"/>
       </a:defRPr>
     </a:lvl7pPr>
-    <a:lvl8pPr lvl="7" marR="0" rtl="0" algn="l">
+    <a:lvl8pPr marR="0" lvl="7" algn="l" rtl="0">
       <a:lnSpc>
         <a:spcPct val="100000"/>
       </a:lnSpc>
@@ -661,7 +720,7 @@
         <a:srgbClr val="000000"/>
       </a:buClr>
       <a:buFont typeface="Arial"/>
-      <a:defRPr b="0" i="0" sz="1400" u="none" cap="none" strike="noStrike">
+      <a:defRPr sz="1400" b="0" i="0" u="none" strike="noStrike" cap="none">
         <a:solidFill>
           <a:srgbClr val="000000"/>
         </a:solidFill>
@@ -671,7 +730,7 @@
         <a:sym typeface="Arial"/>
       </a:defRPr>
     </a:lvl8pPr>
-    <a:lvl9pPr lvl="8" marR="0" rtl="0" algn="l">
+    <a:lvl9pPr marR="0" lvl="8" algn="l" rtl="0">
       <a:lnSpc>
         <a:spcPct val="100000"/>
       </a:lnSpc>
@@ -685,7 +744,7 @@
         <a:srgbClr val="000000"/>
       </a:buClr>
       <a:buFont typeface="Arial"/>
-      <a:defRPr b="0" i="0" sz="1400" u="none" cap="none" strike="noStrike">
+      <a:defRPr sz="1400" b="0" i="0" u="none" strike="noStrike" cap="none">
         <a:solidFill>
           <a:srgbClr val="000000"/>
         </a:solidFill>
@@ -700,11 +759,11 @@
 </file>
 
 <file path=ppt/notesSlides/notesSlide1.xml><?xml version="1.0" encoding="utf-8"?>
-<p:notes xmlns:a="http://schemas.openxmlformats.org/drawingml/2006/main" xmlns:r="http://schemas.openxmlformats.org/officeDocument/2006/relationships" xmlns:mc="http://schemas.openxmlformats.org/markup-compatibility/2006" xmlns:mv="urn:schemas-microsoft-com:mac:vml" xmlns:p="http://schemas.openxmlformats.org/presentationml/2006/main" xmlns:c="http://schemas.openxmlformats.org/drawingml/2006/chart" xmlns:dgm="http://schemas.openxmlformats.org/drawingml/2006/diagram" xmlns:o="urn:schemas-microsoft-com:office:office" xmlns:v="urn:schemas-microsoft-com:vml" xmlns:pvml="urn:schemas-microsoft-com:office:powerpoint" xmlns:com="http://schemas.openxmlformats.org/drawingml/2006/compatibility" xmlns:p14="http://schemas.microsoft.com/office/powerpoint/2010/main" xmlns:p15="http://schemas.microsoft.com/office/powerpoint/2012/main" xmlns:ahyp="http://schemas.microsoft.com/office/drawing/2018/hyperlinkcolor" showMasterPhAnim="0" showMasterSp="0">
+<p:notes xmlns:a="http://schemas.openxmlformats.org/drawingml/2006/main" xmlns:r="http://schemas.openxmlformats.org/officeDocument/2006/relationships" xmlns:p="http://schemas.openxmlformats.org/presentationml/2006/main" showMasterSp="0" showMasterPhAnim="0">
   <p:cSld>
     <p:spTree>
       <p:nvGrpSpPr>
-        <p:cNvPr id="50" name="Shape 50"/>
+        <p:cNvPr id="1" name="Shape 50"/>
         <p:cNvGrpSpPr/>
         <p:nvPr/>
       </p:nvGrpSpPr>
@@ -719,9 +778,11 @@
       <p:sp>
         <p:nvSpPr>
           <p:cNvPr id="51" name="Google Shape;51;p:notes"/>
-          <p:cNvSpPr/>
+          <p:cNvSpPr>
+            <a:spLocks noGrp="1" noRot="1" noChangeAspect="1"/>
+          </p:cNvSpPr>
           <p:nvPr>
-            <p:ph idx="2" type="sldImg"/>
+            <p:ph type="sldImg" idx="2"/>
           </p:nvPr>
         </p:nvSpPr>
         <p:spPr>
@@ -730,9 +791,13 @@
             <a:ext cx="6096075" cy="3429000"/>
           </a:xfrm>
           <a:custGeom>
-            <a:rect b="b" l="l" r="r" t="t"/>
+            <a:avLst/>
+            <a:gdLst/>
+            <a:ahLst/>
+            <a:cxnLst/>
+            <a:rect l="l" t="t" r="r" b="b"/>
             <a:pathLst>
-              <a:path extrusionOk="0" h="120000" w="120000">
+              <a:path w="120000" h="120000" extrusionOk="0">
                 <a:moveTo>
                   <a:pt x="0" y="0"/>
                 </a:moveTo>
@@ -754,9 +819,11 @@
       <p:sp>
         <p:nvSpPr>
           <p:cNvPr id="52" name="Google Shape;52;p:notes"/>
-          <p:cNvSpPr txBox="1"/>
+          <p:cNvSpPr txBox="1">
+            <a:spLocks noGrp="1"/>
+          </p:cNvSpPr>
           <p:nvPr>
-            <p:ph idx="1" type="body"/>
+            <p:ph type="body" idx="1"/>
           </p:nvPr>
         </p:nvSpPr>
         <p:spPr>
@@ -769,12 +836,12 @@
           </a:prstGeom>
         </p:spPr>
         <p:txBody>
-          <a:bodyPr anchorCtr="0" anchor="t" bIns="91425" lIns="91425" spcFirstLastPara="1" rIns="91425" wrap="square" tIns="91425">
+          <a:bodyPr spcFirstLastPara="1" wrap="square" lIns="91425" tIns="91425" rIns="91425" bIns="91425" anchor="t" anchorCtr="0">
             <a:noAutofit/>
           </a:bodyPr>
           <a:lstStyle/>
           <a:p>
-            <a:pPr indent="0" lvl="0" marL="0" rtl="0" algn="l">
+            <a:pPr marL="0" lvl="0" indent="0" algn="l" rtl="0">
               <a:spcBef>
                 <a:spcPts val="0"/>
               </a:spcBef>
@@ -783,9 +850,6 @@
               </a:spcAft>
               <a:buNone/>
             </a:pPr>
-            <a:r>
-              <a:t/>
-            </a:r>
             <a:endParaRPr/>
           </a:p>
         </p:txBody>
@@ -799,11 +863,115 @@
 </file>
 
 <file path=ppt/notesSlides/notesSlide10.xml><?xml version="1.0" encoding="utf-8"?>
-<p:notes xmlns:a="http://schemas.openxmlformats.org/drawingml/2006/main" xmlns:r="http://schemas.openxmlformats.org/officeDocument/2006/relationships" xmlns:mc="http://schemas.openxmlformats.org/markup-compatibility/2006" xmlns:mv="urn:schemas-microsoft-com:mac:vml" xmlns:p="http://schemas.openxmlformats.org/presentationml/2006/main" xmlns:c="http://schemas.openxmlformats.org/drawingml/2006/chart" xmlns:dgm="http://schemas.openxmlformats.org/drawingml/2006/diagram" xmlns:o="urn:schemas-microsoft-com:office:office" xmlns:v="urn:schemas-microsoft-com:vml" xmlns:pvml="urn:schemas-microsoft-com:office:powerpoint" xmlns:com="http://schemas.openxmlformats.org/drawingml/2006/compatibility" xmlns:p14="http://schemas.microsoft.com/office/powerpoint/2010/main" xmlns:p15="http://schemas.microsoft.com/office/powerpoint/2012/main" xmlns:ahyp="http://schemas.microsoft.com/office/drawing/2018/hyperlinkcolor" showMasterPhAnim="0" showMasterSp="0">
+<p:notes xmlns:a="http://schemas.openxmlformats.org/drawingml/2006/main" xmlns:r="http://schemas.openxmlformats.org/officeDocument/2006/relationships" xmlns:p="http://schemas.openxmlformats.org/presentationml/2006/main" showMasterSp="0" showMasterPhAnim="0">
   <p:cSld>
     <p:spTree>
       <p:nvGrpSpPr>
-        <p:cNvPr id="103" name="Shape 103"/>
+        <p:cNvPr id="1" name="Shape 95"/>
+        <p:cNvGrpSpPr/>
+        <p:nvPr/>
+      </p:nvGrpSpPr>
+      <p:grpSpPr>
+        <a:xfrm>
+          <a:off x="0" y="0"/>
+          <a:ext cx="0" cy="0"/>
+          <a:chOff x="0" y="0"/>
+          <a:chExt cx="0" cy="0"/>
+        </a:xfrm>
+      </p:grpSpPr>
+      <p:sp>
+        <p:nvSpPr>
+          <p:cNvPr id="96" name="Google Shape;96;g3dab511c1fa_0_785:notes"/>
+          <p:cNvSpPr>
+            <a:spLocks noGrp="1" noRot="1" noChangeAspect="1"/>
+          </p:cNvSpPr>
+          <p:nvPr>
+            <p:ph type="sldImg" idx="2"/>
+          </p:nvPr>
+        </p:nvSpPr>
+        <p:spPr>
+          <a:xfrm>
+            <a:off x="381300" y="685800"/>
+            <a:ext cx="6096000" cy="3429000"/>
+          </a:xfrm>
+          <a:custGeom>
+            <a:avLst/>
+            <a:gdLst/>
+            <a:ahLst/>
+            <a:cxnLst/>
+            <a:rect l="l" t="t" r="r" b="b"/>
+            <a:pathLst>
+              <a:path w="120000" h="120000" extrusionOk="0">
+                <a:moveTo>
+                  <a:pt x="0" y="0"/>
+                </a:moveTo>
+                <a:lnTo>
+                  <a:pt x="120000" y="0"/>
+                </a:lnTo>
+                <a:lnTo>
+                  <a:pt x="120000" y="120000"/>
+                </a:lnTo>
+                <a:lnTo>
+                  <a:pt x="0" y="120000"/>
+                </a:lnTo>
+                <a:close/>
+              </a:path>
+            </a:pathLst>
+          </a:custGeom>
+        </p:spPr>
+      </p:sp>
+      <p:sp>
+        <p:nvSpPr>
+          <p:cNvPr id="97" name="Google Shape;97;g3dab511c1fa_0_785:notes"/>
+          <p:cNvSpPr txBox="1">
+            <a:spLocks noGrp="1"/>
+          </p:cNvSpPr>
+          <p:nvPr>
+            <p:ph type="body" idx="1"/>
+          </p:nvPr>
+        </p:nvSpPr>
+        <p:spPr>
+          <a:xfrm>
+            <a:off x="685800" y="4343400"/>
+            <a:ext cx="5486400" cy="4114800"/>
+          </a:xfrm>
+          <a:prstGeom prst="rect">
+            <a:avLst/>
+          </a:prstGeom>
+        </p:spPr>
+        <p:txBody>
+          <a:bodyPr spcFirstLastPara="1" wrap="square" lIns="91425" tIns="91425" rIns="91425" bIns="91425" anchor="t" anchorCtr="0">
+            <a:noAutofit/>
+          </a:bodyPr>
+          <a:lstStyle/>
+          <a:p>
+            <a:pPr marL="0" lvl="0" indent="0" algn="l" rtl="0">
+              <a:spcBef>
+                <a:spcPts val="0"/>
+              </a:spcBef>
+              <a:spcAft>
+                <a:spcPts val="0"/>
+              </a:spcAft>
+              <a:buNone/>
+            </a:pPr>
+            <a:endParaRPr/>
+          </a:p>
+        </p:txBody>
+      </p:sp>
+    </p:spTree>
+  </p:cSld>
+  <p:clrMapOvr>
+    <a:masterClrMapping/>
+  </p:clrMapOvr>
+</p:notes>
+</file>
+
+<file path=ppt/notesSlides/notesSlide11.xml><?xml version="1.0" encoding="utf-8"?>
+<p:notes xmlns:a="http://schemas.openxmlformats.org/drawingml/2006/main" xmlns:r="http://schemas.openxmlformats.org/officeDocument/2006/relationships" xmlns:p="http://schemas.openxmlformats.org/presentationml/2006/main" showMasterSp="0" showMasterPhAnim="0">
+  <p:cSld>
+    <p:spTree>
+      <p:nvGrpSpPr>
+        <p:cNvPr id="1" name="Shape 103"/>
         <p:cNvGrpSpPr/>
         <p:nvPr/>
       </p:nvGrpSpPr>
@@ -818,9 +986,11 @@
       <p:sp>
         <p:nvSpPr>
           <p:cNvPr id="104" name="Google Shape;104;g3dab511c1fa_0_798:notes"/>
-          <p:cNvSpPr/>
+          <p:cNvSpPr>
+            <a:spLocks noGrp="1" noRot="1" noChangeAspect="1"/>
+          </p:cNvSpPr>
           <p:nvPr>
-            <p:ph idx="2" type="sldImg"/>
+            <p:ph type="sldImg" idx="2"/>
           </p:nvPr>
         </p:nvSpPr>
         <p:spPr>
@@ -829,9 +999,13 @@
             <a:ext cx="6096000" cy="3429000"/>
           </a:xfrm>
           <a:custGeom>
-            <a:rect b="b" l="l" r="r" t="t"/>
+            <a:avLst/>
+            <a:gdLst/>
+            <a:ahLst/>
+            <a:cxnLst/>
+            <a:rect l="l" t="t" r="r" b="b"/>
             <a:pathLst>
-              <a:path extrusionOk="0" h="120000" w="120000">
+              <a:path w="120000" h="120000" extrusionOk="0">
                 <a:moveTo>
                   <a:pt x="0" y="0"/>
                 </a:moveTo>
@@ -853,9 +1027,11 @@
       <p:sp>
         <p:nvSpPr>
           <p:cNvPr id="105" name="Google Shape;105;g3dab511c1fa_0_798:notes"/>
-          <p:cNvSpPr txBox="1"/>
+          <p:cNvSpPr txBox="1">
+            <a:spLocks noGrp="1"/>
+          </p:cNvSpPr>
           <p:nvPr>
-            <p:ph idx="1" type="body"/>
+            <p:ph type="body" idx="1"/>
           </p:nvPr>
         </p:nvSpPr>
         <p:spPr>
@@ -868,12 +1044,12 @@
           </a:prstGeom>
         </p:spPr>
         <p:txBody>
-          <a:bodyPr anchorCtr="0" anchor="t" bIns="91425" lIns="91425" spcFirstLastPara="1" rIns="91425" wrap="square" tIns="91425">
+          <a:bodyPr spcFirstLastPara="1" wrap="square" lIns="91425" tIns="91425" rIns="91425" bIns="91425" anchor="t" anchorCtr="0">
             <a:noAutofit/>
           </a:bodyPr>
           <a:lstStyle/>
           <a:p>
-            <a:pPr indent="0" lvl="0" marL="0" rtl="0" algn="l">
+            <a:pPr marL="0" lvl="0" indent="0" algn="l" rtl="0">
               <a:spcBef>
                 <a:spcPts val="0"/>
               </a:spcBef>
@@ -882,9 +1058,6 @@
               </a:spcAft>
               <a:buNone/>
             </a:pPr>
-            <a:r>
-              <a:t/>
-            </a:r>
             <a:endParaRPr/>
           </a:p>
         </p:txBody>
@@ -897,12 +1070,12 @@
 </p:notes>
 </file>
 
-<file path=ppt/notesSlides/notesSlide11.xml><?xml version="1.0" encoding="utf-8"?>
-<p:notes xmlns:a="http://schemas.openxmlformats.org/drawingml/2006/main" xmlns:r="http://schemas.openxmlformats.org/officeDocument/2006/relationships" xmlns:mc="http://schemas.openxmlformats.org/markup-compatibility/2006" xmlns:mv="urn:schemas-microsoft-com:mac:vml" xmlns:p="http://schemas.openxmlformats.org/presentationml/2006/main" xmlns:c="http://schemas.openxmlformats.org/drawingml/2006/chart" xmlns:dgm="http://schemas.openxmlformats.org/drawingml/2006/diagram" xmlns:o="urn:schemas-microsoft-com:office:office" xmlns:v="urn:schemas-microsoft-com:vml" xmlns:pvml="urn:schemas-microsoft-com:office:powerpoint" xmlns:com="http://schemas.openxmlformats.org/drawingml/2006/compatibility" xmlns:p14="http://schemas.microsoft.com/office/powerpoint/2010/main" xmlns:p15="http://schemas.microsoft.com/office/powerpoint/2012/main" xmlns:ahyp="http://schemas.microsoft.com/office/drawing/2018/hyperlinkcolor" showMasterPhAnim="0" showMasterSp="0">
+<file path=ppt/notesSlides/notesSlide12.xml><?xml version="1.0" encoding="utf-8"?>
+<p:notes xmlns:a="http://schemas.openxmlformats.org/drawingml/2006/main" xmlns:r="http://schemas.openxmlformats.org/officeDocument/2006/relationships" xmlns:p="http://schemas.openxmlformats.org/presentationml/2006/main" showMasterSp="0" showMasterPhAnim="0">
   <p:cSld>
     <p:spTree>
       <p:nvGrpSpPr>
-        <p:cNvPr id="111" name="Shape 111"/>
+        <p:cNvPr id="1" name="Shape 111"/>
         <p:cNvGrpSpPr/>
         <p:nvPr/>
       </p:nvGrpSpPr>
@@ -917,9 +1090,11 @@
       <p:sp>
         <p:nvSpPr>
           <p:cNvPr id="112" name="Google Shape;112;g3dab511c1fa_0_47:notes"/>
-          <p:cNvSpPr/>
+          <p:cNvSpPr>
+            <a:spLocks noGrp="1" noRot="1" noChangeAspect="1"/>
+          </p:cNvSpPr>
           <p:nvPr>
-            <p:ph idx="2" type="sldImg"/>
+            <p:ph type="sldImg" idx="2"/>
           </p:nvPr>
         </p:nvSpPr>
         <p:spPr>
@@ -928,9 +1103,13 @@
             <a:ext cx="6096000" cy="3429000"/>
           </a:xfrm>
           <a:custGeom>
-            <a:rect b="b" l="l" r="r" t="t"/>
+            <a:avLst/>
+            <a:gdLst/>
+            <a:ahLst/>
+            <a:cxnLst/>
+            <a:rect l="l" t="t" r="r" b="b"/>
             <a:pathLst>
-              <a:path extrusionOk="0" h="120000" w="120000">
+              <a:path w="120000" h="120000" extrusionOk="0">
                 <a:moveTo>
                   <a:pt x="0" y="0"/>
                 </a:moveTo>
@@ -952,9 +1131,11 @@
       <p:sp>
         <p:nvSpPr>
           <p:cNvPr id="113" name="Google Shape;113;g3dab511c1fa_0_47:notes"/>
-          <p:cNvSpPr txBox="1"/>
+          <p:cNvSpPr txBox="1">
+            <a:spLocks noGrp="1"/>
+          </p:cNvSpPr>
           <p:nvPr>
-            <p:ph idx="1" type="body"/>
+            <p:ph type="body" idx="1"/>
           </p:nvPr>
         </p:nvSpPr>
         <p:spPr>
@@ -967,12 +1148,12 @@
           </a:prstGeom>
         </p:spPr>
         <p:txBody>
-          <a:bodyPr anchorCtr="0" anchor="t" bIns="91425" lIns="91425" spcFirstLastPara="1" rIns="91425" wrap="square" tIns="91425">
+          <a:bodyPr spcFirstLastPara="1" wrap="square" lIns="91425" tIns="91425" rIns="91425" bIns="91425" anchor="t" anchorCtr="0">
             <a:noAutofit/>
           </a:bodyPr>
           <a:lstStyle/>
           <a:p>
-            <a:pPr indent="0" lvl="0" marL="0" rtl="0" algn="l">
+            <a:pPr marL="0" lvl="0" indent="0" algn="l" rtl="0">
               <a:spcBef>
                 <a:spcPts val="0"/>
               </a:spcBef>
@@ -981,9 +1162,6 @@
               </a:spcAft>
               <a:buNone/>
             </a:pPr>
-            <a:r>
-              <a:t/>
-            </a:r>
             <a:endParaRPr/>
           </a:p>
         </p:txBody>
@@ -996,12 +1174,12 @@
 </p:notes>
 </file>
 
-<file path=ppt/notesSlides/notesSlide12.xml><?xml version="1.0" encoding="utf-8"?>
-<p:notes xmlns:a="http://schemas.openxmlformats.org/drawingml/2006/main" xmlns:r="http://schemas.openxmlformats.org/officeDocument/2006/relationships" xmlns:mc="http://schemas.openxmlformats.org/markup-compatibility/2006" xmlns:mv="urn:schemas-microsoft-com:mac:vml" xmlns:p="http://schemas.openxmlformats.org/presentationml/2006/main" xmlns:c="http://schemas.openxmlformats.org/drawingml/2006/chart" xmlns:dgm="http://schemas.openxmlformats.org/drawingml/2006/diagram" xmlns:o="urn:schemas-microsoft-com:office:office" xmlns:v="urn:schemas-microsoft-com:vml" xmlns:pvml="urn:schemas-microsoft-com:office:powerpoint" xmlns:com="http://schemas.openxmlformats.org/drawingml/2006/compatibility" xmlns:p14="http://schemas.microsoft.com/office/powerpoint/2010/main" xmlns:p15="http://schemas.microsoft.com/office/powerpoint/2012/main" xmlns:ahyp="http://schemas.microsoft.com/office/drawing/2018/hyperlinkcolor" showMasterPhAnim="0" showMasterSp="0">
+<file path=ppt/notesSlides/notesSlide13.xml><?xml version="1.0" encoding="utf-8"?>
+<p:notes xmlns:a="http://schemas.openxmlformats.org/drawingml/2006/main" xmlns:r="http://schemas.openxmlformats.org/officeDocument/2006/relationships" xmlns:p="http://schemas.openxmlformats.org/presentationml/2006/main" showMasterSp="0" showMasterPhAnim="0">
   <p:cSld>
     <p:spTree>
       <p:nvGrpSpPr>
-        <p:cNvPr id="116" name="Shape 116"/>
+        <p:cNvPr id="1" name="Shape 116"/>
         <p:cNvGrpSpPr/>
         <p:nvPr/>
       </p:nvGrpSpPr>
@@ -1016,9 +1194,11 @@
       <p:sp>
         <p:nvSpPr>
           <p:cNvPr id="117" name="Google Shape;117;g3dab511c1fa_0_5:notes"/>
-          <p:cNvSpPr/>
+          <p:cNvSpPr>
+            <a:spLocks noGrp="1" noRot="1" noChangeAspect="1"/>
+          </p:cNvSpPr>
           <p:nvPr>
-            <p:ph idx="2" type="sldImg"/>
+            <p:ph type="sldImg" idx="2"/>
           </p:nvPr>
         </p:nvSpPr>
         <p:spPr>
@@ -1027,9 +1207,13 @@
             <a:ext cx="6096000" cy="3429000"/>
           </a:xfrm>
           <a:custGeom>
-            <a:rect b="b" l="l" r="r" t="t"/>
+            <a:avLst/>
+            <a:gdLst/>
+            <a:ahLst/>
+            <a:cxnLst/>
+            <a:rect l="l" t="t" r="r" b="b"/>
             <a:pathLst>
-              <a:path extrusionOk="0" h="120000" w="120000">
+              <a:path w="120000" h="120000" extrusionOk="0">
                 <a:moveTo>
                   <a:pt x="0" y="0"/>
                 </a:moveTo>
@@ -1051,9 +1235,11 @@
       <p:sp>
         <p:nvSpPr>
           <p:cNvPr id="118" name="Google Shape;118;g3dab511c1fa_0_5:notes"/>
-          <p:cNvSpPr txBox="1"/>
+          <p:cNvSpPr txBox="1">
+            <a:spLocks noGrp="1"/>
+          </p:cNvSpPr>
           <p:nvPr>
-            <p:ph idx="1" type="body"/>
+            <p:ph type="body" idx="1"/>
           </p:nvPr>
         </p:nvSpPr>
         <p:spPr>
@@ -1066,12 +1252,12 @@
           </a:prstGeom>
         </p:spPr>
         <p:txBody>
-          <a:bodyPr anchorCtr="0" anchor="t" bIns="91425" lIns="91425" spcFirstLastPara="1" rIns="91425" wrap="square" tIns="91425">
+          <a:bodyPr spcFirstLastPara="1" wrap="square" lIns="91425" tIns="91425" rIns="91425" bIns="91425" anchor="t" anchorCtr="0">
             <a:noAutofit/>
           </a:bodyPr>
           <a:lstStyle/>
           <a:p>
-            <a:pPr indent="0" lvl="0" marL="0" rtl="0" algn="l">
+            <a:pPr marL="0" lvl="0" indent="0" algn="l" rtl="0">
               <a:spcBef>
                 <a:spcPts val="0"/>
               </a:spcBef>
@@ -1080,9 +1266,6 @@
               </a:spcAft>
               <a:buNone/>
             </a:pPr>
-            <a:r>
-              <a:t/>
-            </a:r>
             <a:endParaRPr/>
           </a:p>
         </p:txBody>
@@ -1095,12 +1278,12 @@
 </p:notes>
 </file>
 
-<file path=ppt/notesSlides/notesSlide13.xml><?xml version="1.0" encoding="utf-8"?>
-<p:notes xmlns:a="http://schemas.openxmlformats.org/drawingml/2006/main" xmlns:r="http://schemas.openxmlformats.org/officeDocument/2006/relationships" xmlns:mc="http://schemas.openxmlformats.org/markup-compatibility/2006" xmlns:mv="urn:schemas-microsoft-com:mac:vml" xmlns:p="http://schemas.openxmlformats.org/presentationml/2006/main" xmlns:c="http://schemas.openxmlformats.org/drawingml/2006/chart" xmlns:dgm="http://schemas.openxmlformats.org/drawingml/2006/diagram" xmlns:o="urn:schemas-microsoft-com:office:office" xmlns:v="urn:schemas-microsoft-com:vml" xmlns:pvml="urn:schemas-microsoft-com:office:powerpoint" xmlns:com="http://schemas.openxmlformats.org/drawingml/2006/compatibility" xmlns:p14="http://schemas.microsoft.com/office/powerpoint/2010/main" xmlns:p15="http://schemas.microsoft.com/office/powerpoint/2012/main" xmlns:ahyp="http://schemas.microsoft.com/office/drawing/2018/hyperlinkcolor" showMasterPhAnim="0" showMasterSp="0">
+<file path=ppt/notesSlides/notesSlide14.xml><?xml version="1.0" encoding="utf-8"?>
+<p:notes xmlns:a="http://schemas.openxmlformats.org/drawingml/2006/main" xmlns:r="http://schemas.openxmlformats.org/officeDocument/2006/relationships" xmlns:p="http://schemas.openxmlformats.org/presentationml/2006/main" showMasterSp="0" showMasterPhAnim="0">
   <p:cSld>
     <p:spTree>
       <p:nvGrpSpPr>
-        <p:cNvPr id="122" name="Shape 122"/>
+        <p:cNvPr id="1" name="Shape 122"/>
         <p:cNvGrpSpPr/>
         <p:nvPr/>
       </p:nvGrpSpPr>
@@ -1115,9 +1298,11 @@
       <p:sp>
         <p:nvSpPr>
           <p:cNvPr id="123" name="Google Shape;123;g3dab511c1fa_0_792:notes"/>
-          <p:cNvSpPr/>
+          <p:cNvSpPr>
+            <a:spLocks noGrp="1" noRot="1" noChangeAspect="1"/>
+          </p:cNvSpPr>
           <p:nvPr>
-            <p:ph idx="2" type="sldImg"/>
+            <p:ph type="sldImg" idx="2"/>
           </p:nvPr>
         </p:nvSpPr>
         <p:spPr>
@@ -1126,9 +1311,13 @@
             <a:ext cx="6096000" cy="3429000"/>
           </a:xfrm>
           <a:custGeom>
-            <a:rect b="b" l="l" r="r" t="t"/>
+            <a:avLst/>
+            <a:gdLst/>
+            <a:ahLst/>
+            <a:cxnLst/>
+            <a:rect l="l" t="t" r="r" b="b"/>
             <a:pathLst>
-              <a:path extrusionOk="0" h="120000" w="120000">
+              <a:path w="120000" h="120000" extrusionOk="0">
                 <a:moveTo>
                   <a:pt x="0" y="0"/>
                 </a:moveTo>
@@ -1150,9 +1339,11 @@
       <p:sp>
         <p:nvSpPr>
           <p:cNvPr id="124" name="Google Shape;124;g3dab511c1fa_0_792:notes"/>
-          <p:cNvSpPr txBox="1"/>
+          <p:cNvSpPr txBox="1">
+            <a:spLocks noGrp="1"/>
+          </p:cNvSpPr>
           <p:nvPr>
-            <p:ph idx="1" type="body"/>
+            <p:ph type="body" idx="1"/>
           </p:nvPr>
         </p:nvSpPr>
         <p:spPr>
@@ -1165,12 +1356,12 @@
           </a:prstGeom>
         </p:spPr>
         <p:txBody>
-          <a:bodyPr anchorCtr="0" anchor="t" bIns="91425" lIns="91425" spcFirstLastPara="1" rIns="91425" wrap="square" tIns="91425">
+          <a:bodyPr spcFirstLastPara="1" wrap="square" lIns="91425" tIns="91425" rIns="91425" bIns="91425" anchor="t" anchorCtr="0">
             <a:noAutofit/>
           </a:bodyPr>
           <a:lstStyle/>
           <a:p>
-            <a:pPr indent="0" lvl="0" marL="0" rtl="0" algn="l">
+            <a:pPr marL="0" lvl="0" indent="0" algn="l" rtl="0">
               <a:spcBef>
                 <a:spcPts val="0"/>
               </a:spcBef>
@@ -1179,9 +1370,6 @@
               </a:spcAft>
               <a:buNone/>
             </a:pPr>
-            <a:r>
-              <a:t/>
-            </a:r>
             <a:endParaRPr/>
           </a:p>
         </p:txBody>
@@ -1194,12 +1382,116 @@
 </p:notes>
 </file>
 
-<file path=ppt/notesSlides/notesSlide14.xml><?xml version="1.0" encoding="utf-8"?>
-<p:notes xmlns:a="http://schemas.openxmlformats.org/drawingml/2006/main" xmlns:r="http://schemas.openxmlformats.org/officeDocument/2006/relationships" xmlns:mc="http://schemas.openxmlformats.org/markup-compatibility/2006" xmlns:mv="urn:schemas-microsoft-com:mac:vml" xmlns:p="http://schemas.openxmlformats.org/presentationml/2006/main" xmlns:c="http://schemas.openxmlformats.org/drawingml/2006/chart" xmlns:dgm="http://schemas.openxmlformats.org/drawingml/2006/diagram" xmlns:o="urn:schemas-microsoft-com:office:office" xmlns:v="urn:schemas-microsoft-com:vml" xmlns:pvml="urn:schemas-microsoft-com:office:powerpoint" xmlns:com="http://schemas.openxmlformats.org/drawingml/2006/compatibility" xmlns:p14="http://schemas.microsoft.com/office/powerpoint/2010/main" xmlns:p15="http://schemas.microsoft.com/office/powerpoint/2012/main" xmlns:ahyp="http://schemas.microsoft.com/office/drawing/2018/hyperlinkcolor" showMasterPhAnim="0" showMasterSp="0">
+<file path=ppt/notesSlides/notesSlide2.xml><?xml version="1.0" encoding="utf-8"?>
+<p:notes xmlns:a="http://schemas.openxmlformats.org/drawingml/2006/main" xmlns:r="http://schemas.openxmlformats.org/officeDocument/2006/relationships" xmlns:p="http://schemas.openxmlformats.org/presentationml/2006/main" showMasterSp="0" showMasterPhAnim="0">
   <p:cSld>
     <p:spTree>
       <p:nvGrpSpPr>
-        <p:cNvPr id="128" name="Shape 128"/>
+        <p:cNvPr id="1" name="Shape 56"/>
+        <p:cNvGrpSpPr/>
+        <p:nvPr/>
+      </p:nvGrpSpPr>
+      <p:grpSpPr>
+        <a:xfrm>
+          <a:off x="0" y="0"/>
+          <a:ext cx="0" cy="0"/>
+          <a:chOff x="0" y="0"/>
+          <a:chExt cx="0" cy="0"/>
+        </a:xfrm>
+      </p:grpSpPr>
+      <p:sp>
+        <p:nvSpPr>
+          <p:cNvPr id="57" name="Google Shape;57;g3dab511c1fa_0_30:notes"/>
+          <p:cNvSpPr>
+            <a:spLocks noGrp="1" noRot="1" noChangeAspect="1"/>
+          </p:cNvSpPr>
+          <p:nvPr>
+            <p:ph type="sldImg" idx="2"/>
+          </p:nvPr>
+        </p:nvSpPr>
+        <p:spPr>
+          <a:xfrm>
+            <a:off x="381300" y="685800"/>
+            <a:ext cx="6096000" cy="3429000"/>
+          </a:xfrm>
+          <a:custGeom>
+            <a:avLst/>
+            <a:gdLst/>
+            <a:ahLst/>
+            <a:cxnLst/>
+            <a:rect l="l" t="t" r="r" b="b"/>
+            <a:pathLst>
+              <a:path w="120000" h="120000" extrusionOk="0">
+                <a:moveTo>
+                  <a:pt x="0" y="0"/>
+                </a:moveTo>
+                <a:lnTo>
+                  <a:pt x="120000" y="0"/>
+                </a:lnTo>
+                <a:lnTo>
+                  <a:pt x="120000" y="120000"/>
+                </a:lnTo>
+                <a:lnTo>
+                  <a:pt x="0" y="120000"/>
+                </a:lnTo>
+                <a:close/>
+              </a:path>
+            </a:pathLst>
+          </a:custGeom>
+        </p:spPr>
+      </p:sp>
+      <p:sp>
+        <p:nvSpPr>
+          <p:cNvPr id="58" name="Google Shape;58;g3dab511c1fa_0_30:notes"/>
+          <p:cNvSpPr txBox="1">
+            <a:spLocks noGrp="1"/>
+          </p:cNvSpPr>
+          <p:nvPr>
+            <p:ph type="body" idx="1"/>
+          </p:nvPr>
+        </p:nvSpPr>
+        <p:spPr>
+          <a:xfrm>
+            <a:off x="685800" y="4343400"/>
+            <a:ext cx="5486400" cy="4114800"/>
+          </a:xfrm>
+          <a:prstGeom prst="rect">
+            <a:avLst/>
+          </a:prstGeom>
+        </p:spPr>
+        <p:txBody>
+          <a:bodyPr spcFirstLastPara="1" wrap="square" lIns="91425" tIns="91425" rIns="91425" bIns="91425" anchor="t" anchorCtr="0">
+            <a:noAutofit/>
+          </a:bodyPr>
+          <a:lstStyle/>
+          <a:p>
+            <a:pPr marL="0" lvl="0" indent="0" algn="l" rtl="0">
+              <a:spcBef>
+                <a:spcPts val="0"/>
+              </a:spcBef>
+              <a:spcAft>
+                <a:spcPts val="0"/>
+              </a:spcAft>
+              <a:buNone/>
+            </a:pPr>
+            <a:endParaRPr/>
+          </a:p>
+        </p:txBody>
+      </p:sp>
+    </p:spTree>
+  </p:cSld>
+  <p:clrMapOvr>
+    <a:masterClrMapping/>
+  </p:clrMapOvr>
+</p:notes>
+</file>
+
+<file path=ppt/notesSlides/notesSlide3.xml><?xml version="1.0" encoding="utf-8"?>
+<p:notes xmlns:a="http://schemas.openxmlformats.org/drawingml/2006/main" xmlns:r="http://schemas.openxmlformats.org/officeDocument/2006/relationships" xmlns:p="http://schemas.openxmlformats.org/presentationml/2006/main" showMasterSp="0" showMasterPhAnim="0">
+  <p:cSld>
+    <p:spTree>
+      <p:nvGrpSpPr>
+        <p:cNvPr id="1" name="Shape 128"/>
         <p:cNvGrpSpPr/>
         <p:nvPr/>
       </p:nvGrpSpPr>
@@ -1214,20 +1506,26 @@
       <p:sp>
         <p:nvSpPr>
           <p:cNvPr id="129" name="Google Shape;129;g3dab511c1fa_0_51:notes"/>
-          <p:cNvSpPr/>
+          <p:cNvSpPr>
+            <a:spLocks noGrp="1" noRot="1" noChangeAspect="1"/>
+          </p:cNvSpPr>
           <p:nvPr>
-            <p:ph idx="2" type="sldImg"/>
+            <p:ph type="sldImg" idx="2"/>
           </p:nvPr>
         </p:nvSpPr>
         <p:spPr>
           <a:xfrm>
-            <a:off x="381300" y="685800"/>
+            <a:off x="381000" y="685800"/>
             <a:ext cx="6096000" cy="3429000"/>
           </a:xfrm>
           <a:custGeom>
-            <a:rect b="b" l="l" r="r" t="t"/>
+            <a:avLst/>
+            <a:gdLst/>
+            <a:ahLst/>
+            <a:cxnLst/>
+            <a:rect l="l" t="t" r="r" b="b"/>
             <a:pathLst>
-              <a:path extrusionOk="0" h="120000" w="120000">
+              <a:path w="120000" h="120000" extrusionOk="0">
                 <a:moveTo>
                   <a:pt x="0" y="0"/>
                 </a:moveTo>
@@ -1249,9 +1547,11 @@
       <p:sp>
         <p:nvSpPr>
           <p:cNvPr id="130" name="Google Shape;130;g3dab511c1fa_0_51:notes"/>
-          <p:cNvSpPr txBox="1"/>
+          <p:cNvSpPr txBox="1">
+            <a:spLocks noGrp="1"/>
+          </p:cNvSpPr>
           <p:nvPr>
-            <p:ph idx="1" type="body"/>
+            <p:ph type="body" idx="1"/>
           </p:nvPr>
         </p:nvSpPr>
         <p:spPr>
@@ -1264,12 +1564,12 @@
           </a:prstGeom>
         </p:spPr>
         <p:txBody>
-          <a:bodyPr anchorCtr="0" anchor="t" bIns="91425" lIns="91425" spcFirstLastPara="1" rIns="91425" wrap="square" tIns="91425">
+          <a:bodyPr spcFirstLastPara="1" wrap="square" lIns="91425" tIns="91425" rIns="91425" bIns="91425" anchor="t" anchorCtr="0">
             <a:noAutofit/>
           </a:bodyPr>
           <a:lstStyle/>
           <a:p>
-            <a:pPr indent="0" lvl="0" marL="0" rtl="0" algn="l">
+            <a:pPr marL="0" lvl="0" indent="0" algn="l" rtl="0">
               <a:spcBef>
                 <a:spcPts val="0"/>
               </a:spcBef>
@@ -1278,9 +1578,6 @@
               </a:spcAft>
               <a:buNone/>
             </a:pPr>
-            <a:r>
-              <a:t/>
-            </a:r>
             <a:endParaRPr/>
           </a:p>
         </p:txBody>
@@ -1293,111 +1590,12 @@
 </p:notes>
 </file>
 
-<file path=ppt/notesSlides/notesSlide2.xml><?xml version="1.0" encoding="utf-8"?>
-<p:notes xmlns:a="http://schemas.openxmlformats.org/drawingml/2006/main" xmlns:r="http://schemas.openxmlformats.org/officeDocument/2006/relationships" xmlns:mc="http://schemas.openxmlformats.org/markup-compatibility/2006" xmlns:mv="urn:schemas-microsoft-com:mac:vml" xmlns:p="http://schemas.openxmlformats.org/presentationml/2006/main" xmlns:c="http://schemas.openxmlformats.org/drawingml/2006/chart" xmlns:dgm="http://schemas.openxmlformats.org/drawingml/2006/diagram" xmlns:o="urn:schemas-microsoft-com:office:office" xmlns:v="urn:schemas-microsoft-com:vml" xmlns:pvml="urn:schemas-microsoft-com:office:powerpoint" xmlns:com="http://schemas.openxmlformats.org/drawingml/2006/compatibility" xmlns:p14="http://schemas.microsoft.com/office/powerpoint/2010/main" xmlns:p15="http://schemas.microsoft.com/office/powerpoint/2012/main" xmlns:ahyp="http://schemas.microsoft.com/office/drawing/2018/hyperlinkcolor" showMasterPhAnim="0" showMasterSp="0">
+<file path=ppt/notesSlides/notesSlide4.xml><?xml version="1.0" encoding="utf-8"?>
+<p:notes xmlns:a="http://schemas.openxmlformats.org/drawingml/2006/main" xmlns:r="http://schemas.openxmlformats.org/officeDocument/2006/relationships" xmlns:p="http://schemas.openxmlformats.org/presentationml/2006/main" showMasterSp="0" showMasterPhAnim="0">
   <p:cSld>
     <p:spTree>
       <p:nvGrpSpPr>
-        <p:cNvPr id="56" name="Shape 56"/>
-        <p:cNvGrpSpPr/>
-        <p:nvPr/>
-      </p:nvGrpSpPr>
-      <p:grpSpPr>
-        <a:xfrm>
-          <a:off x="0" y="0"/>
-          <a:ext cx="0" cy="0"/>
-          <a:chOff x="0" y="0"/>
-          <a:chExt cx="0" cy="0"/>
-        </a:xfrm>
-      </p:grpSpPr>
-      <p:sp>
-        <p:nvSpPr>
-          <p:cNvPr id="57" name="Google Shape;57;g3dab511c1fa_0_30:notes"/>
-          <p:cNvSpPr/>
-          <p:nvPr>
-            <p:ph idx="2" type="sldImg"/>
-          </p:nvPr>
-        </p:nvSpPr>
-        <p:spPr>
-          <a:xfrm>
-            <a:off x="381300" y="685800"/>
-            <a:ext cx="6096000" cy="3429000"/>
-          </a:xfrm>
-          <a:custGeom>
-            <a:rect b="b" l="l" r="r" t="t"/>
-            <a:pathLst>
-              <a:path extrusionOk="0" h="120000" w="120000">
-                <a:moveTo>
-                  <a:pt x="0" y="0"/>
-                </a:moveTo>
-                <a:lnTo>
-                  <a:pt x="120000" y="0"/>
-                </a:lnTo>
-                <a:lnTo>
-                  <a:pt x="120000" y="120000"/>
-                </a:lnTo>
-                <a:lnTo>
-                  <a:pt x="0" y="120000"/>
-                </a:lnTo>
-                <a:close/>
-              </a:path>
-            </a:pathLst>
-          </a:custGeom>
-        </p:spPr>
-      </p:sp>
-      <p:sp>
-        <p:nvSpPr>
-          <p:cNvPr id="58" name="Google Shape;58;g3dab511c1fa_0_30:notes"/>
-          <p:cNvSpPr txBox="1"/>
-          <p:nvPr>
-            <p:ph idx="1" type="body"/>
-          </p:nvPr>
-        </p:nvSpPr>
-        <p:spPr>
-          <a:xfrm>
-            <a:off x="685800" y="4343400"/>
-            <a:ext cx="5486400" cy="4114800"/>
-          </a:xfrm>
-          <a:prstGeom prst="rect">
-            <a:avLst/>
-          </a:prstGeom>
-        </p:spPr>
-        <p:txBody>
-          <a:bodyPr anchorCtr="0" anchor="t" bIns="91425" lIns="91425" spcFirstLastPara="1" rIns="91425" wrap="square" tIns="91425">
-            <a:noAutofit/>
-          </a:bodyPr>
-          <a:lstStyle/>
-          <a:p>
-            <a:pPr indent="0" lvl="0" marL="0" rtl="0" algn="l">
-              <a:spcBef>
-                <a:spcPts val="0"/>
-              </a:spcBef>
-              <a:spcAft>
-                <a:spcPts val="0"/>
-              </a:spcAft>
-              <a:buNone/>
-            </a:pPr>
-            <a:r>
-              <a:t/>
-            </a:r>
-            <a:endParaRPr/>
-          </a:p>
-        </p:txBody>
-      </p:sp>
-    </p:spTree>
-  </p:cSld>
-  <p:clrMapOvr>
-    <a:masterClrMapping/>
-  </p:clrMapOvr>
-</p:notes>
-</file>
-
-<file path=ppt/notesSlides/notesSlide3.xml><?xml version="1.0" encoding="utf-8"?>
-<p:notes xmlns:a="http://schemas.openxmlformats.org/drawingml/2006/main" xmlns:r="http://schemas.openxmlformats.org/officeDocument/2006/relationships" xmlns:mc="http://schemas.openxmlformats.org/markup-compatibility/2006" xmlns:mv="urn:schemas-microsoft-com:mac:vml" xmlns:p="http://schemas.openxmlformats.org/presentationml/2006/main" xmlns:c="http://schemas.openxmlformats.org/drawingml/2006/chart" xmlns:dgm="http://schemas.openxmlformats.org/drawingml/2006/diagram" xmlns:o="urn:schemas-microsoft-com:office:office" xmlns:v="urn:schemas-microsoft-com:vml" xmlns:pvml="urn:schemas-microsoft-com:office:powerpoint" xmlns:com="http://schemas.openxmlformats.org/drawingml/2006/compatibility" xmlns:p14="http://schemas.microsoft.com/office/powerpoint/2010/main" xmlns:p15="http://schemas.microsoft.com/office/powerpoint/2012/main" xmlns:ahyp="http://schemas.microsoft.com/office/drawing/2018/hyperlinkcolor" showMasterPhAnim="0" showMasterSp="0">
-  <p:cSld>
-    <p:spTree>
-      <p:nvGrpSpPr>
-        <p:cNvPr id="61" name="Shape 61"/>
+        <p:cNvPr id="1" name="Shape 61"/>
         <p:cNvGrpSpPr/>
         <p:nvPr/>
       </p:nvGrpSpPr>
@@ -1412,9 +1610,11 @@
       <p:sp>
         <p:nvSpPr>
           <p:cNvPr id="62" name="Google Shape;62;g3dab511c1fa_0_35:notes"/>
-          <p:cNvSpPr/>
+          <p:cNvSpPr>
+            <a:spLocks noGrp="1" noRot="1" noChangeAspect="1"/>
+          </p:cNvSpPr>
           <p:nvPr>
-            <p:ph idx="2" type="sldImg"/>
+            <p:ph type="sldImg" idx="2"/>
           </p:nvPr>
         </p:nvSpPr>
         <p:spPr>
@@ -1423,9 +1623,13 @@
             <a:ext cx="6096000" cy="3429000"/>
           </a:xfrm>
           <a:custGeom>
-            <a:rect b="b" l="l" r="r" t="t"/>
+            <a:avLst/>
+            <a:gdLst/>
+            <a:ahLst/>
+            <a:cxnLst/>
+            <a:rect l="l" t="t" r="r" b="b"/>
             <a:pathLst>
-              <a:path extrusionOk="0" h="120000" w="120000">
+              <a:path w="120000" h="120000" extrusionOk="0">
                 <a:moveTo>
                   <a:pt x="0" y="0"/>
                 </a:moveTo>
@@ -1447,9 +1651,11 @@
       <p:sp>
         <p:nvSpPr>
           <p:cNvPr id="63" name="Google Shape;63;g3dab511c1fa_0_35:notes"/>
-          <p:cNvSpPr txBox="1"/>
+          <p:cNvSpPr txBox="1">
+            <a:spLocks noGrp="1"/>
+          </p:cNvSpPr>
           <p:nvPr>
-            <p:ph idx="1" type="body"/>
+            <p:ph type="body" idx="1"/>
           </p:nvPr>
         </p:nvSpPr>
         <p:spPr>
@@ -1462,12 +1668,12 @@
           </a:prstGeom>
         </p:spPr>
         <p:txBody>
-          <a:bodyPr anchorCtr="0" anchor="t" bIns="91425" lIns="91425" spcFirstLastPara="1" rIns="91425" wrap="square" tIns="91425">
+          <a:bodyPr spcFirstLastPara="1" wrap="square" lIns="91425" tIns="91425" rIns="91425" bIns="91425" anchor="t" anchorCtr="0">
             <a:noAutofit/>
           </a:bodyPr>
           <a:lstStyle/>
           <a:p>
-            <a:pPr indent="0" lvl="0" marL="0" rtl="0" algn="l">
+            <a:pPr marL="0" lvl="0" indent="0" algn="l" rtl="0">
               <a:spcBef>
                 <a:spcPts val="0"/>
               </a:spcBef>
@@ -1476,9 +1682,6 @@
               </a:spcAft>
               <a:buNone/>
             </a:pPr>
-            <a:r>
-              <a:t/>
-            </a:r>
             <a:endParaRPr/>
           </a:p>
         </p:txBody>
@@ -1491,12 +1694,12 @@
 </p:notes>
 </file>
 
-<file path=ppt/notesSlides/notesSlide4.xml><?xml version="1.0" encoding="utf-8"?>
-<p:notes xmlns:a="http://schemas.openxmlformats.org/drawingml/2006/main" xmlns:r="http://schemas.openxmlformats.org/officeDocument/2006/relationships" xmlns:mc="http://schemas.openxmlformats.org/markup-compatibility/2006" xmlns:mv="urn:schemas-microsoft-com:mac:vml" xmlns:p="http://schemas.openxmlformats.org/presentationml/2006/main" xmlns:c="http://schemas.openxmlformats.org/drawingml/2006/chart" xmlns:dgm="http://schemas.openxmlformats.org/drawingml/2006/diagram" xmlns:o="urn:schemas-microsoft-com:office:office" xmlns:v="urn:schemas-microsoft-com:vml" xmlns:pvml="urn:schemas-microsoft-com:office:powerpoint" xmlns:com="http://schemas.openxmlformats.org/drawingml/2006/compatibility" xmlns:p14="http://schemas.microsoft.com/office/powerpoint/2010/main" xmlns:p15="http://schemas.microsoft.com/office/powerpoint/2012/main" xmlns:ahyp="http://schemas.microsoft.com/office/drawing/2018/hyperlinkcolor" showMasterPhAnim="0" showMasterSp="0">
+<file path=ppt/notesSlides/notesSlide5.xml><?xml version="1.0" encoding="utf-8"?>
+<p:notes xmlns:a="http://schemas.openxmlformats.org/drawingml/2006/main" xmlns:r="http://schemas.openxmlformats.org/officeDocument/2006/relationships" xmlns:p="http://schemas.openxmlformats.org/presentationml/2006/main" showMasterSp="0" showMasterPhAnim="0">
   <p:cSld>
     <p:spTree>
       <p:nvGrpSpPr>
-        <p:cNvPr id="66" name="Shape 66"/>
+        <p:cNvPr id="1" name="Shape 66"/>
         <p:cNvGrpSpPr/>
         <p:nvPr/>
       </p:nvGrpSpPr>
@@ -1511,20 +1714,26 @@
       <p:sp>
         <p:nvSpPr>
           <p:cNvPr id="67" name="Google Shape;67;g3dab511c1fa_0_10:notes"/>
-          <p:cNvSpPr/>
+          <p:cNvSpPr>
+            <a:spLocks noGrp="1" noRot="1" noChangeAspect="1"/>
+          </p:cNvSpPr>
           <p:nvPr>
-            <p:ph idx="2" type="sldImg"/>
+            <p:ph type="sldImg" idx="2"/>
           </p:nvPr>
         </p:nvSpPr>
         <p:spPr>
           <a:xfrm>
-            <a:off x="381300" y="685800"/>
+            <a:off x="381000" y="685800"/>
             <a:ext cx="6096000" cy="3429000"/>
           </a:xfrm>
           <a:custGeom>
-            <a:rect b="b" l="l" r="r" t="t"/>
+            <a:avLst/>
+            <a:gdLst/>
+            <a:ahLst/>
+            <a:cxnLst/>
+            <a:rect l="l" t="t" r="r" b="b"/>
             <a:pathLst>
-              <a:path extrusionOk="0" h="120000" w="120000">
+              <a:path w="120000" h="120000" extrusionOk="0">
                 <a:moveTo>
                   <a:pt x="0" y="0"/>
                 </a:moveTo>
@@ -1546,9 +1755,11 @@
       <p:sp>
         <p:nvSpPr>
           <p:cNvPr id="68" name="Google Shape;68;g3dab511c1fa_0_10:notes"/>
-          <p:cNvSpPr txBox="1"/>
+          <p:cNvSpPr txBox="1">
+            <a:spLocks noGrp="1"/>
+          </p:cNvSpPr>
           <p:nvPr>
-            <p:ph idx="1" type="body"/>
+            <p:ph type="body" idx="1"/>
           </p:nvPr>
         </p:nvSpPr>
         <p:spPr>
@@ -1561,12 +1772,12 @@
           </a:prstGeom>
         </p:spPr>
         <p:txBody>
-          <a:bodyPr anchorCtr="0" anchor="t" bIns="91425" lIns="91425" spcFirstLastPara="1" rIns="91425" wrap="square" tIns="91425">
+          <a:bodyPr spcFirstLastPara="1" wrap="square" lIns="91425" tIns="91425" rIns="91425" bIns="91425" anchor="t" anchorCtr="0">
             <a:noAutofit/>
           </a:bodyPr>
           <a:lstStyle/>
           <a:p>
-            <a:pPr indent="0" lvl="0" marL="0" rtl="0" algn="l">
+            <a:pPr marL="0" lvl="0" indent="0" algn="l" rtl="0">
               <a:spcBef>
                 <a:spcPts val="0"/>
               </a:spcBef>
@@ -1575,9 +1786,6 @@
               </a:spcAft>
               <a:buNone/>
             </a:pPr>
-            <a:r>
-              <a:t/>
-            </a:r>
             <a:endParaRPr/>
           </a:p>
         </p:txBody>
@@ -1590,12 +1798,12 @@
 </p:notes>
 </file>
 
-<file path=ppt/notesSlides/notesSlide5.xml><?xml version="1.0" encoding="utf-8"?>
-<p:notes xmlns:a="http://schemas.openxmlformats.org/drawingml/2006/main" xmlns:r="http://schemas.openxmlformats.org/officeDocument/2006/relationships" xmlns:mc="http://schemas.openxmlformats.org/markup-compatibility/2006" xmlns:mv="urn:schemas-microsoft-com:mac:vml" xmlns:p="http://schemas.openxmlformats.org/presentationml/2006/main" xmlns:c="http://schemas.openxmlformats.org/drawingml/2006/chart" xmlns:dgm="http://schemas.openxmlformats.org/drawingml/2006/diagram" xmlns:o="urn:schemas-microsoft-com:office:office" xmlns:v="urn:schemas-microsoft-com:vml" xmlns:pvml="urn:schemas-microsoft-com:office:powerpoint" xmlns:com="http://schemas.openxmlformats.org/drawingml/2006/compatibility" xmlns:p14="http://schemas.microsoft.com/office/powerpoint/2010/main" xmlns:p15="http://schemas.microsoft.com/office/powerpoint/2012/main" xmlns:ahyp="http://schemas.microsoft.com/office/drawing/2018/hyperlinkcolor" showMasterPhAnim="0" showMasterSp="0">
+<file path=ppt/notesSlides/notesSlide6.xml><?xml version="1.0" encoding="utf-8"?>
+<p:notes xmlns:a="http://schemas.openxmlformats.org/drawingml/2006/main" xmlns:r="http://schemas.openxmlformats.org/officeDocument/2006/relationships" xmlns:p="http://schemas.openxmlformats.org/presentationml/2006/main" showMasterSp="0" showMasterPhAnim="0">
   <p:cSld>
     <p:spTree>
       <p:nvGrpSpPr>
-        <p:cNvPr id="73" name="Shape 73"/>
+        <p:cNvPr id="1" name="Shape 73"/>
         <p:cNvGrpSpPr/>
         <p:nvPr/>
       </p:nvGrpSpPr>
@@ -1610,9 +1818,11 @@
       <p:sp>
         <p:nvSpPr>
           <p:cNvPr id="74" name="Google Shape;74;g3dab511c1fa_0_806:notes"/>
-          <p:cNvSpPr/>
+          <p:cNvSpPr>
+            <a:spLocks noGrp="1" noRot="1" noChangeAspect="1"/>
+          </p:cNvSpPr>
           <p:nvPr>
-            <p:ph idx="2" type="sldImg"/>
+            <p:ph type="sldImg" idx="2"/>
           </p:nvPr>
         </p:nvSpPr>
         <p:spPr>
@@ -1621,9 +1831,13 @@
             <a:ext cx="6096000" cy="3429000"/>
           </a:xfrm>
           <a:custGeom>
-            <a:rect b="b" l="l" r="r" t="t"/>
+            <a:avLst/>
+            <a:gdLst/>
+            <a:ahLst/>
+            <a:cxnLst/>
+            <a:rect l="l" t="t" r="r" b="b"/>
             <a:pathLst>
-              <a:path extrusionOk="0" h="120000" w="120000">
+              <a:path w="120000" h="120000" extrusionOk="0">
                 <a:moveTo>
                   <a:pt x="0" y="0"/>
                 </a:moveTo>
@@ -1645,9 +1859,11 @@
       <p:sp>
         <p:nvSpPr>
           <p:cNvPr id="75" name="Google Shape;75;g3dab511c1fa_0_806:notes"/>
-          <p:cNvSpPr txBox="1"/>
+          <p:cNvSpPr txBox="1">
+            <a:spLocks noGrp="1"/>
+          </p:cNvSpPr>
           <p:nvPr>
-            <p:ph idx="1" type="body"/>
+            <p:ph type="body" idx="1"/>
           </p:nvPr>
         </p:nvSpPr>
         <p:spPr>
@@ -1660,12 +1876,12 @@
           </a:prstGeom>
         </p:spPr>
         <p:txBody>
-          <a:bodyPr anchorCtr="0" anchor="t" bIns="91425" lIns="91425" spcFirstLastPara="1" rIns="91425" wrap="square" tIns="91425">
+          <a:bodyPr spcFirstLastPara="1" wrap="square" lIns="91425" tIns="91425" rIns="91425" bIns="91425" anchor="t" anchorCtr="0">
             <a:noAutofit/>
           </a:bodyPr>
           <a:lstStyle/>
           <a:p>
-            <a:pPr indent="0" lvl="0" marL="0" rtl="0" algn="l">
+            <a:pPr marL="0" lvl="0" indent="0" algn="l" rtl="0">
               <a:spcBef>
                 <a:spcPts val="0"/>
               </a:spcBef>
@@ -1674,9 +1890,6 @@
               </a:spcAft>
               <a:buNone/>
             </a:pPr>
-            <a:r>
-              <a:t/>
-            </a:r>
             <a:endParaRPr/>
           </a:p>
         </p:txBody>
@@ -1689,12 +1902,12 @@
 </p:notes>
 </file>
 
-<file path=ppt/notesSlides/notesSlide6.xml><?xml version="1.0" encoding="utf-8"?>
-<p:notes xmlns:a="http://schemas.openxmlformats.org/drawingml/2006/main" xmlns:r="http://schemas.openxmlformats.org/officeDocument/2006/relationships" xmlns:mc="http://schemas.openxmlformats.org/markup-compatibility/2006" xmlns:mv="urn:schemas-microsoft-com:mac:vml" xmlns:p="http://schemas.openxmlformats.org/presentationml/2006/main" xmlns:c="http://schemas.openxmlformats.org/drawingml/2006/chart" xmlns:dgm="http://schemas.openxmlformats.org/drawingml/2006/diagram" xmlns:o="urn:schemas-microsoft-com:office:office" xmlns:v="urn:schemas-microsoft-com:vml" xmlns:pvml="urn:schemas-microsoft-com:office:powerpoint" xmlns:com="http://schemas.openxmlformats.org/drawingml/2006/compatibility" xmlns:p14="http://schemas.microsoft.com/office/powerpoint/2010/main" xmlns:p15="http://schemas.microsoft.com/office/powerpoint/2012/main" xmlns:ahyp="http://schemas.microsoft.com/office/drawing/2018/hyperlinkcolor" showMasterPhAnim="0" showMasterSp="0">
+<file path=ppt/notesSlides/notesSlide7.xml><?xml version="1.0" encoding="utf-8"?>
+<p:notes xmlns:a="http://schemas.openxmlformats.org/drawingml/2006/main" xmlns:r="http://schemas.openxmlformats.org/officeDocument/2006/relationships" xmlns:p="http://schemas.openxmlformats.org/presentationml/2006/main" showMasterSp="0" showMasterPhAnim="0">
   <p:cSld>
     <p:spTree>
       <p:nvGrpSpPr>
-        <p:cNvPr id="79" name="Shape 79"/>
+        <p:cNvPr id="1" name="Shape 79"/>
         <p:cNvGrpSpPr/>
         <p:nvPr/>
       </p:nvGrpSpPr>
@@ -1709,9 +1922,11 @@
       <p:sp>
         <p:nvSpPr>
           <p:cNvPr id="80" name="Google Shape;80;g3dab511c1fa_0_39:notes"/>
-          <p:cNvSpPr/>
+          <p:cNvSpPr>
+            <a:spLocks noGrp="1" noRot="1" noChangeAspect="1"/>
+          </p:cNvSpPr>
           <p:nvPr>
-            <p:ph idx="2" type="sldImg"/>
+            <p:ph type="sldImg" idx="2"/>
           </p:nvPr>
         </p:nvSpPr>
         <p:spPr>
@@ -1720,9 +1935,13 @@
             <a:ext cx="6096000" cy="3429000"/>
           </a:xfrm>
           <a:custGeom>
-            <a:rect b="b" l="l" r="r" t="t"/>
+            <a:avLst/>
+            <a:gdLst/>
+            <a:ahLst/>
+            <a:cxnLst/>
+            <a:rect l="l" t="t" r="r" b="b"/>
             <a:pathLst>
-              <a:path extrusionOk="0" h="120000" w="120000">
+              <a:path w="120000" h="120000" extrusionOk="0">
                 <a:moveTo>
                   <a:pt x="0" y="0"/>
                 </a:moveTo>
@@ -1744,9 +1963,11 @@
       <p:sp>
         <p:nvSpPr>
           <p:cNvPr id="81" name="Google Shape;81;g3dab511c1fa_0_39:notes"/>
-          <p:cNvSpPr txBox="1"/>
+          <p:cNvSpPr txBox="1">
+            <a:spLocks noGrp="1"/>
+          </p:cNvSpPr>
           <p:nvPr>
-            <p:ph idx="1" type="body"/>
+            <p:ph type="body" idx="1"/>
           </p:nvPr>
         </p:nvSpPr>
         <p:spPr>
@@ -1759,12 +1980,12 @@
           </a:prstGeom>
         </p:spPr>
         <p:txBody>
-          <a:bodyPr anchorCtr="0" anchor="t" bIns="91425" lIns="91425" spcFirstLastPara="1" rIns="91425" wrap="square" tIns="91425">
+          <a:bodyPr spcFirstLastPara="1" wrap="square" lIns="91425" tIns="91425" rIns="91425" bIns="91425" anchor="t" anchorCtr="0">
             <a:noAutofit/>
           </a:bodyPr>
           <a:lstStyle/>
           <a:p>
-            <a:pPr indent="0" lvl="0" marL="0" rtl="0" algn="l">
+            <a:pPr marL="0" lvl="0" indent="0" algn="l" rtl="0">
               <a:spcBef>
                 <a:spcPts val="0"/>
               </a:spcBef>
@@ -1773,9 +1994,6 @@
               </a:spcAft>
               <a:buNone/>
             </a:pPr>
-            <a:r>
-              <a:t/>
-            </a:r>
             <a:endParaRPr/>
           </a:p>
         </p:txBody>
@@ -1788,12 +2006,12 @@
 </p:notes>
 </file>
 
-<file path=ppt/notesSlides/notesSlide7.xml><?xml version="1.0" encoding="utf-8"?>
-<p:notes xmlns:a="http://schemas.openxmlformats.org/drawingml/2006/main" xmlns:r="http://schemas.openxmlformats.org/officeDocument/2006/relationships" xmlns:mc="http://schemas.openxmlformats.org/markup-compatibility/2006" xmlns:mv="urn:schemas-microsoft-com:mac:vml" xmlns:p="http://schemas.openxmlformats.org/presentationml/2006/main" xmlns:c="http://schemas.openxmlformats.org/drawingml/2006/chart" xmlns:dgm="http://schemas.openxmlformats.org/drawingml/2006/diagram" xmlns:o="urn:schemas-microsoft-com:office:office" xmlns:v="urn:schemas-microsoft-com:vml" xmlns:pvml="urn:schemas-microsoft-com:office:powerpoint" xmlns:com="http://schemas.openxmlformats.org/drawingml/2006/compatibility" xmlns:p14="http://schemas.microsoft.com/office/powerpoint/2010/main" xmlns:p15="http://schemas.microsoft.com/office/powerpoint/2012/main" xmlns:ahyp="http://schemas.microsoft.com/office/drawing/2018/hyperlinkcolor" showMasterPhAnim="0" showMasterSp="0">
+<file path=ppt/notesSlides/notesSlide8.xml><?xml version="1.0" encoding="utf-8"?>
+<p:notes xmlns:a="http://schemas.openxmlformats.org/drawingml/2006/main" xmlns:r="http://schemas.openxmlformats.org/officeDocument/2006/relationships" xmlns:p="http://schemas.openxmlformats.org/presentationml/2006/main" showMasterSp="0" showMasterPhAnim="0">
   <p:cSld>
     <p:spTree>
       <p:nvGrpSpPr>
-        <p:cNvPr id="84" name="Shape 84"/>
+        <p:cNvPr id="1" name="Shape 84"/>
         <p:cNvGrpSpPr/>
         <p:nvPr/>
       </p:nvGrpSpPr>
@@ -1808,9 +2026,11 @@
       <p:sp>
         <p:nvSpPr>
           <p:cNvPr id="85" name="Google Shape;85;g3dab511c1fa_0_0:notes"/>
-          <p:cNvSpPr/>
+          <p:cNvSpPr>
+            <a:spLocks noGrp="1" noRot="1" noChangeAspect="1"/>
+          </p:cNvSpPr>
           <p:nvPr>
-            <p:ph idx="2" type="sldImg"/>
+            <p:ph type="sldImg" idx="2"/>
           </p:nvPr>
         </p:nvSpPr>
         <p:spPr>
@@ -1819,9 +2039,13 @@
             <a:ext cx="6096000" cy="3429000"/>
           </a:xfrm>
           <a:custGeom>
-            <a:rect b="b" l="l" r="r" t="t"/>
+            <a:avLst/>
+            <a:gdLst/>
+            <a:ahLst/>
+            <a:cxnLst/>
+            <a:rect l="l" t="t" r="r" b="b"/>
             <a:pathLst>
-              <a:path extrusionOk="0" h="120000" w="120000">
+              <a:path w="120000" h="120000" extrusionOk="0">
                 <a:moveTo>
                   <a:pt x="0" y="0"/>
                 </a:moveTo>
@@ -1843,9 +2067,11 @@
       <p:sp>
         <p:nvSpPr>
           <p:cNvPr id="86" name="Google Shape;86;g3dab511c1fa_0_0:notes"/>
-          <p:cNvSpPr txBox="1"/>
+          <p:cNvSpPr txBox="1">
+            <a:spLocks noGrp="1"/>
+          </p:cNvSpPr>
           <p:nvPr>
-            <p:ph idx="1" type="body"/>
+            <p:ph type="body" idx="1"/>
           </p:nvPr>
         </p:nvSpPr>
         <p:spPr>
@@ -1858,12 +2084,12 @@
           </a:prstGeom>
         </p:spPr>
         <p:txBody>
-          <a:bodyPr anchorCtr="0" anchor="t" bIns="91425" lIns="91425" spcFirstLastPara="1" rIns="91425" wrap="square" tIns="91425">
+          <a:bodyPr spcFirstLastPara="1" wrap="square" lIns="91425" tIns="91425" rIns="91425" bIns="91425" anchor="t" anchorCtr="0">
             <a:noAutofit/>
           </a:bodyPr>
           <a:lstStyle/>
           <a:p>
-            <a:pPr indent="0" lvl="0" marL="0" rtl="0" algn="l">
+            <a:pPr marL="0" lvl="0" indent="0" algn="l" rtl="0">
               <a:spcBef>
                 <a:spcPts val="0"/>
               </a:spcBef>
@@ -1872,9 +2098,6 @@
               </a:spcAft>
               <a:buNone/>
             </a:pPr>
-            <a:r>
-              <a:t/>
-            </a:r>
             <a:endParaRPr/>
           </a:p>
         </p:txBody>
@@ -1887,12 +2110,12 @@
 </p:notes>
 </file>
 
-<file path=ppt/notesSlides/notesSlide8.xml><?xml version="1.0" encoding="utf-8"?>
-<p:notes xmlns:a="http://schemas.openxmlformats.org/drawingml/2006/main" xmlns:r="http://schemas.openxmlformats.org/officeDocument/2006/relationships" xmlns:mc="http://schemas.openxmlformats.org/markup-compatibility/2006" xmlns:mv="urn:schemas-microsoft-com:mac:vml" xmlns:p="http://schemas.openxmlformats.org/presentationml/2006/main" xmlns:c="http://schemas.openxmlformats.org/drawingml/2006/chart" xmlns:dgm="http://schemas.openxmlformats.org/drawingml/2006/diagram" xmlns:o="urn:schemas-microsoft-com:office:office" xmlns:v="urn:schemas-microsoft-com:vml" xmlns:pvml="urn:schemas-microsoft-com:office:powerpoint" xmlns:com="http://schemas.openxmlformats.org/drawingml/2006/compatibility" xmlns:p14="http://schemas.microsoft.com/office/powerpoint/2010/main" xmlns:p15="http://schemas.microsoft.com/office/powerpoint/2012/main" xmlns:ahyp="http://schemas.microsoft.com/office/drawing/2018/hyperlinkcolor" showMasterPhAnim="0" showMasterSp="0">
+<file path=ppt/notesSlides/notesSlide9.xml><?xml version="1.0" encoding="utf-8"?>
+<p:notes xmlns:a="http://schemas.openxmlformats.org/drawingml/2006/main" xmlns:r="http://schemas.openxmlformats.org/officeDocument/2006/relationships" xmlns:p="http://schemas.openxmlformats.org/presentationml/2006/main" showMasterSp="0" showMasterPhAnim="0">
   <p:cSld>
     <p:spTree>
       <p:nvGrpSpPr>
-        <p:cNvPr id="90" name="Shape 90"/>
+        <p:cNvPr id="1" name="Shape 90"/>
         <p:cNvGrpSpPr/>
         <p:nvPr/>
       </p:nvGrpSpPr>
@@ -1907,9 +2130,11 @@
       <p:sp>
         <p:nvSpPr>
           <p:cNvPr id="91" name="Google Shape;91;g3dab511c1fa_0_778:notes"/>
-          <p:cNvSpPr/>
+          <p:cNvSpPr>
+            <a:spLocks noGrp="1" noRot="1" noChangeAspect="1"/>
+          </p:cNvSpPr>
           <p:nvPr>
-            <p:ph idx="2" type="sldImg"/>
+            <p:ph type="sldImg" idx="2"/>
           </p:nvPr>
         </p:nvSpPr>
         <p:spPr>
@@ -1918,9 +2143,13 @@
             <a:ext cx="6096000" cy="3429000"/>
           </a:xfrm>
           <a:custGeom>
-            <a:rect b="b" l="l" r="r" t="t"/>
+            <a:avLst/>
+            <a:gdLst/>
+            <a:ahLst/>
+            <a:cxnLst/>
+            <a:rect l="l" t="t" r="r" b="b"/>
             <a:pathLst>
-              <a:path extrusionOk="0" h="120000" w="120000">
+              <a:path w="120000" h="120000" extrusionOk="0">
                 <a:moveTo>
                   <a:pt x="0" y="0"/>
                 </a:moveTo>
@@ -1942,9 +2171,11 @@
       <p:sp>
         <p:nvSpPr>
           <p:cNvPr id="92" name="Google Shape;92;g3dab511c1fa_0_778:notes"/>
-          <p:cNvSpPr txBox="1"/>
+          <p:cNvSpPr txBox="1">
+            <a:spLocks noGrp="1"/>
+          </p:cNvSpPr>
           <p:nvPr>
-            <p:ph idx="1" type="body"/>
+            <p:ph type="body" idx="1"/>
           </p:nvPr>
         </p:nvSpPr>
         <p:spPr>
@@ -1957,12 +2188,12 @@
           </a:prstGeom>
         </p:spPr>
         <p:txBody>
-          <a:bodyPr anchorCtr="0" anchor="t" bIns="91425" lIns="91425" spcFirstLastPara="1" rIns="91425" wrap="square" tIns="91425">
+          <a:bodyPr spcFirstLastPara="1" wrap="square" lIns="91425" tIns="91425" rIns="91425" bIns="91425" anchor="t" anchorCtr="0">
             <a:noAutofit/>
           </a:bodyPr>
           <a:lstStyle/>
           <a:p>
-            <a:pPr indent="0" lvl="0" marL="0" rtl="0" algn="l">
+            <a:pPr marL="0" lvl="0" indent="0" algn="l" rtl="0">
               <a:spcBef>
                 <a:spcPts val="0"/>
               </a:spcBef>
@@ -1971,108 +2202,6 @@
               </a:spcAft>
               <a:buNone/>
             </a:pPr>
-            <a:r>
-              <a:t/>
-            </a:r>
-            <a:endParaRPr/>
-          </a:p>
-        </p:txBody>
-      </p:sp>
-    </p:spTree>
-  </p:cSld>
-  <p:clrMapOvr>
-    <a:masterClrMapping/>
-  </p:clrMapOvr>
-</p:notes>
-</file>
-
-<file path=ppt/notesSlides/notesSlide9.xml><?xml version="1.0" encoding="utf-8"?>
-<p:notes xmlns:a="http://schemas.openxmlformats.org/drawingml/2006/main" xmlns:r="http://schemas.openxmlformats.org/officeDocument/2006/relationships" xmlns:mc="http://schemas.openxmlformats.org/markup-compatibility/2006" xmlns:mv="urn:schemas-microsoft-com:mac:vml" xmlns:p="http://schemas.openxmlformats.org/presentationml/2006/main" xmlns:c="http://schemas.openxmlformats.org/drawingml/2006/chart" xmlns:dgm="http://schemas.openxmlformats.org/drawingml/2006/diagram" xmlns:o="urn:schemas-microsoft-com:office:office" xmlns:v="urn:schemas-microsoft-com:vml" xmlns:pvml="urn:schemas-microsoft-com:office:powerpoint" xmlns:com="http://schemas.openxmlformats.org/drawingml/2006/compatibility" xmlns:p14="http://schemas.microsoft.com/office/powerpoint/2010/main" xmlns:p15="http://schemas.microsoft.com/office/powerpoint/2012/main" xmlns:ahyp="http://schemas.microsoft.com/office/drawing/2018/hyperlinkcolor" showMasterPhAnim="0" showMasterSp="0">
-  <p:cSld>
-    <p:spTree>
-      <p:nvGrpSpPr>
-        <p:cNvPr id="95" name="Shape 95"/>
-        <p:cNvGrpSpPr/>
-        <p:nvPr/>
-      </p:nvGrpSpPr>
-      <p:grpSpPr>
-        <a:xfrm>
-          <a:off x="0" y="0"/>
-          <a:ext cx="0" cy="0"/>
-          <a:chOff x="0" y="0"/>
-          <a:chExt cx="0" cy="0"/>
-        </a:xfrm>
-      </p:grpSpPr>
-      <p:sp>
-        <p:nvSpPr>
-          <p:cNvPr id="96" name="Google Shape;96;g3dab511c1fa_0_785:notes"/>
-          <p:cNvSpPr/>
-          <p:nvPr>
-            <p:ph idx="2" type="sldImg"/>
-          </p:nvPr>
-        </p:nvSpPr>
-        <p:spPr>
-          <a:xfrm>
-            <a:off x="381300" y="685800"/>
-            <a:ext cx="6096000" cy="3429000"/>
-          </a:xfrm>
-          <a:custGeom>
-            <a:rect b="b" l="l" r="r" t="t"/>
-            <a:pathLst>
-              <a:path extrusionOk="0" h="120000" w="120000">
-                <a:moveTo>
-                  <a:pt x="0" y="0"/>
-                </a:moveTo>
-                <a:lnTo>
-                  <a:pt x="120000" y="0"/>
-                </a:lnTo>
-                <a:lnTo>
-                  <a:pt x="120000" y="120000"/>
-                </a:lnTo>
-                <a:lnTo>
-                  <a:pt x="0" y="120000"/>
-                </a:lnTo>
-                <a:close/>
-              </a:path>
-            </a:pathLst>
-          </a:custGeom>
-        </p:spPr>
-      </p:sp>
-      <p:sp>
-        <p:nvSpPr>
-          <p:cNvPr id="97" name="Google Shape;97;g3dab511c1fa_0_785:notes"/>
-          <p:cNvSpPr txBox="1"/>
-          <p:nvPr>
-            <p:ph idx="1" type="body"/>
-          </p:nvPr>
-        </p:nvSpPr>
-        <p:spPr>
-          <a:xfrm>
-            <a:off x="685800" y="4343400"/>
-            <a:ext cx="5486400" cy="4114800"/>
-          </a:xfrm>
-          <a:prstGeom prst="rect">
-            <a:avLst/>
-          </a:prstGeom>
-        </p:spPr>
-        <p:txBody>
-          <a:bodyPr anchorCtr="0" anchor="t" bIns="91425" lIns="91425" spcFirstLastPara="1" rIns="91425" wrap="square" tIns="91425">
-            <a:noAutofit/>
-          </a:bodyPr>
-          <a:lstStyle/>
-          <a:p>
-            <a:pPr indent="0" lvl="0" marL="0" rtl="0" algn="l">
-              <a:spcBef>
-                <a:spcPts val="0"/>
-              </a:spcBef>
-              <a:spcAft>
-                <a:spcPts val="0"/>
-              </a:spcAft>
-              <a:buNone/>
-            </a:pPr>
-            <a:r>
-              <a:t/>
-            </a:r>
             <a:endParaRPr/>
           </a:p>
         </p:txBody>
@@ -2086,11 +2215,11 @@
 </file>
 
 <file path=ppt/slideLayouts/slideLayout1.xml><?xml version="1.0" encoding="utf-8"?>
-<p:sldLayout xmlns:a="http://schemas.openxmlformats.org/drawingml/2006/main" xmlns:r="http://schemas.openxmlformats.org/officeDocument/2006/relationships" xmlns:mc="http://schemas.openxmlformats.org/markup-compatibility/2006" xmlns:mv="urn:schemas-microsoft-com:mac:vml" xmlns:p="http://schemas.openxmlformats.org/presentationml/2006/main" xmlns:c="http://schemas.openxmlformats.org/drawingml/2006/chart" xmlns:dgm="http://schemas.openxmlformats.org/drawingml/2006/diagram" xmlns:o="urn:schemas-microsoft-com:office:office" xmlns:v="urn:schemas-microsoft-com:vml" xmlns:pvml="urn:schemas-microsoft-com:office:powerpoint" xmlns:com="http://schemas.openxmlformats.org/drawingml/2006/compatibility" xmlns:p14="http://schemas.microsoft.com/office/powerpoint/2010/main" xmlns:p15="http://schemas.microsoft.com/office/powerpoint/2012/main" xmlns:ahyp="http://schemas.microsoft.com/office/drawing/2018/hyperlinkcolor" matchingName="Title slide" type="title">
+<p:sldLayout xmlns:a="http://schemas.openxmlformats.org/drawingml/2006/main" xmlns:r="http://schemas.openxmlformats.org/officeDocument/2006/relationships" xmlns:p="http://schemas.openxmlformats.org/presentationml/2006/main" matchingName="Title slide" type="title">
   <p:cSld name="TITLE">
     <p:spTree>
       <p:nvGrpSpPr>
-        <p:cNvPr id="9" name="Shape 9"/>
+        <p:cNvPr id="1" name="Shape 9"/>
         <p:cNvGrpSpPr/>
         <p:nvPr/>
       </p:nvGrpSpPr>
@@ -2105,7 +2234,9 @@
       <p:sp>
         <p:nvSpPr>
           <p:cNvPr id="10" name="Google Shape;10;p2"/>
-          <p:cNvSpPr txBox="1"/>
+          <p:cNvSpPr txBox="1">
+            <a:spLocks noGrp="1"/>
+          </p:cNvSpPr>
           <p:nvPr>
             <p:ph type="ctrTitle"/>
           </p:nvPr>
@@ -2120,7 +2251,7 @@
           </a:prstGeom>
         </p:spPr>
         <p:txBody>
-          <a:bodyPr anchorCtr="0" anchor="b" bIns="91425" lIns="91425" spcFirstLastPara="1" rIns="91425" wrap="square" tIns="91425">
+          <a:bodyPr spcFirstLastPara="1" wrap="square" lIns="91425" tIns="91425" rIns="91425" bIns="91425" anchor="b" anchorCtr="0">
             <a:normAutofit/>
           </a:bodyPr>
           <a:lstStyle>
@@ -2224,15 +2355,19 @@
               <a:defRPr sz="5200"/>
             </a:lvl9pPr>
           </a:lstStyle>
-          <a:p/>
+          <a:p>
+            <a:endParaRPr/>
+          </a:p>
         </p:txBody>
       </p:sp>
       <p:sp>
         <p:nvSpPr>
           <p:cNvPr id="11" name="Google Shape;11;p2"/>
-          <p:cNvSpPr txBox="1"/>
+          <p:cNvSpPr txBox="1">
+            <a:spLocks noGrp="1"/>
+          </p:cNvSpPr>
           <p:nvPr>
-            <p:ph idx="1" type="subTitle"/>
+            <p:ph type="subTitle" idx="1"/>
           </p:nvPr>
         </p:nvSpPr>
         <p:spPr>
@@ -2245,7 +2380,7 @@
           </a:prstGeom>
         </p:spPr>
         <p:txBody>
-          <a:bodyPr anchorCtr="0" anchor="t" bIns="91425" lIns="91425" spcFirstLastPara="1" rIns="91425" wrap="square" tIns="91425">
+          <a:bodyPr spcFirstLastPara="1" wrap="square" lIns="91425" tIns="91425" rIns="91425" bIns="91425" anchor="t" anchorCtr="0">
             <a:normAutofit/>
           </a:bodyPr>
           <a:lstStyle>
@@ -2376,15 +2511,19 @@
               <a:defRPr sz="2800"/>
             </a:lvl9pPr>
           </a:lstStyle>
-          <a:p/>
+          <a:p>
+            <a:endParaRPr/>
+          </a:p>
         </p:txBody>
       </p:sp>
       <p:sp>
         <p:nvSpPr>
           <p:cNvPr id="12" name="Google Shape;12;p2"/>
-          <p:cNvSpPr txBox="1"/>
+          <p:cNvSpPr txBox="1">
+            <a:spLocks noGrp="1"/>
+          </p:cNvSpPr>
           <p:nvPr>
-            <p:ph idx="12" type="sldNum"/>
+            <p:ph type="sldNum" idx="12"/>
           </p:nvPr>
         </p:nvSpPr>
         <p:spPr>
@@ -2397,7 +2536,7 @@
           </a:prstGeom>
         </p:spPr>
         <p:txBody>
-          <a:bodyPr anchorCtr="0" anchor="ctr" bIns="91425" lIns="91425" spcFirstLastPara="1" rIns="91425" wrap="square" tIns="91425">
+          <a:bodyPr spcFirstLastPara="1" wrap="square" lIns="91425" tIns="91425" rIns="91425" bIns="91425" anchor="ctr" anchorCtr="0">
             <a:normAutofit/>
           </a:bodyPr>
           <a:lstStyle>
@@ -2439,7 +2578,7 @@
             </a:lvl9pPr>
           </a:lstStyle>
           <a:p>
-            <a:pPr indent="0" lvl="0" marL="0" rtl="0" algn="r">
+            <a:pPr marL="0" lvl="0" indent="0" algn="r" rtl="0">
               <a:spcBef>
                 <a:spcPts val="0"/>
               </a:spcBef>
@@ -2465,11 +2604,11 @@
 </file>
 
 <file path=ppt/slideLayouts/slideLayout10.xml><?xml version="1.0" encoding="utf-8"?>
-<p:sldLayout xmlns:a="http://schemas.openxmlformats.org/drawingml/2006/main" xmlns:r="http://schemas.openxmlformats.org/officeDocument/2006/relationships" xmlns:mc="http://schemas.openxmlformats.org/markup-compatibility/2006" xmlns:mv="urn:schemas-microsoft-com:mac:vml" xmlns:p="http://schemas.openxmlformats.org/presentationml/2006/main" xmlns:c="http://schemas.openxmlformats.org/drawingml/2006/chart" xmlns:dgm="http://schemas.openxmlformats.org/drawingml/2006/diagram" xmlns:o="urn:schemas-microsoft-com:office:office" xmlns:v="urn:schemas-microsoft-com:vml" xmlns:pvml="urn:schemas-microsoft-com:office:powerpoint" xmlns:com="http://schemas.openxmlformats.org/drawingml/2006/compatibility" xmlns:p14="http://schemas.microsoft.com/office/powerpoint/2010/main" xmlns:p15="http://schemas.microsoft.com/office/powerpoint/2012/main" xmlns:ahyp="http://schemas.microsoft.com/office/drawing/2018/hyperlinkcolor" matchingName="Big number">
+<p:sldLayout xmlns:a="http://schemas.openxmlformats.org/drawingml/2006/main" xmlns:r="http://schemas.openxmlformats.org/officeDocument/2006/relationships" xmlns:p="http://schemas.openxmlformats.org/presentationml/2006/main" matchingName="Big number">
   <p:cSld name="BIG_NUMBER">
     <p:spTree>
       <p:nvGrpSpPr>
-        <p:cNvPr id="44" name="Shape 44"/>
+        <p:cNvPr id="1" name="Shape 44"/>
         <p:cNvGrpSpPr/>
         <p:nvPr/>
       </p:nvGrpSpPr>
@@ -2484,9 +2623,11 @@
       <p:sp>
         <p:nvSpPr>
           <p:cNvPr id="45" name="Google Shape;45;p11"/>
-          <p:cNvSpPr txBox="1"/>
+          <p:cNvSpPr txBox="1">
+            <a:spLocks noGrp="1"/>
+          </p:cNvSpPr>
           <p:nvPr>
-            <p:ph hasCustomPrompt="1" type="title"/>
+            <p:ph type="title" hasCustomPrompt="1"/>
           </p:nvPr>
         </p:nvSpPr>
         <p:spPr>
@@ -2499,7 +2640,7 @@
           </a:prstGeom>
         </p:spPr>
         <p:txBody>
-          <a:bodyPr anchorCtr="0" anchor="b" bIns="91425" lIns="91425" spcFirstLastPara="1" rIns="91425" wrap="square" tIns="91425">
+          <a:bodyPr spcFirstLastPara="1" wrap="square" lIns="91425" tIns="91425" rIns="91425" bIns="91425" anchor="b" anchorCtr="0">
             <a:normAutofit/>
           </a:bodyPr>
           <a:lstStyle>
@@ -2613,9 +2754,11 @@
       <p:sp>
         <p:nvSpPr>
           <p:cNvPr id="46" name="Google Shape;46;p11"/>
-          <p:cNvSpPr txBox="1"/>
+          <p:cNvSpPr txBox="1">
+            <a:spLocks noGrp="1"/>
+          </p:cNvSpPr>
           <p:nvPr>
-            <p:ph idx="1" type="body"/>
+            <p:ph type="body" idx="1"/>
           </p:nvPr>
         </p:nvSpPr>
         <p:spPr>
@@ -2628,11 +2771,11 @@
           </a:prstGeom>
         </p:spPr>
         <p:txBody>
-          <a:bodyPr anchorCtr="0" anchor="t" bIns="91425" lIns="91425" spcFirstLastPara="1" rIns="91425" wrap="square" tIns="91425">
+          <a:bodyPr spcFirstLastPara="1" wrap="square" lIns="91425" tIns="91425" rIns="91425" bIns="91425" anchor="t" anchorCtr="0">
             <a:normAutofit/>
           </a:bodyPr>
           <a:lstStyle>
-            <a:lvl1pPr indent="-342900" lvl="0" marL="457200" algn="ctr">
+            <a:lvl1pPr marL="457200" lvl="0" indent="-342900" algn="ctr">
               <a:spcBef>
                 <a:spcPts val="0"/>
               </a:spcBef>
@@ -2643,7 +2786,7 @@
               <a:buChar char="●"/>
               <a:defRPr/>
             </a:lvl1pPr>
-            <a:lvl2pPr indent="-317500" lvl="1" marL="914400" algn="ctr">
+            <a:lvl2pPr marL="914400" lvl="1" indent="-317500" algn="ctr">
               <a:spcBef>
                 <a:spcPts val="0"/>
               </a:spcBef>
@@ -2654,7 +2797,7 @@
               <a:buChar char="○"/>
               <a:defRPr/>
             </a:lvl2pPr>
-            <a:lvl3pPr indent="-317500" lvl="2" marL="1371600" algn="ctr">
+            <a:lvl3pPr marL="1371600" lvl="2" indent="-317500" algn="ctr">
               <a:spcBef>
                 <a:spcPts val="0"/>
               </a:spcBef>
@@ -2665,7 +2808,7 @@
               <a:buChar char="■"/>
               <a:defRPr/>
             </a:lvl3pPr>
-            <a:lvl4pPr indent="-317500" lvl="3" marL="1828800" algn="ctr">
+            <a:lvl4pPr marL="1828800" lvl="3" indent="-317500" algn="ctr">
               <a:spcBef>
                 <a:spcPts val="0"/>
               </a:spcBef>
@@ -2676,7 +2819,7 @@
               <a:buChar char="●"/>
               <a:defRPr/>
             </a:lvl4pPr>
-            <a:lvl5pPr indent="-317500" lvl="4" marL="2286000" algn="ctr">
+            <a:lvl5pPr marL="2286000" lvl="4" indent="-317500" algn="ctr">
               <a:spcBef>
                 <a:spcPts val="0"/>
               </a:spcBef>
@@ -2687,7 +2830,7 @@
               <a:buChar char="○"/>
               <a:defRPr/>
             </a:lvl5pPr>
-            <a:lvl6pPr indent="-317500" lvl="5" marL="2743200" algn="ctr">
+            <a:lvl6pPr marL="2743200" lvl="5" indent="-317500" algn="ctr">
               <a:spcBef>
                 <a:spcPts val="0"/>
               </a:spcBef>
@@ -2698,7 +2841,7 @@
               <a:buChar char="■"/>
               <a:defRPr/>
             </a:lvl6pPr>
-            <a:lvl7pPr indent="-317500" lvl="6" marL="3200400" algn="ctr">
+            <a:lvl7pPr marL="3200400" lvl="6" indent="-317500" algn="ctr">
               <a:spcBef>
                 <a:spcPts val="0"/>
               </a:spcBef>
@@ -2709,7 +2852,7 @@
               <a:buChar char="●"/>
               <a:defRPr/>
             </a:lvl7pPr>
-            <a:lvl8pPr indent="-317500" lvl="7" marL="3657600" algn="ctr">
+            <a:lvl8pPr marL="3657600" lvl="7" indent="-317500" algn="ctr">
               <a:spcBef>
                 <a:spcPts val="0"/>
               </a:spcBef>
@@ -2720,7 +2863,7 @@
               <a:buChar char="○"/>
               <a:defRPr/>
             </a:lvl8pPr>
-            <a:lvl9pPr indent="-317500" lvl="8" marL="4114800" algn="ctr">
+            <a:lvl9pPr marL="4114800" lvl="8" indent="-317500" algn="ctr">
               <a:spcBef>
                 <a:spcPts val="0"/>
               </a:spcBef>
@@ -2732,15 +2875,19 @@
               <a:defRPr/>
             </a:lvl9pPr>
           </a:lstStyle>
-          <a:p/>
+          <a:p>
+            <a:endParaRPr/>
+          </a:p>
         </p:txBody>
       </p:sp>
       <p:sp>
         <p:nvSpPr>
           <p:cNvPr id="47" name="Google Shape;47;p11"/>
-          <p:cNvSpPr txBox="1"/>
+          <p:cNvSpPr txBox="1">
+            <a:spLocks noGrp="1"/>
+          </p:cNvSpPr>
           <p:nvPr>
-            <p:ph idx="12" type="sldNum"/>
+            <p:ph type="sldNum" idx="12"/>
           </p:nvPr>
         </p:nvSpPr>
         <p:spPr>
@@ -2753,7 +2900,7 @@
           </a:prstGeom>
         </p:spPr>
         <p:txBody>
-          <a:bodyPr anchorCtr="0" anchor="ctr" bIns="91425" lIns="91425" spcFirstLastPara="1" rIns="91425" wrap="square" tIns="91425">
+          <a:bodyPr spcFirstLastPara="1" wrap="square" lIns="91425" tIns="91425" rIns="91425" bIns="91425" anchor="ctr" anchorCtr="0">
             <a:normAutofit/>
           </a:bodyPr>
           <a:lstStyle>
@@ -2795,7 +2942,7 @@
             </a:lvl9pPr>
           </a:lstStyle>
           <a:p>
-            <a:pPr indent="0" lvl="0" marL="0" rtl="0" algn="r">
+            <a:pPr marL="0" lvl="0" indent="0" algn="r" rtl="0">
               <a:spcBef>
                 <a:spcPts val="0"/>
               </a:spcBef>
@@ -2821,11 +2968,11 @@
 </file>
 
 <file path=ppt/slideLayouts/slideLayout11.xml><?xml version="1.0" encoding="utf-8"?>
-<p:sldLayout xmlns:a="http://schemas.openxmlformats.org/drawingml/2006/main" xmlns:r="http://schemas.openxmlformats.org/officeDocument/2006/relationships" xmlns:mc="http://schemas.openxmlformats.org/markup-compatibility/2006" xmlns:mv="urn:schemas-microsoft-com:mac:vml" xmlns:p="http://schemas.openxmlformats.org/presentationml/2006/main" xmlns:c="http://schemas.openxmlformats.org/drawingml/2006/chart" xmlns:dgm="http://schemas.openxmlformats.org/drawingml/2006/diagram" xmlns:o="urn:schemas-microsoft-com:office:office" xmlns:v="urn:schemas-microsoft-com:vml" xmlns:pvml="urn:schemas-microsoft-com:office:powerpoint" xmlns:com="http://schemas.openxmlformats.org/drawingml/2006/compatibility" xmlns:p14="http://schemas.microsoft.com/office/powerpoint/2010/main" xmlns:p15="http://schemas.microsoft.com/office/powerpoint/2012/main" xmlns:ahyp="http://schemas.microsoft.com/office/drawing/2018/hyperlinkcolor" matchingName="Blank" type="blank">
+<p:sldLayout xmlns:a="http://schemas.openxmlformats.org/drawingml/2006/main" xmlns:r="http://schemas.openxmlformats.org/officeDocument/2006/relationships" xmlns:p="http://schemas.openxmlformats.org/presentationml/2006/main" matchingName="Blank" type="blank">
   <p:cSld name="BLANK">
     <p:spTree>
       <p:nvGrpSpPr>
-        <p:cNvPr id="48" name="Shape 48"/>
+        <p:cNvPr id="1" name="Shape 48"/>
         <p:cNvGrpSpPr/>
         <p:nvPr/>
       </p:nvGrpSpPr>
@@ -2840,9 +2987,11 @@
       <p:sp>
         <p:nvSpPr>
           <p:cNvPr id="49" name="Google Shape;49;p12"/>
-          <p:cNvSpPr txBox="1"/>
+          <p:cNvSpPr txBox="1">
+            <a:spLocks noGrp="1"/>
+          </p:cNvSpPr>
           <p:nvPr>
-            <p:ph idx="12" type="sldNum"/>
+            <p:ph type="sldNum" idx="12"/>
           </p:nvPr>
         </p:nvSpPr>
         <p:spPr>
@@ -2855,7 +3004,7 @@
           </a:prstGeom>
         </p:spPr>
         <p:txBody>
-          <a:bodyPr anchorCtr="0" anchor="ctr" bIns="91425" lIns="91425" spcFirstLastPara="1" rIns="91425" wrap="square" tIns="91425">
+          <a:bodyPr spcFirstLastPara="1" wrap="square" lIns="91425" tIns="91425" rIns="91425" bIns="91425" anchor="ctr" anchorCtr="0">
             <a:normAutofit/>
           </a:bodyPr>
           <a:lstStyle>
@@ -2897,7 +3046,7 @@
             </a:lvl9pPr>
           </a:lstStyle>
           <a:p>
-            <a:pPr indent="0" lvl="0" marL="0" rtl="0" algn="r">
+            <a:pPr marL="0" lvl="0" indent="0" algn="r" rtl="0">
               <a:spcBef>
                 <a:spcPts val="0"/>
               </a:spcBef>
@@ -2923,11 +3072,11 @@
 </file>
 
 <file path=ppt/slideLayouts/slideLayout2.xml><?xml version="1.0" encoding="utf-8"?>
-<p:sldLayout xmlns:a="http://schemas.openxmlformats.org/drawingml/2006/main" xmlns:r="http://schemas.openxmlformats.org/officeDocument/2006/relationships" xmlns:mc="http://schemas.openxmlformats.org/markup-compatibility/2006" xmlns:mv="urn:schemas-microsoft-com:mac:vml" xmlns:p="http://schemas.openxmlformats.org/presentationml/2006/main" xmlns:c="http://schemas.openxmlformats.org/drawingml/2006/chart" xmlns:dgm="http://schemas.openxmlformats.org/drawingml/2006/diagram" xmlns:o="urn:schemas-microsoft-com:office:office" xmlns:v="urn:schemas-microsoft-com:vml" xmlns:pvml="urn:schemas-microsoft-com:office:powerpoint" xmlns:com="http://schemas.openxmlformats.org/drawingml/2006/compatibility" xmlns:p14="http://schemas.microsoft.com/office/powerpoint/2010/main" xmlns:p15="http://schemas.microsoft.com/office/powerpoint/2012/main" xmlns:ahyp="http://schemas.microsoft.com/office/drawing/2018/hyperlinkcolor" matchingName="Section header" type="secHead">
+<p:sldLayout xmlns:a="http://schemas.openxmlformats.org/drawingml/2006/main" xmlns:r="http://schemas.openxmlformats.org/officeDocument/2006/relationships" xmlns:p="http://schemas.openxmlformats.org/presentationml/2006/main" matchingName="Section header" type="secHead">
   <p:cSld name="SECTION_HEADER">
     <p:spTree>
       <p:nvGrpSpPr>
-        <p:cNvPr id="13" name="Shape 13"/>
+        <p:cNvPr id="1" name="Shape 13"/>
         <p:cNvGrpSpPr/>
         <p:nvPr/>
       </p:nvGrpSpPr>
@@ -2942,7 +3091,9 @@
       <p:sp>
         <p:nvSpPr>
           <p:cNvPr id="14" name="Google Shape;14;p3"/>
-          <p:cNvSpPr txBox="1"/>
+          <p:cNvSpPr txBox="1">
+            <a:spLocks noGrp="1"/>
+          </p:cNvSpPr>
           <p:nvPr>
             <p:ph type="title"/>
           </p:nvPr>
@@ -2957,7 +3108,7 @@
           </a:prstGeom>
         </p:spPr>
         <p:txBody>
-          <a:bodyPr anchorCtr="0" anchor="ctr" bIns="91425" lIns="91425" spcFirstLastPara="1" rIns="91425" wrap="square" tIns="91425">
+          <a:bodyPr spcFirstLastPara="1" wrap="square" lIns="91425" tIns="91425" rIns="91425" bIns="91425" anchor="ctr" anchorCtr="0">
             <a:normAutofit/>
           </a:bodyPr>
           <a:lstStyle>
@@ -3061,15 +3212,19 @@
               <a:defRPr sz="3600"/>
             </a:lvl9pPr>
           </a:lstStyle>
-          <a:p/>
+          <a:p>
+            <a:endParaRPr/>
+          </a:p>
         </p:txBody>
       </p:sp>
       <p:sp>
         <p:nvSpPr>
           <p:cNvPr id="15" name="Google Shape;15;p3"/>
-          <p:cNvSpPr txBox="1"/>
+          <p:cNvSpPr txBox="1">
+            <a:spLocks noGrp="1"/>
+          </p:cNvSpPr>
           <p:nvPr>
-            <p:ph idx="12" type="sldNum"/>
+            <p:ph type="sldNum" idx="12"/>
           </p:nvPr>
         </p:nvSpPr>
         <p:spPr>
@@ -3082,7 +3237,7 @@
           </a:prstGeom>
         </p:spPr>
         <p:txBody>
-          <a:bodyPr anchorCtr="0" anchor="ctr" bIns="91425" lIns="91425" spcFirstLastPara="1" rIns="91425" wrap="square" tIns="91425">
+          <a:bodyPr spcFirstLastPara="1" wrap="square" lIns="91425" tIns="91425" rIns="91425" bIns="91425" anchor="ctr" anchorCtr="0">
             <a:normAutofit/>
           </a:bodyPr>
           <a:lstStyle>
@@ -3124,7 +3279,7 @@
             </a:lvl9pPr>
           </a:lstStyle>
           <a:p>
-            <a:pPr indent="0" lvl="0" marL="0" rtl="0" algn="r">
+            <a:pPr marL="0" lvl="0" indent="0" algn="r" rtl="0">
               <a:spcBef>
                 <a:spcPts val="0"/>
               </a:spcBef>
@@ -3150,11 +3305,11 @@
 </file>
 
 <file path=ppt/slideLayouts/slideLayout3.xml><?xml version="1.0" encoding="utf-8"?>
-<p:sldLayout xmlns:a="http://schemas.openxmlformats.org/drawingml/2006/main" xmlns:r="http://schemas.openxmlformats.org/officeDocument/2006/relationships" xmlns:mc="http://schemas.openxmlformats.org/markup-compatibility/2006" xmlns:mv="urn:schemas-microsoft-com:mac:vml" xmlns:p="http://schemas.openxmlformats.org/presentationml/2006/main" xmlns:c="http://schemas.openxmlformats.org/drawingml/2006/chart" xmlns:dgm="http://schemas.openxmlformats.org/drawingml/2006/diagram" xmlns:o="urn:schemas-microsoft-com:office:office" xmlns:v="urn:schemas-microsoft-com:vml" xmlns:pvml="urn:schemas-microsoft-com:office:powerpoint" xmlns:com="http://schemas.openxmlformats.org/drawingml/2006/compatibility" xmlns:p14="http://schemas.microsoft.com/office/powerpoint/2010/main" xmlns:p15="http://schemas.microsoft.com/office/powerpoint/2012/main" xmlns:ahyp="http://schemas.microsoft.com/office/drawing/2018/hyperlinkcolor" matchingName="Title and body" type="tx">
+<p:sldLayout xmlns:a="http://schemas.openxmlformats.org/drawingml/2006/main" xmlns:r="http://schemas.openxmlformats.org/officeDocument/2006/relationships" xmlns:p="http://schemas.openxmlformats.org/presentationml/2006/main" matchingName="Title and body" type="tx">
   <p:cSld name="TITLE_AND_BODY">
     <p:spTree>
       <p:nvGrpSpPr>
-        <p:cNvPr id="16" name="Shape 16"/>
+        <p:cNvPr id="1" name="Shape 16"/>
         <p:cNvGrpSpPr/>
         <p:nvPr/>
       </p:nvGrpSpPr>
@@ -3169,7 +3324,9 @@
       <p:sp>
         <p:nvSpPr>
           <p:cNvPr id="17" name="Google Shape;17;p4"/>
-          <p:cNvSpPr txBox="1"/>
+          <p:cNvSpPr txBox="1">
+            <a:spLocks noGrp="1"/>
+          </p:cNvSpPr>
           <p:nvPr>
             <p:ph type="title"/>
           </p:nvPr>
@@ -3184,7 +3341,7 @@
           </a:prstGeom>
         </p:spPr>
         <p:txBody>
-          <a:bodyPr anchorCtr="0" anchor="t" bIns="91425" lIns="91425" spcFirstLastPara="1" rIns="91425" wrap="square" tIns="91425">
+          <a:bodyPr spcFirstLastPara="1" wrap="square" lIns="91425" tIns="91425" rIns="91425" bIns="91425" anchor="t" anchorCtr="0">
             <a:normAutofit/>
           </a:bodyPr>
           <a:lstStyle>
@@ -3288,15 +3445,19 @@
               <a:defRPr/>
             </a:lvl9pPr>
           </a:lstStyle>
-          <a:p/>
+          <a:p>
+            <a:endParaRPr/>
+          </a:p>
         </p:txBody>
       </p:sp>
       <p:sp>
         <p:nvSpPr>
           <p:cNvPr id="18" name="Google Shape;18;p4"/>
-          <p:cNvSpPr txBox="1"/>
+          <p:cNvSpPr txBox="1">
+            <a:spLocks noGrp="1"/>
+          </p:cNvSpPr>
           <p:nvPr>
-            <p:ph idx="1" type="body"/>
+            <p:ph type="body" idx="1"/>
           </p:nvPr>
         </p:nvSpPr>
         <p:spPr>
@@ -3309,11 +3470,11 @@
           </a:prstGeom>
         </p:spPr>
         <p:txBody>
-          <a:bodyPr anchorCtr="0" anchor="t" bIns="91425" lIns="91425" spcFirstLastPara="1" rIns="91425" wrap="square" tIns="91425">
+          <a:bodyPr spcFirstLastPara="1" wrap="square" lIns="91425" tIns="91425" rIns="91425" bIns="91425" anchor="t" anchorCtr="0">
             <a:normAutofit/>
           </a:bodyPr>
           <a:lstStyle>
-            <a:lvl1pPr indent="-342900" lvl="0" marL="457200">
+            <a:lvl1pPr marL="457200" lvl="0" indent="-342900">
               <a:spcBef>
                 <a:spcPts val="0"/>
               </a:spcBef>
@@ -3324,7 +3485,7 @@
               <a:buChar char="●"/>
               <a:defRPr/>
             </a:lvl1pPr>
-            <a:lvl2pPr indent="-317500" lvl="1" marL="914400">
+            <a:lvl2pPr marL="914400" lvl="1" indent="-317500">
               <a:spcBef>
                 <a:spcPts val="0"/>
               </a:spcBef>
@@ -3335,7 +3496,7 @@
               <a:buChar char="○"/>
               <a:defRPr/>
             </a:lvl2pPr>
-            <a:lvl3pPr indent="-317500" lvl="2" marL="1371600">
+            <a:lvl3pPr marL="1371600" lvl="2" indent="-317500">
               <a:spcBef>
                 <a:spcPts val="0"/>
               </a:spcBef>
@@ -3346,7 +3507,7 @@
               <a:buChar char="■"/>
               <a:defRPr/>
             </a:lvl3pPr>
-            <a:lvl4pPr indent="-317500" lvl="3" marL="1828800">
+            <a:lvl4pPr marL="1828800" lvl="3" indent="-317500">
               <a:spcBef>
                 <a:spcPts val="0"/>
               </a:spcBef>
@@ -3357,7 +3518,7 @@
               <a:buChar char="●"/>
               <a:defRPr/>
             </a:lvl4pPr>
-            <a:lvl5pPr indent="-317500" lvl="4" marL="2286000">
+            <a:lvl5pPr marL="2286000" lvl="4" indent="-317500">
               <a:spcBef>
                 <a:spcPts val="0"/>
               </a:spcBef>
@@ -3368,7 +3529,7 @@
               <a:buChar char="○"/>
               <a:defRPr/>
             </a:lvl5pPr>
-            <a:lvl6pPr indent="-317500" lvl="5" marL="2743200">
+            <a:lvl6pPr marL="2743200" lvl="5" indent="-317500">
               <a:spcBef>
                 <a:spcPts val="0"/>
               </a:spcBef>
@@ -3379,7 +3540,7 @@
               <a:buChar char="■"/>
               <a:defRPr/>
             </a:lvl6pPr>
-            <a:lvl7pPr indent="-317500" lvl="6" marL="3200400">
+            <a:lvl7pPr marL="3200400" lvl="6" indent="-317500">
               <a:spcBef>
                 <a:spcPts val="0"/>
               </a:spcBef>
@@ -3390,7 +3551,7 @@
               <a:buChar char="●"/>
               <a:defRPr/>
             </a:lvl7pPr>
-            <a:lvl8pPr indent="-317500" lvl="7" marL="3657600">
+            <a:lvl8pPr marL="3657600" lvl="7" indent="-317500">
               <a:spcBef>
                 <a:spcPts val="0"/>
               </a:spcBef>
@@ -3401,7 +3562,7 @@
               <a:buChar char="○"/>
               <a:defRPr/>
             </a:lvl8pPr>
-            <a:lvl9pPr indent="-317500" lvl="8" marL="4114800">
+            <a:lvl9pPr marL="4114800" lvl="8" indent="-317500">
               <a:spcBef>
                 <a:spcPts val="0"/>
               </a:spcBef>
@@ -3413,15 +3574,19 @@
               <a:defRPr/>
             </a:lvl9pPr>
           </a:lstStyle>
-          <a:p/>
+          <a:p>
+            <a:endParaRPr/>
+          </a:p>
         </p:txBody>
       </p:sp>
       <p:sp>
         <p:nvSpPr>
           <p:cNvPr id="19" name="Google Shape;19;p4"/>
-          <p:cNvSpPr txBox="1"/>
+          <p:cNvSpPr txBox="1">
+            <a:spLocks noGrp="1"/>
+          </p:cNvSpPr>
           <p:nvPr>
-            <p:ph idx="12" type="sldNum"/>
+            <p:ph type="sldNum" idx="12"/>
           </p:nvPr>
         </p:nvSpPr>
         <p:spPr>
@@ -3434,7 +3599,7 @@
           </a:prstGeom>
         </p:spPr>
         <p:txBody>
-          <a:bodyPr anchorCtr="0" anchor="ctr" bIns="91425" lIns="91425" spcFirstLastPara="1" rIns="91425" wrap="square" tIns="91425">
+          <a:bodyPr spcFirstLastPara="1" wrap="square" lIns="91425" tIns="91425" rIns="91425" bIns="91425" anchor="ctr" anchorCtr="0">
             <a:normAutofit/>
           </a:bodyPr>
           <a:lstStyle>
@@ -3476,7 +3641,7 @@
             </a:lvl9pPr>
           </a:lstStyle>
           <a:p>
-            <a:pPr indent="0" lvl="0" marL="0" rtl="0" algn="r">
+            <a:pPr marL="0" lvl="0" indent="0" algn="r" rtl="0">
               <a:spcBef>
                 <a:spcPts val="0"/>
               </a:spcBef>
@@ -3502,11 +3667,11 @@
 </file>
 
 <file path=ppt/slideLayouts/slideLayout4.xml><?xml version="1.0" encoding="utf-8"?>
-<p:sldLayout xmlns:a="http://schemas.openxmlformats.org/drawingml/2006/main" xmlns:r="http://schemas.openxmlformats.org/officeDocument/2006/relationships" xmlns:mc="http://schemas.openxmlformats.org/markup-compatibility/2006" xmlns:mv="urn:schemas-microsoft-com:mac:vml" xmlns:p="http://schemas.openxmlformats.org/presentationml/2006/main" xmlns:c="http://schemas.openxmlformats.org/drawingml/2006/chart" xmlns:dgm="http://schemas.openxmlformats.org/drawingml/2006/diagram" xmlns:o="urn:schemas-microsoft-com:office:office" xmlns:v="urn:schemas-microsoft-com:vml" xmlns:pvml="urn:schemas-microsoft-com:office:powerpoint" xmlns:com="http://schemas.openxmlformats.org/drawingml/2006/compatibility" xmlns:p14="http://schemas.microsoft.com/office/powerpoint/2010/main" xmlns:p15="http://schemas.microsoft.com/office/powerpoint/2012/main" xmlns:ahyp="http://schemas.microsoft.com/office/drawing/2018/hyperlinkcolor" matchingName="Title and two columns" type="twoColTx">
+<p:sldLayout xmlns:a="http://schemas.openxmlformats.org/drawingml/2006/main" xmlns:r="http://schemas.openxmlformats.org/officeDocument/2006/relationships" xmlns:p="http://schemas.openxmlformats.org/presentationml/2006/main" matchingName="Title and two columns" type="twoColTx">
   <p:cSld name="TITLE_AND_TWO_COLUMNS">
     <p:spTree>
       <p:nvGrpSpPr>
-        <p:cNvPr id="20" name="Shape 20"/>
+        <p:cNvPr id="1" name="Shape 20"/>
         <p:cNvGrpSpPr/>
         <p:nvPr/>
       </p:nvGrpSpPr>
@@ -3521,7 +3686,9 @@
       <p:sp>
         <p:nvSpPr>
           <p:cNvPr id="21" name="Google Shape;21;p5"/>
-          <p:cNvSpPr txBox="1"/>
+          <p:cNvSpPr txBox="1">
+            <a:spLocks noGrp="1"/>
+          </p:cNvSpPr>
           <p:nvPr>
             <p:ph type="title"/>
           </p:nvPr>
@@ -3536,7 +3703,7 @@
           </a:prstGeom>
         </p:spPr>
         <p:txBody>
-          <a:bodyPr anchorCtr="0" anchor="t" bIns="91425" lIns="91425" spcFirstLastPara="1" rIns="91425" wrap="square" tIns="91425">
+          <a:bodyPr spcFirstLastPara="1" wrap="square" lIns="91425" tIns="91425" rIns="91425" bIns="91425" anchor="t" anchorCtr="0">
             <a:normAutofit/>
           </a:bodyPr>
           <a:lstStyle>
@@ -3640,15 +3807,19 @@
               <a:defRPr/>
             </a:lvl9pPr>
           </a:lstStyle>
-          <a:p/>
+          <a:p>
+            <a:endParaRPr/>
+          </a:p>
         </p:txBody>
       </p:sp>
       <p:sp>
         <p:nvSpPr>
           <p:cNvPr id="22" name="Google Shape;22;p5"/>
-          <p:cNvSpPr txBox="1"/>
+          <p:cNvSpPr txBox="1">
+            <a:spLocks noGrp="1"/>
+          </p:cNvSpPr>
           <p:nvPr>
-            <p:ph idx="1" type="body"/>
+            <p:ph type="body" idx="1"/>
           </p:nvPr>
         </p:nvSpPr>
         <p:spPr>
@@ -3661,11 +3832,11 @@
           </a:prstGeom>
         </p:spPr>
         <p:txBody>
-          <a:bodyPr anchorCtr="0" anchor="t" bIns="91425" lIns="91425" spcFirstLastPara="1" rIns="91425" wrap="square" tIns="91425">
+          <a:bodyPr spcFirstLastPara="1" wrap="square" lIns="91425" tIns="91425" rIns="91425" bIns="91425" anchor="t" anchorCtr="0">
             <a:normAutofit/>
           </a:bodyPr>
           <a:lstStyle>
-            <a:lvl1pPr indent="-317500" lvl="0" marL="457200">
+            <a:lvl1pPr marL="457200" lvl="0" indent="-317500">
               <a:spcBef>
                 <a:spcPts val="0"/>
               </a:spcBef>
@@ -3676,7 +3847,7 @@
               <a:buChar char="●"/>
               <a:defRPr sz="1400"/>
             </a:lvl1pPr>
-            <a:lvl2pPr indent="-304800" lvl="1" marL="914400">
+            <a:lvl2pPr marL="914400" lvl="1" indent="-304800">
               <a:spcBef>
                 <a:spcPts val="0"/>
               </a:spcBef>
@@ -3687,7 +3858,7 @@
               <a:buChar char="○"/>
               <a:defRPr sz="1200"/>
             </a:lvl2pPr>
-            <a:lvl3pPr indent="-304800" lvl="2" marL="1371600">
+            <a:lvl3pPr marL="1371600" lvl="2" indent="-304800">
               <a:spcBef>
                 <a:spcPts val="0"/>
               </a:spcBef>
@@ -3698,7 +3869,7 @@
               <a:buChar char="■"/>
               <a:defRPr sz="1200"/>
             </a:lvl3pPr>
-            <a:lvl4pPr indent="-304800" lvl="3" marL="1828800">
+            <a:lvl4pPr marL="1828800" lvl="3" indent="-304800">
               <a:spcBef>
                 <a:spcPts val="0"/>
               </a:spcBef>
@@ -3709,7 +3880,7 @@
               <a:buChar char="●"/>
               <a:defRPr sz="1200"/>
             </a:lvl4pPr>
-            <a:lvl5pPr indent="-304800" lvl="4" marL="2286000">
+            <a:lvl5pPr marL="2286000" lvl="4" indent="-304800">
               <a:spcBef>
                 <a:spcPts val="0"/>
               </a:spcBef>
@@ -3720,7 +3891,7 @@
               <a:buChar char="○"/>
               <a:defRPr sz="1200"/>
             </a:lvl5pPr>
-            <a:lvl6pPr indent="-304800" lvl="5" marL="2743200">
+            <a:lvl6pPr marL="2743200" lvl="5" indent="-304800">
               <a:spcBef>
                 <a:spcPts val="0"/>
               </a:spcBef>
@@ -3731,7 +3902,7 @@
               <a:buChar char="■"/>
               <a:defRPr sz="1200"/>
             </a:lvl6pPr>
-            <a:lvl7pPr indent="-304800" lvl="6" marL="3200400">
+            <a:lvl7pPr marL="3200400" lvl="6" indent="-304800">
               <a:spcBef>
                 <a:spcPts val="0"/>
               </a:spcBef>
@@ -3742,7 +3913,7 @@
               <a:buChar char="●"/>
               <a:defRPr sz="1200"/>
             </a:lvl7pPr>
-            <a:lvl8pPr indent="-304800" lvl="7" marL="3657600">
+            <a:lvl8pPr marL="3657600" lvl="7" indent="-304800">
               <a:spcBef>
                 <a:spcPts val="0"/>
               </a:spcBef>
@@ -3753,7 +3924,7 @@
               <a:buChar char="○"/>
               <a:defRPr sz="1200"/>
             </a:lvl8pPr>
-            <a:lvl9pPr indent="-304800" lvl="8" marL="4114800">
+            <a:lvl9pPr marL="4114800" lvl="8" indent="-304800">
               <a:spcBef>
                 <a:spcPts val="0"/>
               </a:spcBef>
@@ -3765,15 +3936,19 @@
               <a:defRPr sz="1200"/>
             </a:lvl9pPr>
           </a:lstStyle>
-          <a:p/>
+          <a:p>
+            <a:endParaRPr/>
+          </a:p>
         </p:txBody>
       </p:sp>
       <p:sp>
         <p:nvSpPr>
           <p:cNvPr id="23" name="Google Shape;23;p5"/>
-          <p:cNvSpPr txBox="1"/>
+          <p:cNvSpPr txBox="1">
+            <a:spLocks noGrp="1"/>
+          </p:cNvSpPr>
           <p:nvPr>
-            <p:ph idx="2" type="body"/>
+            <p:ph type="body" idx="2"/>
           </p:nvPr>
         </p:nvSpPr>
         <p:spPr>
@@ -3786,11 +3961,11 @@
           </a:prstGeom>
         </p:spPr>
         <p:txBody>
-          <a:bodyPr anchorCtr="0" anchor="t" bIns="91425" lIns="91425" spcFirstLastPara="1" rIns="91425" wrap="square" tIns="91425">
+          <a:bodyPr spcFirstLastPara="1" wrap="square" lIns="91425" tIns="91425" rIns="91425" bIns="91425" anchor="t" anchorCtr="0">
             <a:normAutofit/>
           </a:bodyPr>
           <a:lstStyle>
-            <a:lvl1pPr indent="-317500" lvl="0" marL="457200">
+            <a:lvl1pPr marL="457200" lvl="0" indent="-317500">
               <a:spcBef>
                 <a:spcPts val="0"/>
               </a:spcBef>
@@ -3801,7 +3976,7 @@
               <a:buChar char="●"/>
               <a:defRPr sz="1400"/>
             </a:lvl1pPr>
-            <a:lvl2pPr indent="-304800" lvl="1" marL="914400">
+            <a:lvl2pPr marL="914400" lvl="1" indent="-304800">
               <a:spcBef>
                 <a:spcPts val="0"/>
               </a:spcBef>
@@ -3812,7 +3987,7 @@
               <a:buChar char="○"/>
               <a:defRPr sz="1200"/>
             </a:lvl2pPr>
-            <a:lvl3pPr indent="-304800" lvl="2" marL="1371600">
+            <a:lvl3pPr marL="1371600" lvl="2" indent="-304800">
               <a:spcBef>
                 <a:spcPts val="0"/>
               </a:spcBef>
@@ -3823,7 +3998,7 @@
               <a:buChar char="■"/>
               <a:defRPr sz="1200"/>
             </a:lvl3pPr>
-            <a:lvl4pPr indent="-304800" lvl="3" marL="1828800">
+            <a:lvl4pPr marL="1828800" lvl="3" indent="-304800">
               <a:spcBef>
                 <a:spcPts val="0"/>
               </a:spcBef>
@@ -3834,7 +4009,7 @@
               <a:buChar char="●"/>
               <a:defRPr sz="1200"/>
             </a:lvl4pPr>
-            <a:lvl5pPr indent="-304800" lvl="4" marL="2286000">
+            <a:lvl5pPr marL="2286000" lvl="4" indent="-304800">
               <a:spcBef>
                 <a:spcPts val="0"/>
               </a:spcBef>
@@ -3845,7 +4020,7 @@
               <a:buChar char="○"/>
               <a:defRPr sz="1200"/>
             </a:lvl5pPr>
-            <a:lvl6pPr indent="-304800" lvl="5" marL="2743200">
+            <a:lvl6pPr marL="2743200" lvl="5" indent="-304800">
               <a:spcBef>
                 <a:spcPts val="0"/>
               </a:spcBef>
@@ -3856,7 +4031,7 @@
               <a:buChar char="■"/>
               <a:defRPr sz="1200"/>
             </a:lvl6pPr>
-            <a:lvl7pPr indent="-304800" lvl="6" marL="3200400">
+            <a:lvl7pPr marL="3200400" lvl="6" indent="-304800">
               <a:spcBef>
                 <a:spcPts val="0"/>
               </a:spcBef>
@@ -3867,7 +4042,7 @@
               <a:buChar char="●"/>
               <a:defRPr sz="1200"/>
             </a:lvl7pPr>
-            <a:lvl8pPr indent="-304800" lvl="7" marL="3657600">
+            <a:lvl8pPr marL="3657600" lvl="7" indent="-304800">
               <a:spcBef>
                 <a:spcPts val="0"/>
               </a:spcBef>
@@ -3878,7 +4053,7 @@
               <a:buChar char="○"/>
               <a:defRPr sz="1200"/>
             </a:lvl8pPr>
-            <a:lvl9pPr indent="-304800" lvl="8" marL="4114800">
+            <a:lvl9pPr marL="4114800" lvl="8" indent="-304800">
               <a:spcBef>
                 <a:spcPts val="0"/>
               </a:spcBef>
@@ -3890,15 +4065,19 @@
               <a:defRPr sz="1200"/>
             </a:lvl9pPr>
           </a:lstStyle>
-          <a:p/>
+          <a:p>
+            <a:endParaRPr/>
+          </a:p>
         </p:txBody>
       </p:sp>
       <p:sp>
         <p:nvSpPr>
           <p:cNvPr id="24" name="Google Shape;24;p5"/>
-          <p:cNvSpPr txBox="1"/>
+          <p:cNvSpPr txBox="1">
+            <a:spLocks noGrp="1"/>
+          </p:cNvSpPr>
           <p:nvPr>
-            <p:ph idx="12" type="sldNum"/>
+            <p:ph type="sldNum" idx="12"/>
           </p:nvPr>
         </p:nvSpPr>
         <p:spPr>
@@ -3911,7 +4090,7 @@
           </a:prstGeom>
         </p:spPr>
         <p:txBody>
-          <a:bodyPr anchorCtr="0" anchor="ctr" bIns="91425" lIns="91425" spcFirstLastPara="1" rIns="91425" wrap="square" tIns="91425">
+          <a:bodyPr spcFirstLastPara="1" wrap="square" lIns="91425" tIns="91425" rIns="91425" bIns="91425" anchor="ctr" anchorCtr="0">
             <a:normAutofit/>
           </a:bodyPr>
           <a:lstStyle>
@@ -3953,7 +4132,7 @@
             </a:lvl9pPr>
           </a:lstStyle>
           <a:p>
-            <a:pPr indent="0" lvl="0" marL="0" rtl="0" algn="r">
+            <a:pPr marL="0" lvl="0" indent="0" algn="r" rtl="0">
               <a:spcBef>
                 <a:spcPts val="0"/>
               </a:spcBef>
@@ -3979,11 +4158,11 @@
 </file>
 
 <file path=ppt/slideLayouts/slideLayout5.xml><?xml version="1.0" encoding="utf-8"?>
-<p:sldLayout xmlns:a="http://schemas.openxmlformats.org/drawingml/2006/main" xmlns:r="http://schemas.openxmlformats.org/officeDocument/2006/relationships" xmlns:mc="http://schemas.openxmlformats.org/markup-compatibility/2006" xmlns:mv="urn:schemas-microsoft-com:mac:vml" xmlns:p="http://schemas.openxmlformats.org/presentationml/2006/main" xmlns:c="http://schemas.openxmlformats.org/drawingml/2006/chart" xmlns:dgm="http://schemas.openxmlformats.org/drawingml/2006/diagram" xmlns:o="urn:schemas-microsoft-com:office:office" xmlns:v="urn:schemas-microsoft-com:vml" xmlns:pvml="urn:schemas-microsoft-com:office:powerpoint" xmlns:com="http://schemas.openxmlformats.org/drawingml/2006/compatibility" xmlns:p14="http://schemas.microsoft.com/office/powerpoint/2010/main" xmlns:p15="http://schemas.microsoft.com/office/powerpoint/2012/main" xmlns:ahyp="http://schemas.microsoft.com/office/drawing/2018/hyperlinkcolor" matchingName="Title only" type="titleOnly">
+<p:sldLayout xmlns:a="http://schemas.openxmlformats.org/drawingml/2006/main" xmlns:r="http://schemas.openxmlformats.org/officeDocument/2006/relationships" xmlns:p="http://schemas.openxmlformats.org/presentationml/2006/main" matchingName="Title only" type="titleOnly">
   <p:cSld name="TITLE_ONLY">
     <p:spTree>
       <p:nvGrpSpPr>
-        <p:cNvPr id="25" name="Shape 25"/>
+        <p:cNvPr id="1" name="Shape 25"/>
         <p:cNvGrpSpPr/>
         <p:nvPr/>
       </p:nvGrpSpPr>
@@ -3998,7 +4177,9 @@
       <p:sp>
         <p:nvSpPr>
           <p:cNvPr id="26" name="Google Shape;26;p6"/>
-          <p:cNvSpPr txBox="1"/>
+          <p:cNvSpPr txBox="1">
+            <a:spLocks noGrp="1"/>
+          </p:cNvSpPr>
           <p:nvPr>
             <p:ph type="title"/>
           </p:nvPr>
@@ -4013,7 +4194,7 @@
           </a:prstGeom>
         </p:spPr>
         <p:txBody>
-          <a:bodyPr anchorCtr="0" anchor="t" bIns="91425" lIns="91425" spcFirstLastPara="1" rIns="91425" wrap="square" tIns="91425">
+          <a:bodyPr spcFirstLastPara="1" wrap="square" lIns="91425" tIns="91425" rIns="91425" bIns="91425" anchor="t" anchorCtr="0">
             <a:normAutofit/>
           </a:bodyPr>
           <a:lstStyle>
@@ -4117,15 +4298,19 @@
               <a:defRPr/>
             </a:lvl9pPr>
           </a:lstStyle>
-          <a:p/>
+          <a:p>
+            <a:endParaRPr/>
+          </a:p>
         </p:txBody>
       </p:sp>
       <p:sp>
         <p:nvSpPr>
           <p:cNvPr id="27" name="Google Shape;27;p6"/>
-          <p:cNvSpPr txBox="1"/>
+          <p:cNvSpPr txBox="1">
+            <a:spLocks noGrp="1"/>
+          </p:cNvSpPr>
           <p:nvPr>
-            <p:ph idx="12" type="sldNum"/>
+            <p:ph type="sldNum" idx="12"/>
           </p:nvPr>
         </p:nvSpPr>
         <p:spPr>
@@ -4138,7 +4323,7 @@
           </a:prstGeom>
         </p:spPr>
         <p:txBody>
-          <a:bodyPr anchorCtr="0" anchor="ctr" bIns="91425" lIns="91425" spcFirstLastPara="1" rIns="91425" wrap="square" tIns="91425">
+          <a:bodyPr spcFirstLastPara="1" wrap="square" lIns="91425" tIns="91425" rIns="91425" bIns="91425" anchor="ctr" anchorCtr="0">
             <a:normAutofit/>
           </a:bodyPr>
           <a:lstStyle>
@@ -4180,7 +4365,7 @@
             </a:lvl9pPr>
           </a:lstStyle>
           <a:p>
-            <a:pPr indent="0" lvl="0" marL="0" rtl="0" algn="r">
+            <a:pPr marL="0" lvl="0" indent="0" algn="r" rtl="0">
               <a:spcBef>
                 <a:spcPts val="0"/>
               </a:spcBef>
@@ -4206,11 +4391,11 @@
 </file>
 
 <file path=ppt/slideLayouts/slideLayout6.xml><?xml version="1.0" encoding="utf-8"?>
-<p:sldLayout xmlns:a="http://schemas.openxmlformats.org/drawingml/2006/main" xmlns:r="http://schemas.openxmlformats.org/officeDocument/2006/relationships" xmlns:mc="http://schemas.openxmlformats.org/markup-compatibility/2006" xmlns:mv="urn:schemas-microsoft-com:mac:vml" xmlns:p="http://schemas.openxmlformats.org/presentationml/2006/main" xmlns:c="http://schemas.openxmlformats.org/drawingml/2006/chart" xmlns:dgm="http://schemas.openxmlformats.org/drawingml/2006/diagram" xmlns:o="urn:schemas-microsoft-com:office:office" xmlns:v="urn:schemas-microsoft-com:vml" xmlns:pvml="urn:schemas-microsoft-com:office:powerpoint" xmlns:com="http://schemas.openxmlformats.org/drawingml/2006/compatibility" xmlns:p14="http://schemas.microsoft.com/office/powerpoint/2010/main" xmlns:p15="http://schemas.microsoft.com/office/powerpoint/2012/main" xmlns:ahyp="http://schemas.microsoft.com/office/drawing/2018/hyperlinkcolor" matchingName="One column text">
+<p:sldLayout xmlns:a="http://schemas.openxmlformats.org/drawingml/2006/main" xmlns:r="http://schemas.openxmlformats.org/officeDocument/2006/relationships" xmlns:p="http://schemas.openxmlformats.org/presentationml/2006/main" matchingName="One column text">
   <p:cSld name="ONE_COLUMN_TEXT">
     <p:spTree>
       <p:nvGrpSpPr>
-        <p:cNvPr id="28" name="Shape 28"/>
+        <p:cNvPr id="1" name="Shape 28"/>
         <p:cNvGrpSpPr/>
         <p:nvPr/>
       </p:nvGrpSpPr>
@@ -4225,7 +4410,9 @@
       <p:sp>
         <p:nvSpPr>
           <p:cNvPr id="29" name="Google Shape;29;p7"/>
-          <p:cNvSpPr txBox="1"/>
+          <p:cNvSpPr txBox="1">
+            <a:spLocks noGrp="1"/>
+          </p:cNvSpPr>
           <p:nvPr>
             <p:ph type="title"/>
           </p:nvPr>
@@ -4240,7 +4427,7 @@
           </a:prstGeom>
         </p:spPr>
         <p:txBody>
-          <a:bodyPr anchorCtr="0" anchor="b" bIns="91425" lIns="91425" spcFirstLastPara="1" rIns="91425" wrap="square" tIns="91425">
+          <a:bodyPr spcFirstLastPara="1" wrap="square" lIns="91425" tIns="91425" rIns="91425" bIns="91425" anchor="b" anchorCtr="0">
             <a:normAutofit/>
           </a:bodyPr>
           <a:lstStyle>
@@ -4344,15 +4531,19 @@
               <a:defRPr sz="2400"/>
             </a:lvl9pPr>
           </a:lstStyle>
-          <a:p/>
+          <a:p>
+            <a:endParaRPr/>
+          </a:p>
         </p:txBody>
       </p:sp>
       <p:sp>
         <p:nvSpPr>
           <p:cNvPr id="30" name="Google Shape;30;p7"/>
-          <p:cNvSpPr txBox="1"/>
+          <p:cNvSpPr txBox="1">
+            <a:spLocks noGrp="1"/>
+          </p:cNvSpPr>
           <p:nvPr>
-            <p:ph idx="1" type="body"/>
+            <p:ph type="body" idx="1"/>
           </p:nvPr>
         </p:nvSpPr>
         <p:spPr>
@@ -4365,11 +4556,11 @@
           </a:prstGeom>
         </p:spPr>
         <p:txBody>
-          <a:bodyPr anchorCtr="0" anchor="t" bIns="91425" lIns="91425" spcFirstLastPara="1" rIns="91425" wrap="square" tIns="91425">
+          <a:bodyPr spcFirstLastPara="1" wrap="square" lIns="91425" tIns="91425" rIns="91425" bIns="91425" anchor="t" anchorCtr="0">
             <a:normAutofit/>
           </a:bodyPr>
           <a:lstStyle>
-            <a:lvl1pPr indent="-304800" lvl="0" marL="457200">
+            <a:lvl1pPr marL="457200" lvl="0" indent="-304800">
               <a:spcBef>
                 <a:spcPts val="0"/>
               </a:spcBef>
@@ -4380,7 +4571,7 @@
               <a:buChar char="●"/>
               <a:defRPr sz="1200"/>
             </a:lvl1pPr>
-            <a:lvl2pPr indent="-304800" lvl="1" marL="914400">
+            <a:lvl2pPr marL="914400" lvl="1" indent="-304800">
               <a:spcBef>
                 <a:spcPts val="0"/>
               </a:spcBef>
@@ -4391,7 +4582,7 @@
               <a:buChar char="○"/>
               <a:defRPr sz="1200"/>
             </a:lvl2pPr>
-            <a:lvl3pPr indent="-304800" lvl="2" marL="1371600">
+            <a:lvl3pPr marL="1371600" lvl="2" indent="-304800">
               <a:spcBef>
                 <a:spcPts val="0"/>
               </a:spcBef>
@@ -4402,7 +4593,7 @@
               <a:buChar char="■"/>
               <a:defRPr sz="1200"/>
             </a:lvl3pPr>
-            <a:lvl4pPr indent="-304800" lvl="3" marL="1828800">
+            <a:lvl4pPr marL="1828800" lvl="3" indent="-304800">
               <a:spcBef>
                 <a:spcPts val="0"/>
               </a:spcBef>
@@ -4413,7 +4604,7 @@
               <a:buChar char="●"/>
               <a:defRPr sz="1200"/>
             </a:lvl4pPr>
-            <a:lvl5pPr indent="-304800" lvl="4" marL="2286000">
+            <a:lvl5pPr marL="2286000" lvl="4" indent="-304800">
               <a:spcBef>
                 <a:spcPts val="0"/>
               </a:spcBef>
@@ -4424,7 +4615,7 @@
               <a:buChar char="○"/>
               <a:defRPr sz="1200"/>
             </a:lvl5pPr>
-            <a:lvl6pPr indent="-304800" lvl="5" marL="2743200">
+            <a:lvl6pPr marL="2743200" lvl="5" indent="-304800">
               <a:spcBef>
                 <a:spcPts val="0"/>
               </a:spcBef>
@@ -4435,7 +4626,7 @@
               <a:buChar char="■"/>
               <a:defRPr sz="1200"/>
             </a:lvl6pPr>
-            <a:lvl7pPr indent="-304800" lvl="6" marL="3200400">
+            <a:lvl7pPr marL="3200400" lvl="6" indent="-304800">
               <a:spcBef>
                 <a:spcPts val="0"/>
               </a:spcBef>
@@ -4446,7 +4637,7 @@
               <a:buChar char="●"/>
               <a:defRPr sz="1200"/>
             </a:lvl7pPr>
-            <a:lvl8pPr indent="-304800" lvl="7" marL="3657600">
+            <a:lvl8pPr marL="3657600" lvl="7" indent="-304800">
               <a:spcBef>
                 <a:spcPts val="0"/>
               </a:spcBef>
@@ -4457,7 +4648,7 @@
               <a:buChar char="○"/>
               <a:defRPr sz="1200"/>
             </a:lvl8pPr>
-            <a:lvl9pPr indent="-304800" lvl="8" marL="4114800">
+            <a:lvl9pPr marL="4114800" lvl="8" indent="-304800">
               <a:spcBef>
                 <a:spcPts val="0"/>
               </a:spcBef>
@@ -4469,15 +4660,19 @@
               <a:defRPr sz="1200"/>
             </a:lvl9pPr>
           </a:lstStyle>
-          <a:p/>
+          <a:p>
+            <a:endParaRPr/>
+          </a:p>
         </p:txBody>
       </p:sp>
       <p:sp>
         <p:nvSpPr>
           <p:cNvPr id="31" name="Google Shape;31;p7"/>
-          <p:cNvSpPr txBox="1"/>
+          <p:cNvSpPr txBox="1">
+            <a:spLocks noGrp="1"/>
+          </p:cNvSpPr>
           <p:nvPr>
-            <p:ph idx="12" type="sldNum"/>
+            <p:ph type="sldNum" idx="12"/>
           </p:nvPr>
         </p:nvSpPr>
         <p:spPr>
@@ -4490,7 +4685,7 @@
           </a:prstGeom>
         </p:spPr>
         <p:txBody>
-          <a:bodyPr anchorCtr="0" anchor="ctr" bIns="91425" lIns="91425" spcFirstLastPara="1" rIns="91425" wrap="square" tIns="91425">
+          <a:bodyPr spcFirstLastPara="1" wrap="square" lIns="91425" tIns="91425" rIns="91425" bIns="91425" anchor="ctr" anchorCtr="0">
             <a:normAutofit/>
           </a:bodyPr>
           <a:lstStyle>
@@ -4532,7 +4727,7 @@
             </a:lvl9pPr>
           </a:lstStyle>
           <a:p>
-            <a:pPr indent="0" lvl="0" marL="0" rtl="0" algn="r">
+            <a:pPr marL="0" lvl="0" indent="0" algn="r" rtl="0">
               <a:spcBef>
                 <a:spcPts val="0"/>
               </a:spcBef>
@@ -4558,11 +4753,11 @@
 </file>
 
 <file path=ppt/slideLayouts/slideLayout7.xml><?xml version="1.0" encoding="utf-8"?>
-<p:sldLayout xmlns:a="http://schemas.openxmlformats.org/drawingml/2006/main" xmlns:r="http://schemas.openxmlformats.org/officeDocument/2006/relationships" xmlns:mc="http://schemas.openxmlformats.org/markup-compatibility/2006" xmlns:mv="urn:schemas-microsoft-com:mac:vml" xmlns:p="http://schemas.openxmlformats.org/presentationml/2006/main" xmlns:c="http://schemas.openxmlformats.org/drawingml/2006/chart" xmlns:dgm="http://schemas.openxmlformats.org/drawingml/2006/diagram" xmlns:o="urn:schemas-microsoft-com:office:office" xmlns:v="urn:schemas-microsoft-com:vml" xmlns:pvml="urn:schemas-microsoft-com:office:powerpoint" xmlns:com="http://schemas.openxmlformats.org/drawingml/2006/compatibility" xmlns:p14="http://schemas.microsoft.com/office/powerpoint/2010/main" xmlns:p15="http://schemas.microsoft.com/office/powerpoint/2012/main" xmlns:ahyp="http://schemas.microsoft.com/office/drawing/2018/hyperlinkcolor" matchingName="Main point">
+<p:sldLayout xmlns:a="http://schemas.openxmlformats.org/drawingml/2006/main" xmlns:r="http://schemas.openxmlformats.org/officeDocument/2006/relationships" xmlns:p="http://schemas.openxmlformats.org/presentationml/2006/main" matchingName="Main point">
   <p:cSld name="MAIN_POINT">
     <p:spTree>
       <p:nvGrpSpPr>
-        <p:cNvPr id="32" name="Shape 32"/>
+        <p:cNvPr id="1" name="Shape 32"/>
         <p:cNvGrpSpPr/>
         <p:nvPr/>
       </p:nvGrpSpPr>
@@ -4577,7 +4772,9 @@
       <p:sp>
         <p:nvSpPr>
           <p:cNvPr id="33" name="Google Shape;33;p8"/>
-          <p:cNvSpPr txBox="1"/>
+          <p:cNvSpPr txBox="1">
+            <a:spLocks noGrp="1"/>
+          </p:cNvSpPr>
           <p:nvPr>
             <p:ph type="title"/>
           </p:nvPr>
@@ -4592,7 +4789,7 @@
           </a:prstGeom>
         </p:spPr>
         <p:txBody>
-          <a:bodyPr anchorCtr="0" anchor="ctr" bIns="91425" lIns="91425" spcFirstLastPara="1" rIns="91425" wrap="square" tIns="91425">
+          <a:bodyPr spcFirstLastPara="1" wrap="square" lIns="91425" tIns="91425" rIns="91425" bIns="91425" anchor="ctr" anchorCtr="0">
             <a:normAutofit/>
           </a:bodyPr>
           <a:lstStyle>
@@ -4696,15 +4893,19 @@
               <a:defRPr sz="4800"/>
             </a:lvl9pPr>
           </a:lstStyle>
-          <a:p/>
+          <a:p>
+            <a:endParaRPr/>
+          </a:p>
         </p:txBody>
       </p:sp>
       <p:sp>
         <p:nvSpPr>
           <p:cNvPr id="34" name="Google Shape;34;p8"/>
-          <p:cNvSpPr txBox="1"/>
+          <p:cNvSpPr txBox="1">
+            <a:spLocks noGrp="1"/>
+          </p:cNvSpPr>
           <p:nvPr>
-            <p:ph idx="12" type="sldNum"/>
+            <p:ph type="sldNum" idx="12"/>
           </p:nvPr>
         </p:nvSpPr>
         <p:spPr>
@@ -4717,7 +4918,7 @@
           </a:prstGeom>
         </p:spPr>
         <p:txBody>
-          <a:bodyPr anchorCtr="0" anchor="ctr" bIns="91425" lIns="91425" spcFirstLastPara="1" rIns="91425" wrap="square" tIns="91425">
+          <a:bodyPr spcFirstLastPara="1" wrap="square" lIns="91425" tIns="91425" rIns="91425" bIns="91425" anchor="ctr" anchorCtr="0">
             <a:normAutofit/>
           </a:bodyPr>
           <a:lstStyle>
@@ -4759,7 +4960,7 @@
             </a:lvl9pPr>
           </a:lstStyle>
           <a:p>
-            <a:pPr indent="0" lvl="0" marL="0" rtl="0" algn="r">
+            <a:pPr marL="0" lvl="0" indent="0" algn="r" rtl="0">
               <a:spcBef>
                 <a:spcPts val="0"/>
               </a:spcBef>
@@ -4785,11 +4986,11 @@
 </file>
 
 <file path=ppt/slideLayouts/slideLayout8.xml><?xml version="1.0" encoding="utf-8"?>
-<p:sldLayout xmlns:a="http://schemas.openxmlformats.org/drawingml/2006/main" xmlns:r="http://schemas.openxmlformats.org/officeDocument/2006/relationships" xmlns:mc="http://schemas.openxmlformats.org/markup-compatibility/2006" xmlns:mv="urn:schemas-microsoft-com:mac:vml" xmlns:p="http://schemas.openxmlformats.org/presentationml/2006/main" xmlns:c="http://schemas.openxmlformats.org/drawingml/2006/chart" xmlns:dgm="http://schemas.openxmlformats.org/drawingml/2006/diagram" xmlns:o="urn:schemas-microsoft-com:office:office" xmlns:v="urn:schemas-microsoft-com:vml" xmlns:pvml="urn:schemas-microsoft-com:office:powerpoint" xmlns:com="http://schemas.openxmlformats.org/drawingml/2006/compatibility" xmlns:p14="http://schemas.microsoft.com/office/powerpoint/2010/main" xmlns:p15="http://schemas.microsoft.com/office/powerpoint/2012/main" xmlns:ahyp="http://schemas.microsoft.com/office/drawing/2018/hyperlinkcolor" matchingName="Section title and description">
+<p:sldLayout xmlns:a="http://schemas.openxmlformats.org/drawingml/2006/main" xmlns:r="http://schemas.openxmlformats.org/officeDocument/2006/relationships" xmlns:p="http://schemas.openxmlformats.org/presentationml/2006/main" matchingName="Section title and description">
   <p:cSld name="SECTION_TITLE_AND_DESCRIPTION">
     <p:spTree>
       <p:nvGrpSpPr>
-        <p:cNvPr id="35" name="Shape 35"/>
+        <p:cNvPr id="1" name="Shape 35"/>
         <p:cNvGrpSpPr/>
         <p:nvPr/>
       </p:nvGrpSpPr>
@@ -4823,12 +5024,12 @@
           </a:ln>
         </p:spPr>
         <p:txBody>
-          <a:bodyPr anchorCtr="0" anchor="ctr" bIns="91425" lIns="91425" spcFirstLastPara="1" rIns="91425" wrap="square" tIns="91425">
+          <a:bodyPr spcFirstLastPara="1" wrap="square" lIns="91425" tIns="91425" rIns="91425" bIns="91425" anchor="ctr" anchorCtr="0">
             <a:noAutofit/>
           </a:bodyPr>
           <a:lstStyle/>
           <a:p>
-            <a:pPr indent="0" lvl="0" marL="0" rtl="0" algn="l">
+            <a:pPr marL="0" lvl="0" indent="0" algn="l" rtl="0">
               <a:spcBef>
                 <a:spcPts val="0"/>
               </a:spcBef>
@@ -4837,9 +5038,6 @@
               </a:spcAft>
               <a:buNone/>
             </a:pPr>
-            <a:r>
-              <a:t/>
-            </a:r>
             <a:endParaRPr/>
           </a:p>
         </p:txBody>
@@ -4847,7 +5045,9 @@
       <p:sp>
         <p:nvSpPr>
           <p:cNvPr id="37" name="Google Shape;37;p9"/>
-          <p:cNvSpPr txBox="1"/>
+          <p:cNvSpPr txBox="1">
+            <a:spLocks noGrp="1"/>
+          </p:cNvSpPr>
           <p:nvPr>
             <p:ph type="title"/>
           </p:nvPr>
@@ -4862,7 +5062,7 @@
           </a:prstGeom>
         </p:spPr>
         <p:txBody>
-          <a:bodyPr anchorCtr="0" anchor="b" bIns="91425" lIns="91425" spcFirstLastPara="1" rIns="91425" wrap="square" tIns="91425">
+          <a:bodyPr spcFirstLastPara="1" wrap="square" lIns="91425" tIns="91425" rIns="91425" bIns="91425" anchor="b" anchorCtr="0">
             <a:normAutofit/>
           </a:bodyPr>
           <a:lstStyle>
@@ -4966,15 +5166,19 @@
               <a:defRPr sz="4200"/>
             </a:lvl9pPr>
           </a:lstStyle>
-          <a:p/>
+          <a:p>
+            <a:endParaRPr/>
+          </a:p>
         </p:txBody>
       </p:sp>
       <p:sp>
         <p:nvSpPr>
           <p:cNvPr id="38" name="Google Shape;38;p9"/>
-          <p:cNvSpPr txBox="1"/>
+          <p:cNvSpPr txBox="1">
+            <a:spLocks noGrp="1"/>
+          </p:cNvSpPr>
           <p:nvPr>
-            <p:ph idx="1" type="subTitle"/>
+            <p:ph type="subTitle" idx="1"/>
           </p:nvPr>
         </p:nvSpPr>
         <p:spPr>
@@ -4987,7 +5191,7 @@
           </a:prstGeom>
         </p:spPr>
         <p:txBody>
-          <a:bodyPr anchorCtr="0" anchor="t" bIns="91425" lIns="91425" spcFirstLastPara="1" rIns="91425" wrap="square" tIns="91425">
+          <a:bodyPr spcFirstLastPara="1" wrap="square" lIns="91425" tIns="91425" rIns="91425" bIns="91425" anchor="t" anchorCtr="0">
             <a:normAutofit/>
           </a:bodyPr>
           <a:lstStyle>
@@ -5118,15 +5322,19 @@
               <a:defRPr sz="2100"/>
             </a:lvl9pPr>
           </a:lstStyle>
-          <a:p/>
+          <a:p>
+            <a:endParaRPr/>
+          </a:p>
         </p:txBody>
       </p:sp>
       <p:sp>
         <p:nvSpPr>
           <p:cNvPr id="39" name="Google Shape;39;p9"/>
-          <p:cNvSpPr txBox="1"/>
+          <p:cNvSpPr txBox="1">
+            <a:spLocks noGrp="1"/>
+          </p:cNvSpPr>
           <p:nvPr>
-            <p:ph idx="2" type="body"/>
+            <p:ph type="body" idx="2"/>
           </p:nvPr>
         </p:nvSpPr>
         <p:spPr>
@@ -5139,11 +5347,11 @@
           </a:prstGeom>
         </p:spPr>
         <p:txBody>
-          <a:bodyPr anchorCtr="0" anchor="ctr" bIns="91425" lIns="91425" spcFirstLastPara="1" rIns="91425" wrap="square" tIns="91425">
+          <a:bodyPr spcFirstLastPara="1" wrap="square" lIns="91425" tIns="91425" rIns="91425" bIns="91425" anchor="ctr" anchorCtr="0">
             <a:normAutofit/>
           </a:bodyPr>
           <a:lstStyle>
-            <a:lvl1pPr indent="-342900" lvl="0" marL="457200">
+            <a:lvl1pPr marL="457200" lvl="0" indent="-342900">
               <a:spcBef>
                 <a:spcPts val="0"/>
               </a:spcBef>
@@ -5161,7 +5369,7 @@
                 </a:solidFill>
               </a:defRPr>
             </a:lvl1pPr>
-            <a:lvl2pPr indent="-317500" lvl="1" marL="914400">
+            <a:lvl2pPr marL="914400" lvl="1" indent="-317500">
               <a:spcBef>
                 <a:spcPts val="0"/>
               </a:spcBef>
@@ -5179,7 +5387,7 @@
                 </a:solidFill>
               </a:defRPr>
             </a:lvl2pPr>
-            <a:lvl3pPr indent="-317500" lvl="2" marL="1371600">
+            <a:lvl3pPr marL="1371600" lvl="2" indent="-317500">
               <a:spcBef>
                 <a:spcPts val="0"/>
               </a:spcBef>
@@ -5197,7 +5405,7 @@
                 </a:solidFill>
               </a:defRPr>
             </a:lvl3pPr>
-            <a:lvl4pPr indent="-317500" lvl="3" marL="1828800">
+            <a:lvl4pPr marL="1828800" lvl="3" indent="-317500">
               <a:spcBef>
                 <a:spcPts val="0"/>
               </a:spcBef>
@@ -5215,7 +5423,7 @@
                 </a:solidFill>
               </a:defRPr>
             </a:lvl4pPr>
-            <a:lvl5pPr indent="-317500" lvl="4" marL="2286000">
+            <a:lvl5pPr marL="2286000" lvl="4" indent="-317500">
               <a:spcBef>
                 <a:spcPts val="0"/>
               </a:spcBef>
@@ -5233,7 +5441,7 @@
                 </a:solidFill>
               </a:defRPr>
             </a:lvl5pPr>
-            <a:lvl6pPr indent="-317500" lvl="5" marL="2743200">
+            <a:lvl6pPr marL="2743200" lvl="5" indent="-317500">
               <a:spcBef>
                 <a:spcPts val="0"/>
               </a:spcBef>
@@ -5251,7 +5459,7 @@
                 </a:solidFill>
               </a:defRPr>
             </a:lvl6pPr>
-            <a:lvl7pPr indent="-317500" lvl="6" marL="3200400">
+            <a:lvl7pPr marL="3200400" lvl="6" indent="-317500">
               <a:spcBef>
                 <a:spcPts val="0"/>
               </a:spcBef>
@@ -5269,7 +5477,7 @@
                 </a:solidFill>
               </a:defRPr>
             </a:lvl7pPr>
-            <a:lvl8pPr indent="-317500" lvl="7" marL="3657600">
+            <a:lvl8pPr marL="3657600" lvl="7" indent="-317500">
               <a:spcBef>
                 <a:spcPts val="0"/>
               </a:spcBef>
@@ -5287,7 +5495,7 @@
                 </a:solidFill>
               </a:defRPr>
             </a:lvl8pPr>
-            <a:lvl9pPr indent="-317500" lvl="8" marL="4114800">
+            <a:lvl9pPr marL="4114800" lvl="8" indent="-317500">
               <a:spcBef>
                 <a:spcPts val="0"/>
               </a:spcBef>
@@ -5306,15 +5514,19 @@
               </a:defRPr>
             </a:lvl9pPr>
           </a:lstStyle>
-          <a:p/>
+          <a:p>
+            <a:endParaRPr/>
+          </a:p>
         </p:txBody>
       </p:sp>
       <p:sp>
         <p:nvSpPr>
           <p:cNvPr id="40" name="Google Shape;40;p9"/>
-          <p:cNvSpPr txBox="1"/>
+          <p:cNvSpPr txBox="1">
+            <a:spLocks noGrp="1"/>
+          </p:cNvSpPr>
           <p:nvPr>
-            <p:ph idx="12" type="sldNum"/>
+            <p:ph type="sldNum" idx="12"/>
           </p:nvPr>
         </p:nvSpPr>
         <p:spPr>
@@ -5327,7 +5539,7 @@
           </a:prstGeom>
         </p:spPr>
         <p:txBody>
-          <a:bodyPr anchorCtr="0" anchor="ctr" bIns="91425" lIns="91425" spcFirstLastPara="1" rIns="91425" wrap="square" tIns="91425">
+          <a:bodyPr spcFirstLastPara="1" wrap="square" lIns="91425" tIns="91425" rIns="91425" bIns="91425" anchor="ctr" anchorCtr="0">
             <a:normAutofit/>
           </a:bodyPr>
           <a:lstStyle>
@@ -5369,7 +5581,7 @@
             </a:lvl9pPr>
           </a:lstStyle>
           <a:p>
-            <a:pPr indent="0" lvl="0" marL="0" rtl="0" algn="r">
+            <a:pPr marL="0" lvl="0" indent="0" algn="r" rtl="0">
               <a:spcBef>
                 <a:spcPts val="0"/>
               </a:spcBef>
@@ -5395,11 +5607,11 @@
 </file>
 
 <file path=ppt/slideLayouts/slideLayout9.xml><?xml version="1.0" encoding="utf-8"?>
-<p:sldLayout xmlns:a="http://schemas.openxmlformats.org/drawingml/2006/main" xmlns:r="http://schemas.openxmlformats.org/officeDocument/2006/relationships" xmlns:mc="http://schemas.openxmlformats.org/markup-compatibility/2006" xmlns:mv="urn:schemas-microsoft-com:mac:vml" xmlns:p="http://schemas.openxmlformats.org/presentationml/2006/main" xmlns:c="http://schemas.openxmlformats.org/drawingml/2006/chart" xmlns:dgm="http://schemas.openxmlformats.org/drawingml/2006/diagram" xmlns:o="urn:schemas-microsoft-com:office:office" xmlns:v="urn:schemas-microsoft-com:vml" xmlns:pvml="urn:schemas-microsoft-com:office:powerpoint" xmlns:com="http://schemas.openxmlformats.org/drawingml/2006/compatibility" xmlns:p14="http://schemas.microsoft.com/office/powerpoint/2010/main" xmlns:p15="http://schemas.microsoft.com/office/powerpoint/2012/main" xmlns:ahyp="http://schemas.microsoft.com/office/drawing/2018/hyperlinkcolor" matchingName="Caption">
+<p:sldLayout xmlns:a="http://schemas.openxmlformats.org/drawingml/2006/main" xmlns:r="http://schemas.openxmlformats.org/officeDocument/2006/relationships" xmlns:p="http://schemas.openxmlformats.org/presentationml/2006/main" matchingName="Caption">
   <p:cSld name="CAPTION_ONLY">
     <p:spTree>
       <p:nvGrpSpPr>
-        <p:cNvPr id="41" name="Shape 41"/>
+        <p:cNvPr id="1" name="Shape 41"/>
         <p:cNvGrpSpPr/>
         <p:nvPr/>
       </p:nvGrpSpPr>
@@ -5414,9 +5626,11 @@
       <p:sp>
         <p:nvSpPr>
           <p:cNvPr id="42" name="Google Shape;42;p10"/>
-          <p:cNvSpPr txBox="1"/>
+          <p:cNvSpPr txBox="1">
+            <a:spLocks noGrp="1"/>
+          </p:cNvSpPr>
           <p:nvPr>
-            <p:ph idx="1" type="body"/>
+            <p:ph type="body" idx="1"/>
           </p:nvPr>
         </p:nvSpPr>
         <p:spPr>
@@ -5429,11 +5643,11 @@
           </a:prstGeom>
         </p:spPr>
         <p:txBody>
-          <a:bodyPr anchorCtr="0" anchor="ctr" bIns="91425" lIns="91425" spcFirstLastPara="1" rIns="91425" wrap="square" tIns="91425">
+          <a:bodyPr spcFirstLastPara="1" wrap="square" lIns="91425" tIns="91425" rIns="91425" bIns="91425" anchor="ctr" anchorCtr="0">
             <a:normAutofit/>
           </a:bodyPr>
           <a:lstStyle>
-            <a:lvl1pPr indent="-228600" lvl="0" marL="457200">
+            <a:lvl1pPr marL="457200" lvl="0" indent="-228600">
               <a:lnSpc>
                 <a:spcPct val="100000"/>
               </a:lnSpc>
@@ -5448,15 +5662,19 @@
               <a:defRPr/>
             </a:lvl1pPr>
           </a:lstStyle>
-          <a:p/>
+          <a:p>
+            <a:endParaRPr/>
+          </a:p>
         </p:txBody>
       </p:sp>
       <p:sp>
         <p:nvSpPr>
           <p:cNvPr id="43" name="Google Shape;43;p10"/>
-          <p:cNvSpPr txBox="1"/>
+          <p:cNvSpPr txBox="1">
+            <a:spLocks noGrp="1"/>
+          </p:cNvSpPr>
           <p:nvPr>
-            <p:ph idx="12" type="sldNum"/>
+            <p:ph type="sldNum" idx="12"/>
           </p:nvPr>
         </p:nvSpPr>
         <p:spPr>
@@ -5469,7 +5687,7 @@
           </a:prstGeom>
         </p:spPr>
         <p:txBody>
-          <a:bodyPr anchorCtr="0" anchor="ctr" bIns="91425" lIns="91425" spcFirstLastPara="1" rIns="91425" wrap="square" tIns="91425">
+          <a:bodyPr spcFirstLastPara="1" wrap="square" lIns="91425" tIns="91425" rIns="91425" bIns="91425" anchor="ctr" anchorCtr="0">
             <a:normAutofit/>
           </a:bodyPr>
           <a:lstStyle>
@@ -5511,7 +5729,7 @@
             </a:lvl9pPr>
           </a:lstStyle>
           <a:p>
-            <a:pPr indent="0" lvl="0" marL="0" rtl="0" algn="r">
+            <a:pPr marL="0" lvl="0" indent="0" algn="r" rtl="0">
               <a:spcBef>
                 <a:spcPts val="0"/>
               </a:spcBef>
@@ -5537,18 +5755,19 @@
 </file>
 
 <file path=ppt/slideMasters/slideMaster1.xml><?xml version="1.0" encoding="utf-8"?>
-<p:sldMaster xmlns:a="http://schemas.openxmlformats.org/drawingml/2006/main" xmlns:r="http://schemas.openxmlformats.org/officeDocument/2006/relationships" xmlns:mc="http://schemas.openxmlformats.org/markup-compatibility/2006" xmlns:mv="urn:schemas-microsoft-com:mac:vml" xmlns:p="http://schemas.openxmlformats.org/presentationml/2006/main" xmlns:c="http://schemas.openxmlformats.org/drawingml/2006/chart" xmlns:dgm="http://schemas.openxmlformats.org/drawingml/2006/diagram" xmlns:o="urn:schemas-microsoft-com:office:office" xmlns:v="urn:schemas-microsoft-com:vml" xmlns:pvml="urn:schemas-microsoft-com:office:powerpoint" xmlns:com="http://schemas.openxmlformats.org/drawingml/2006/compatibility" xmlns:p14="http://schemas.microsoft.com/office/powerpoint/2010/main" xmlns:p15="http://schemas.microsoft.com/office/powerpoint/2012/main" xmlns:ahyp="http://schemas.microsoft.com/office/drawing/2018/hyperlinkcolor">
+<p:sldMaster xmlns:a="http://schemas.openxmlformats.org/drawingml/2006/main" xmlns:r="http://schemas.openxmlformats.org/officeDocument/2006/relationships" xmlns:p="http://schemas.openxmlformats.org/presentationml/2006/main">
   <p:cSld name="simple-dark-2">
     <p:bg>
       <p:bgPr>
         <a:solidFill>
           <a:schemeClr val="lt1"/>
         </a:solidFill>
+        <a:effectLst/>
       </p:bgPr>
     </p:bg>
     <p:spTree>
       <p:nvGrpSpPr>
-        <p:cNvPr id="5" name="Shape 5"/>
+        <p:cNvPr id="1" name="Shape 5"/>
         <p:cNvGrpSpPr/>
         <p:nvPr/>
       </p:nvGrpSpPr>
@@ -5563,7 +5782,9 @@
       <p:sp>
         <p:nvSpPr>
           <p:cNvPr id="6" name="Google Shape;6;p1"/>
-          <p:cNvSpPr txBox="1"/>
+          <p:cNvSpPr txBox="1">
+            <a:spLocks noGrp="1"/>
+          </p:cNvSpPr>
           <p:nvPr>
             <p:ph type="title"/>
           </p:nvPr>
@@ -5582,7 +5803,7 @@
           </a:ln>
         </p:spPr>
         <p:txBody>
-          <a:bodyPr anchorCtr="0" anchor="t" bIns="91425" lIns="91425" spcFirstLastPara="1" rIns="91425" wrap="square" tIns="91425">
+          <a:bodyPr spcFirstLastPara="1" wrap="square" lIns="91425" tIns="91425" rIns="91425" bIns="91425" anchor="t" anchorCtr="0">
             <a:normAutofit/>
           </a:bodyPr>
           <a:lstStyle>
@@ -5749,15 +5970,19 @@
               </a:defRPr>
             </a:lvl9pPr>
           </a:lstStyle>
-          <a:p/>
+          <a:p>
+            <a:endParaRPr/>
+          </a:p>
         </p:txBody>
       </p:sp>
       <p:sp>
         <p:nvSpPr>
           <p:cNvPr id="7" name="Google Shape;7;p1"/>
-          <p:cNvSpPr txBox="1"/>
+          <p:cNvSpPr txBox="1">
+            <a:spLocks noGrp="1"/>
+          </p:cNvSpPr>
           <p:nvPr>
-            <p:ph idx="1" type="body"/>
+            <p:ph type="body" idx="1"/>
           </p:nvPr>
         </p:nvSpPr>
         <p:spPr>
@@ -5774,11 +5999,11 @@
           </a:ln>
         </p:spPr>
         <p:txBody>
-          <a:bodyPr anchorCtr="0" anchor="t" bIns="91425" lIns="91425" spcFirstLastPara="1" rIns="91425" wrap="square" tIns="91425">
+          <a:bodyPr spcFirstLastPara="1" wrap="square" lIns="91425" tIns="91425" rIns="91425" bIns="91425" anchor="t" anchorCtr="0">
             <a:normAutofit/>
           </a:bodyPr>
           <a:lstStyle>
-            <a:lvl1pPr indent="-342900" lvl="0" marL="457200">
+            <a:lvl1pPr marL="457200" lvl="0" indent="-342900">
               <a:lnSpc>
                 <a:spcPct val="115000"/>
               </a:lnSpc>
@@ -5799,7 +6024,7 @@
                 </a:solidFill>
               </a:defRPr>
             </a:lvl1pPr>
-            <a:lvl2pPr indent="-317500" lvl="1" marL="914400">
+            <a:lvl2pPr marL="914400" lvl="1" indent="-317500">
               <a:lnSpc>
                 <a:spcPct val="115000"/>
               </a:lnSpc>
@@ -5820,7 +6045,7 @@
                 </a:solidFill>
               </a:defRPr>
             </a:lvl2pPr>
-            <a:lvl3pPr indent="-317500" lvl="2" marL="1371600">
+            <a:lvl3pPr marL="1371600" lvl="2" indent="-317500">
               <a:lnSpc>
                 <a:spcPct val="115000"/>
               </a:lnSpc>
@@ -5841,7 +6066,7 @@
                 </a:solidFill>
               </a:defRPr>
             </a:lvl3pPr>
-            <a:lvl4pPr indent="-317500" lvl="3" marL="1828800">
+            <a:lvl4pPr marL="1828800" lvl="3" indent="-317500">
               <a:lnSpc>
                 <a:spcPct val="115000"/>
               </a:lnSpc>
@@ -5862,7 +6087,7 @@
                 </a:solidFill>
               </a:defRPr>
             </a:lvl4pPr>
-            <a:lvl5pPr indent="-317500" lvl="4" marL="2286000">
+            <a:lvl5pPr marL="2286000" lvl="4" indent="-317500">
               <a:lnSpc>
                 <a:spcPct val="115000"/>
               </a:lnSpc>
@@ -5883,7 +6108,7 @@
                 </a:solidFill>
               </a:defRPr>
             </a:lvl5pPr>
-            <a:lvl6pPr indent="-317500" lvl="5" marL="2743200">
+            <a:lvl6pPr marL="2743200" lvl="5" indent="-317500">
               <a:lnSpc>
                 <a:spcPct val="115000"/>
               </a:lnSpc>
@@ -5904,7 +6129,7 @@
                 </a:solidFill>
               </a:defRPr>
             </a:lvl6pPr>
-            <a:lvl7pPr indent="-317500" lvl="6" marL="3200400">
+            <a:lvl7pPr marL="3200400" lvl="6" indent="-317500">
               <a:lnSpc>
                 <a:spcPct val="115000"/>
               </a:lnSpc>
@@ -5925,7 +6150,7 @@
                 </a:solidFill>
               </a:defRPr>
             </a:lvl7pPr>
-            <a:lvl8pPr indent="-317500" lvl="7" marL="3657600">
+            <a:lvl8pPr marL="3657600" lvl="7" indent="-317500">
               <a:lnSpc>
                 <a:spcPct val="115000"/>
               </a:lnSpc>
@@ -5946,7 +6171,7 @@
                 </a:solidFill>
               </a:defRPr>
             </a:lvl8pPr>
-            <a:lvl9pPr indent="-317500" lvl="8" marL="4114800">
+            <a:lvl9pPr marL="4114800" lvl="8" indent="-317500">
               <a:lnSpc>
                 <a:spcPct val="115000"/>
               </a:lnSpc>
@@ -5968,15 +6193,19 @@
               </a:defRPr>
             </a:lvl9pPr>
           </a:lstStyle>
-          <a:p/>
+          <a:p>
+            <a:endParaRPr/>
+          </a:p>
         </p:txBody>
       </p:sp>
       <p:sp>
         <p:nvSpPr>
           <p:cNvPr id="8" name="Google Shape;8;p1"/>
-          <p:cNvSpPr txBox="1"/>
+          <p:cNvSpPr txBox="1">
+            <a:spLocks noGrp="1"/>
+          </p:cNvSpPr>
           <p:nvPr>
-            <p:ph idx="12" type="sldNum"/>
+            <p:ph type="sldNum" idx="12"/>
           </p:nvPr>
         </p:nvSpPr>
         <p:spPr>
@@ -5993,7 +6222,7 @@
           </a:ln>
         </p:spPr>
         <p:txBody>
-          <a:bodyPr anchorCtr="0" anchor="ctr" bIns="91425" lIns="91425" spcFirstLastPara="1" rIns="91425" wrap="square" tIns="91425">
+          <a:bodyPr spcFirstLastPara="1" wrap="square" lIns="91425" tIns="91425" rIns="91425" bIns="91425" anchor="ctr" anchorCtr="0">
             <a:normAutofit/>
           </a:bodyPr>
           <a:lstStyle>
@@ -6071,7 +6300,7 @@
             </a:lvl9pPr>
           </a:lstStyle>
           <a:p>
-            <a:pPr indent="0" lvl="0" marL="0" rtl="0" algn="r">
+            <a:pPr marL="0" lvl="0" indent="0" algn="r" rtl="0">
               <a:spcBef>
                 <a:spcPts val="0"/>
               </a:spcBef>
@@ -6090,7 +6319,7 @@
       </p:sp>
     </p:spTree>
   </p:cSld>
-  <p:clrMap accent1="accent1" accent2="accent2" accent3="accent3" accent4="accent4" accent5="accent5" accent6="accent6" bg1="lt1" bg2="dk2" tx1="dk1" tx2="lt2" folHlink="folHlink" hlink="hlink"/>
+  <p:clrMap bg1="lt1" tx1="dk1" bg2="dk2" tx2="lt2" accent1="accent1" accent2="accent2" accent3="accent3" accent4="accent4" accent5="accent5" accent6="accent6" hlink="hlink" folHlink="folHlink"/>
   <p:sldLayoutIdLst>
     <p:sldLayoutId id="2147483648" r:id="rId1"/>
     <p:sldLayoutId id="2147483649" r:id="rId2"/>
@@ -6104,10 +6333,10 @@
     <p:sldLayoutId id="2147483657" r:id="rId10"/>
     <p:sldLayoutId id="2147483658" r:id="rId11"/>
   </p:sldLayoutIdLst>
-  <p:hf dt="0" ftr="0" hdr="0" sldNum="0"/>
+  <p:hf sldNum="0" hdr="0" ftr="0" dt="0"/>
   <p:txStyles>
     <p:titleStyle>
-      <a:defPPr lvl="0" marR="0" rtl="0" algn="l">
+      <a:defPPr marR="0" lvl="0" algn="l" rtl="0">
         <a:lnSpc>
           <a:spcPct val="100000"/>
         </a:lnSpc>
@@ -6118,7 +6347,7 @@
           <a:spcPts val="0"/>
         </a:spcAft>
       </a:defPPr>
-      <a:lvl1pPr lvl="0" marR="0" rtl="0" algn="l">
+      <a:lvl1pPr marR="0" lvl="0" algn="l" rtl="0">
         <a:lnSpc>
           <a:spcPct val="100000"/>
         </a:lnSpc>
@@ -6132,7 +6361,7 @@
           <a:srgbClr val="000000"/>
         </a:buClr>
         <a:buFont typeface="Arial"/>
-        <a:defRPr b="0" i="0" sz="1400" u="none" cap="none" strike="noStrike">
+        <a:defRPr sz="1400" b="0" i="0" u="none" strike="noStrike" cap="none">
           <a:solidFill>
             <a:srgbClr val="000000"/>
           </a:solidFill>
@@ -6142,7 +6371,7 @@
           <a:sym typeface="Arial"/>
         </a:defRPr>
       </a:lvl1pPr>
-      <a:lvl2pPr lvl="1" marR="0" rtl="0" algn="l">
+      <a:lvl2pPr marR="0" lvl="1" algn="l" rtl="0">
         <a:lnSpc>
           <a:spcPct val="100000"/>
         </a:lnSpc>
@@ -6156,7 +6385,7 @@
           <a:srgbClr val="000000"/>
         </a:buClr>
         <a:buFont typeface="Arial"/>
-        <a:defRPr b="0" i="0" sz="1400" u="none" cap="none" strike="noStrike">
+        <a:defRPr sz="1400" b="0" i="0" u="none" strike="noStrike" cap="none">
           <a:solidFill>
             <a:srgbClr val="000000"/>
           </a:solidFill>
@@ -6166,7 +6395,7 @@
           <a:sym typeface="Arial"/>
         </a:defRPr>
       </a:lvl2pPr>
-      <a:lvl3pPr lvl="2" marR="0" rtl="0" algn="l">
+      <a:lvl3pPr marR="0" lvl="2" algn="l" rtl="0">
         <a:lnSpc>
           <a:spcPct val="100000"/>
         </a:lnSpc>
@@ -6180,7 +6409,7 @@
           <a:srgbClr val="000000"/>
         </a:buClr>
         <a:buFont typeface="Arial"/>
-        <a:defRPr b="0" i="0" sz="1400" u="none" cap="none" strike="noStrike">
+        <a:defRPr sz="1400" b="0" i="0" u="none" strike="noStrike" cap="none">
           <a:solidFill>
             <a:srgbClr val="000000"/>
           </a:solidFill>
@@ -6190,7 +6419,7 @@
           <a:sym typeface="Arial"/>
         </a:defRPr>
       </a:lvl3pPr>
-      <a:lvl4pPr lvl="3" marR="0" rtl="0" algn="l">
+      <a:lvl4pPr marR="0" lvl="3" algn="l" rtl="0">
         <a:lnSpc>
           <a:spcPct val="100000"/>
         </a:lnSpc>
@@ -6204,7 +6433,7 @@
           <a:srgbClr val="000000"/>
         </a:buClr>
         <a:buFont typeface="Arial"/>
-        <a:defRPr b="0" i="0" sz="1400" u="none" cap="none" strike="noStrike">
+        <a:defRPr sz="1400" b="0" i="0" u="none" strike="noStrike" cap="none">
           <a:solidFill>
             <a:srgbClr val="000000"/>
           </a:solidFill>
@@ -6214,7 +6443,7 @@
           <a:sym typeface="Arial"/>
         </a:defRPr>
       </a:lvl4pPr>
-      <a:lvl5pPr lvl="4" marR="0" rtl="0" algn="l">
+      <a:lvl5pPr marR="0" lvl="4" algn="l" rtl="0">
         <a:lnSpc>
           <a:spcPct val="100000"/>
         </a:lnSpc>
@@ -6228,7 +6457,7 @@
           <a:srgbClr val="000000"/>
         </a:buClr>
         <a:buFont typeface="Arial"/>
-        <a:defRPr b="0" i="0" sz="1400" u="none" cap="none" strike="noStrike">
+        <a:defRPr sz="1400" b="0" i="0" u="none" strike="noStrike" cap="none">
           <a:solidFill>
             <a:srgbClr val="000000"/>
           </a:solidFill>
@@ -6238,7 +6467,7 @@
           <a:sym typeface="Arial"/>
         </a:defRPr>
       </a:lvl5pPr>
-      <a:lvl6pPr lvl="5" marR="0" rtl="0" algn="l">
+      <a:lvl6pPr marR="0" lvl="5" algn="l" rtl="0">
         <a:lnSpc>
           <a:spcPct val="100000"/>
         </a:lnSpc>
@@ -6252,7 +6481,7 @@
           <a:srgbClr val="000000"/>
         </a:buClr>
         <a:buFont typeface="Arial"/>
-        <a:defRPr b="0" i="0" sz="1400" u="none" cap="none" strike="noStrike">
+        <a:defRPr sz="1400" b="0" i="0" u="none" strike="noStrike" cap="none">
           <a:solidFill>
             <a:srgbClr val="000000"/>
           </a:solidFill>
@@ -6262,7 +6491,7 @@
           <a:sym typeface="Arial"/>
         </a:defRPr>
       </a:lvl6pPr>
-      <a:lvl7pPr lvl="6" marR="0" rtl="0" algn="l">
+      <a:lvl7pPr marR="0" lvl="6" algn="l" rtl="0">
         <a:lnSpc>
           <a:spcPct val="100000"/>
         </a:lnSpc>
@@ -6276,7 +6505,7 @@
           <a:srgbClr val="000000"/>
         </a:buClr>
         <a:buFont typeface="Arial"/>
-        <a:defRPr b="0" i="0" sz="1400" u="none" cap="none" strike="noStrike">
+        <a:defRPr sz="1400" b="0" i="0" u="none" strike="noStrike" cap="none">
           <a:solidFill>
             <a:srgbClr val="000000"/>
           </a:solidFill>
@@ -6286,7 +6515,7 @@
           <a:sym typeface="Arial"/>
         </a:defRPr>
       </a:lvl7pPr>
-      <a:lvl8pPr lvl="7" marR="0" rtl="0" algn="l">
+      <a:lvl8pPr marR="0" lvl="7" algn="l" rtl="0">
         <a:lnSpc>
           <a:spcPct val="100000"/>
         </a:lnSpc>
@@ -6300,7 +6529,7 @@
           <a:srgbClr val="000000"/>
         </a:buClr>
         <a:buFont typeface="Arial"/>
-        <a:defRPr b="0" i="0" sz="1400" u="none" cap="none" strike="noStrike">
+        <a:defRPr sz="1400" b="0" i="0" u="none" strike="noStrike" cap="none">
           <a:solidFill>
             <a:srgbClr val="000000"/>
           </a:solidFill>
@@ -6310,7 +6539,7 @@
           <a:sym typeface="Arial"/>
         </a:defRPr>
       </a:lvl8pPr>
-      <a:lvl9pPr lvl="8" marR="0" rtl="0" algn="l">
+      <a:lvl9pPr marR="0" lvl="8" algn="l" rtl="0">
         <a:lnSpc>
           <a:spcPct val="100000"/>
         </a:lnSpc>
@@ -6324,7 +6553,7 @@
           <a:srgbClr val="000000"/>
         </a:buClr>
         <a:buFont typeface="Arial"/>
-        <a:defRPr b="0" i="0" sz="1400" u="none" cap="none" strike="noStrike">
+        <a:defRPr sz="1400" b="0" i="0" u="none" strike="noStrike" cap="none">
           <a:solidFill>
             <a:srgbClr val="000000"/>
           </a:solidFill>
@@ -6336,7 +6565,7 @@
       </a:lvl9pPr>
     </p:titleStyle>
     <p:bodyStyle>
-      <a:defPPr lvl="0" marR="0" rtl="0" algn="l">
+      <a:defPPr marR="0" lvl="0" algn="l" rtl="0">
         <a:lnSpc>
           <a:spcPct val="100000"/>
         </a:lnSpc>
@@ -6347,7 +6576,7 @@
           <a:spcPts val="0"/>
         </a:spcAft>
       </a:defPPr>
-      <a:lvl1pPr lvl="0" marR="0" rtl="0" algn="l">
+      <a:lvl1pPr marR="0" lvl="0" algn="l" rtl="0">
         <a:lnSpc>
           <a:spcPct val="100000"/>
         </a:lnSpc>
@@ -6361,7 +6590,7 @@
           <a:srgbClr val="000000"/>
         </a:buClr>
         <a:buFont typeface="Arial"/>
-        <a:defRPr b="0" i="0" sz="1400" u="none" cap="none" strike="noStrike">
+        <a:defRPr sz="1400" b="0" i="0" u="none" strike="noStrike" cap="none">
           <a:solidFill>
             <a:srgbClr val="000000"/>
           </a:solidFill>
@@ -6371,7 +6600,7 @@
           <a:sym typeface="Arial"/>
         </a:defRPr>
       </a:lvl1pPr>
-      <a:lvl2pPr lvl="1" marR="0" rtl="0" algn="l">
+      <a:lvl2pPr marR="0" lvl="1" algn="l" rtl="0">
         <a:lnSpc>
           <a:spcPct val="100000"/>
         </a:lnSpc>
@@ -6385,7 +6614,7 @@
           <a:srgbClr val="000000"/>
         </a:buClr>
         <a:buFont typeface="Arial"/>
-        <a:defRPr b="0" i="0" sz="1400" u="none" cap="none" strike="noStrike">
+        <a:defRPr sz="1400" b="0" i="0" u="none" strike="noStrike" cap="none">
           <a:solidFill>
             <a:srgbClr val="000000"/>
           </a:solidFill>
@@ -6395,7 +6624,7 @@
           <a:sym typeface="Arial"/>
         </a:defRPr>
       </a:lvl2pPr>
-      <a:lvl3pPr lvl="2" marR="0" rtl="0" algn="l">
+      <a:lvl3pPr marR="0" lvl="2" algn="l" rtl="0">
         <a:lnSpc>
           <a:spcPct val="100000"/>
         </a:lnSpc>
@@ -6409,7 +6638,7 @@
           <a:srgbClr val="000000"/>
         </a:buClr>
         <a:buFont typeface="Arial"/>
-        <a:defRPr b="0" i="0" sz="1400" u="none" cap="none" strike="noStrike">
+        <a:defRPr sz="1400" b="0" i="0" u="none" strike="noStrike" cap="none">
           <a:solidFill>
             <a:srgbClr val="000000"/>
           </a:solidFill>
@@ -6419,7 +6648,7 @@
           <a:sym typeface="Arial"/>
         </a:defRPr>
       </a:lvl3pPr>
-      <a:lvl4pPr lvl="3" marR="0" rtl="0" algn="l">
+      <a:lvl4pPr marR="0" lvl="3" algn="l" rtl="0">
         <a:lnSpc>
           <a:spcPct val="100000"/>
         </a:lnSpc>
@@ -6433,7 +6662,7 @@
           <a:srgbClr val="000000"/>
         </a:buClr>
         <a:buFont typeface="Arial"/>
-        <a:defRPr b="0" i="0" sz="1400" u="none" cap="none" strike="noStrike">
+        <a:defRPr sz="1400" b="0" i="0" u="none" strike="noStrike" cap="none">
           <a:solidFill>
             <a:srgbClr val="000000"/>
           </a:solidFill>
@@ -6443,7 +6672,7 @@
           <a:sym typeface="Arial"/>
         </a:defRPr>
       </a:lvl4pPr>
-      <a:lvl5pPr lvl="4" marR="0" rtl="0" algn="l">
+      <a:lvl5pPr marR="0" lvl="4" algn="l" rtl="0">
         <a:lnSpc>
           <a:spcPct val="100000"/>
         </a:lnSpc>
@@ -6457,7 +6686,7 @@
           <a:srgbClr val="000000"/>
         </a:buClr>
         <a:buFont typeface="Arial"/>
-        <a:defRPr b="0" i="0" sz="1400" u="none" cap="none" strike="noStrike">
+        <a:defRPr sz="1400" b="0" i="0" u="none" strike="noStrike" cap="none">
           <a:solidFill>
             <a:srgbClr val="000000"/>
           </a:solidFill>
@@ -6467,7 +6696,7 @@
           <a:sym typeface="Arial"/>
         </a:defRPr>
       </a:lvl5pPr>
-      <a:lvl6pPr lvl="5" marR="0" rtl="0" algn="l">
+      <a:lvl6pPr marR="0" lvl="5" algn="l" rtl="0">
         <a:lnSpc>
           <a:spcPct val="100000"/>
         </a:lnSpc>
@@ -6481,7 +6710,7 @@
           <a:srgbClr val="000000"/>
         </a:buClr>
         <a:buFont typeface="Arial"/>
-        <a:defRPr b="0" i="0" sz="1400" u="none" cap="none" strike="noStrike">
+        <a:defRPr sz="1400" b="0" i="0" u="none" strike="noStrike" cap="none">
           <a:solidFill>
             <a:srgbClr val="000000"/>
           </a:solidFill>
@@ -6491,7 +6720,7 @@
           <a:sym typeface="Arial"/>
         </a:defRPr>
       </a:lvl6pPr>
-      <a:lvl7pPr lvl="6" marR="0" rtl="0" algn="l">
+      <a:lvl7pPr marR="0" lvl="6" algn="l" rtl="0">
         <a:lnSpc>
           <a:spcPct val="100000"/>
         </a:lnSpc>
@@ -6505,7 +6734,7 @@
           <a:srgbClr val="000000"/>
         </a:buClr>
         <a:buFont typeface="Arial"/>
-        <a:defRPr b="0" i="0" sz="1400" u="none" cap="none" strike="noStrike">
+        <a:defRPr sz="1400" b="0" i="0" u="none" strike="noStrike" cap="none">
           <a:solidFill>
             <a:srgbClr val="000000"/>
           </a:solidFill>
@@ -6515,7 +6744,7 @@
           <a:sym typeface="Arial"/>
         </a:defRPr>
       </a:lvl7pPr>
-      <a:lvl8pPr lvl="7" marR="0" rtl="0" algn="l">
+      <a:lvl8pPr marR="0" lvl="7" algn="l" rtl="0">
         <a:lnSpc>
           <a:spcPct val="100000"/>
         </a:lnSpc>
@@ -6529,7 +6758,7 @@
           <a:srgbClr val="000000"/>
         </a:buClr>
         <a:buFont typeface="Arial"/>
-        <a:defRPr b="0" i="0" sz="1400" u="none" cap="none" strike="noStrike">
+        <a:defRPr sz="1400" b="0" i="0" u="none" strike="noStrike" cap="none">
           <a:solidFill>
             <a:srgbClr val="000000"/>
           </a:solidFill>
@@ -6539,7 +6768,7 @@
           <a:sym typeface="Arial"/>
         </a:defRPr>
       </a:lvl8pPr>
-      <a:lvl9pPr lvl="8" marR="0" rtl="0" algn="l">
+      <a:lvl9pPr marR="0" lvl="8" algn="l" rtl="0">
         <a:lnSpc>
           <a:spcPct val="100000"/>
         </a:lnSpc>
@@ -6553,7 +6782,7 @@
           <a:srgbClr val="000000"/>
         </a:buClr>
         <a:buFont typeface="Arial"/>
-        <a:defRPr b="0" i="0" sz="1400" u="none" cap="none" strike="noStrike">
+        <a:defRPr sz="1400" b="0" i="0" u="none" strike="noStrike" cap="none">
           <a:solidFill>
             <a:srgbClr val="000000"/>
           </a:solidFill>
@@ -6565,7 +6794,7 @@
       </a:lvl9pPr>
     </p:bodyStyle>
     <p:otherStyle>
-      <a:defPPr lvl="0" marR="0" rtl="0" algn="l">
+      <a:defPPr marR="0" lvl="0" algn="l" rtl="0">
         <a:lnSpc>
           <a:spcPct val="100000"/>
         </a:lnSpc>
@@ -6576,7 +6805,7 @@
           <a:spcPts val="0"/>
         </a:spcAft>
       </a:defPPr>
-      <a:lvl1pPr lvl="0" marR="0" rtl="0" algn="l">
+      <a:lvl1pPr marR="0" lvl="0" algn="l" rtl="0">
         <a:lnSpc>
           <a:spcPct val="100000"/>
         </a:lnSpc>
@@ -6590,7 +6819,7 @@
           <a:srgbClr val="000000"/>
         </a:buClr>
         <a:buFont typeface="Arial"/>
-        <a:defRPr b="0" i="0" sz="1400" u="none" cap="none" strike="noStrike">
+        <a:defRPr sz="1400" b="0" i="0" u="none" strike="noStrike" cap="none">
           <a:solidFill>
             <a:srgbClr val="000000"/>
           </a:solidFill>
@@ -6600,7 +6829,7 @@
           <a:sym typeface="Arial"/>
         </a:defRPr>
       </a:lvl1pPr>
-      <a:lvl2pPr lvl="1" marR="0" rtl="0" algn="l">
+      <a:lvl2pPr marR="0" lvl="1" algn="l" rtl="0">
         <a:lnSpc>
           <a:spcPct val="100000"/>
         </a:lnSpc>
@@ -6614,7 +6843,7 @@
           <a:srgbClr val="000000"/>
         </a:buClr>
         <a:buFont typeface="Arial"/>
-        <a:defRPr b="0" i="0" sz="1400" u="none" cap="none" strike="noStrike">
+        <a:defRPr sz="1400" b="0" i="0" u="none" strike="noStrike" cap="none">
           <a:solidFill>
             <a:srgbClr val="000000"/>
           </a:solidFill>
@@ -6624,7 +6853,7 @@
           <a:sym typeface="Arial"/>
         </a:defRPr>
       </a:lvl2pPr>
-      <a:lvl3pPr lvl="2" marR="0" rtl="0" algn="l">
+      <a:lvl3pPr marR="0" lvl="2" algn="l" rtl="0">
         <a:lnSpc>
           <a:spcPct val="100000"/>
         </a:lnSpc>
@@ -6638,7 +6867,7 @@
           <a:srgbClr val="000000"/>
         </a:buClr>
         <a:buFont typeface="Arial"/>
-        <a:defRPr b="0" i="0" sz="1400" u="none" cap="none" strike="noStrike">
+        <a:defRPr sz="1400" b="0" i="0" u="none" strike="noStrike" cap="none">
           <a:solidFill>
             <a:srgbClr val="000000"/>
           </a:solidFill>
@@ -6648,7 +6877,7 @@
           <a:sym typeface="Arial"/>
         </a:defRPr>
       </a:lvl3pPr>
-      <a:lvl4pPr lvl="3" marR="0" rtl="0" algn="l">
+      <a:lvl4pPr marR="0" lvl="3" algn="l" rtl="0">
         <a:lnSpc>
           <a:spcPct val="100000"/>
         </a:lnSpc>
@@ -6662,7 +6891,7 @@
           <a:srgbClr val="000000"/>
         </a:buClr>
         <a:buFont typeface="Arial"/>
-        <a:defRPr b="0" i="0" sz="1400" u="none" cap="none" strike="noStrike">
+        <a:defRPr sz="1400" b="0" i="0" u="none" strike="noStrike" cap="none">
           <a:solidFill>
             <a:srgbClr val="000000"/>
           </a:solidFill>
@@ -6672,7 +6901,7 @@
           <a:sym typeface="Arial"/>
         </a:defRPr>
       </a:lvl4pPr>
-      <a:lvl5pPr lvl="4" marR="0" rtl="0" algn="l">
+      <a:lvl5pPr marR="0" lvl="4" algn="l" rtl="0">
         <a:lnSpc>
           <a:spcPct val="100000"/>
         </a:lnSpc>
@@ -6686,7 +6915,7 @@
           <a:srgbClr val="000000"/>
         </a:buClr>
         <a:buFont typeface="Arial"/>
-        <a:defRPr b="0" i="0" sz="1400" u="none" cap="none" strike="noStrike">
+        <a:defRPr sz="1400" b="0" i="0" u="none" strike="noStrike" cap="none">
           <a:solidFill>
             <a:srgbClr val="000000"/>
           </a:solidFill>
@@ -6696,7 +6925,7 @@
           <a:sym typeface="Arial"/>
         </a:defRPr>
       </a:lvl5pPr>
-      <a:lvl6pPr lvl="5" marR="0" rtl="0" algn="l">
+      <a:lvl6pPr marR="0" lvl="5" algn="l" rtl="0">
         <a:lnSpc>
           <a:spcPct val="100000"/>
         </a:lnSpc>
@@ -6710,7 +6939,7 @@
           <a:srgbClr val="000000"/>
         </a:buClr>
         <a:buFont typeface="Arial"/>
-        <a:defRPr b="0" i="0" sz="1400" u="none" cap="none" strike="noStrike">
+        <a:defRPr sz="1400" b="0" i="0" u="none" strike="noStrike" cap="none">
           <a:solidFill>
             <a:srgbClr val="000000"/>
           </a:solidFill>
@@ -6720,7 +6949,7 @@
           <a:sym typeface="Arial"/>
         </a:defRPr>
       </a:lvl6pPr>
-      <a:lvl7pPr lvl="6" marR="0" rtl="0" algn="l">
+      <a:lvl7pPr marR="0" lvl="6" algn="l" rtl="0">
         <a:lnSpc>
           <a:spcPct val="100000"/>
         </a:lnSpc>
@@ -6734,7 +6963,7 @@
           <a:srgbClr val="000000"/>
         </a:buClr>
         <a:buFont typeface="Arial"/>
-        <a:defRPr b="0" i="0" sz="1400" u="none" cap="none" strike="noStrike">
+        <a:defRPr sz="1400" b="0" i="0" u="none" strike="noStrike" cap="none">
           <a:solidFill>
             <a:srgbClr val="000000"/>
           </a:solidFill>
@@ -6744,7 +6973,7 @@
           <a:sym typeface="Arial"/>
         </a:defRPr>
       </a:lvl7pPr>
-      <a:lvl8pPr lvl="7" marR="0" rtl="0" algn="l">
+      <a:lvl8pPr marR="0" lvl="7" algn="l" rtl="0">
         <a:lnSpc>
           <a:spcPct val="100000"/>
         </a:lnSpc>
@@ -6758,7 +6987,7 @@
           <a:srgbClr val="000000"/>
         </a:buClr>
         <a:buFont typeface="Arial"/>
-        <a:defRPr b="0" i="0" sz="1400" u="none" cap="none" strike="noStrike">
+        <a:defRPr sz="1400" b="0" i="0" u="none" strike="noStrike" cap="none">
           <a:solidFill>
             <a:srgbClr val="000000"/>
           </a:solidFill>
@@ -6768,7 +6997,7 @@
           <a:sym typeface="Arial"/>
         </a:defRPr>
       </a:lvl8pPr>
-      <a:lvl9pPr lvl="8" marR="0" rtl="0" algn="l">
+      <a:lvl9pPr marR="0" lvl="8" algn="l" rtl="0">
         <a:lnSpc>
           <a:spcPct val="100000"/>
         </a:lnSpc>
@@ -6782,7 +7011,7 @@
           <a:srgbClr val="000000"/>
         </a:buClr>
         <a:buFont typeface="Arial"/>
-        <a:defRPr b="0" i="0" sz="1400" u="none" cap="none" strike="noStrike">
+        <a:defRPr sz="1400" b="0" i="0" u="none" strike="noStrike" cap="none">
           <a:solidFill>
             <a:srgbClr val="000000"/>
           </a:solidFill>
@@ -6798,11 +7027,11 @@
 </file>
 
 <file path=ppt/slides/slide1.xml><?xml version="1.0" encoding="utf-8"?>
-<p:sld xmlns:a="http://schemas.openxmlformats.org/drawingml/2006/main" xmlns:r="http://schemas.openxmlformats.org/officeDocument/2006/relationships" xmlns:mc="http://schemas.openxmlformats.org/markup-compatibility/2006" xmlns:mv="urn:schemas-microsoft-com:mac:vml" xmlns:p="http://schemas.openxmlformats.org/presentationml/2006/main" xmlns:c="http://schemas.openxmlformats.org/drawingml/2006/chart" xmlns:dgm="http://schemas.openxmlformats.org/drawingml/2006/diagram" xmlns:o="urn:schemas-microsoft-com:office:office" xmlns:v="urn:schemas-microsoft-com:vml" xmlns:pvml="urn:schemas-microsoft-com:office:powerpoint" xmlns:com="http://schemas.openxmlformats.org/drawingml/2006/compatibility" xmlns:p14="http://schemas.microsoft.com/office/powerpoint/2010/main" xmlns:p15="http://schemas.microsoft.com/office/powerpoint/2012/main" xmlns:ahyp="http://schemas.microsoft.com/office/drawing/2018/hyperlinkcolor">
+<p:sld xmlns:a="http://schemas.openxmlformats.org/drawingml/2006/main" xmlns:r="http://schemas.openxmlformats.org/officeDocument/2006/relationships" xmlns:p="http://schemas.openxmlformats.org/presentationml/2006/main">
   <p:cSld>
     <p:spTree>
       <p:nvGrpSpPr>
-        <p:cNvPr id="53" name="Shape 53"/>
+        <p:cNvPr id="1" name="Shape 53"/>
         <p:cNvGrpSpPr/>
         <p:nvPr/>
       </p:nvGrpSpPr>
@@ -6817,7 +7046,9 @@
       <p:sp>
         <p:nvSpPr>
           <p:cNvPr id="54" name="Google Shape;54;p13"/>
-          <p:cNvSpPr txBox="1"/>
+          <p:cNvSpPr txBox="1">
+            <a:spLocks noGrp="1"/>
+          </p:cNvSpPr>
           <p:nvPr>
             <p:ph type="ctrTitle"/>
           </p:nvPr>
@@ -6832,12 +7063,12 @@
           </a:prstGeom>
         </p:spPr>
         <p:txBody>
-          <a:bodyPr anchorCtr="0" anchor="b" bIns="91425" lIns="91425" spcFirstLastPara="1" rIns="91425" wrap="square" tIns="91425">
+          <a:bodyPr spcFirstLastPara="1" wrap="square" lIns="91425" tIns="91425" rIns="91425" bIns="91425" anchor="b" anchorCtr="0">
             <a:normAutofit/>
           </a:bodyPr>
           <a:lstStyle/>
           <a:p>
-            <a:pPr indent="0" lvl="0" marL="0" rtl="0" algn="ctr">
+            <a:pPr marL="0" lvl="0" indent="0" algn="ctr" rtl="0">
               <a:spcBef>
                 <a:spcPts val="0"/>
               </a:spcBef>
@@ -6857,9 +7088,11 @@
       <p:sp>
         <p:nvSpPr>
           <p:cNvPr id="55" name="Google Shape;55;p13"/>
-          <p:cNvSpPr txBox="1"/>
+          <p:cNvSpPr txBox="1">
+            <a:spLocks noGrp="1"/>
+          </p:cNvSpPr>
           <p:nvPr>
-            <p:ph idx="1" type="subTitle"/>
+            <p:ph type="subTitle" idx="1"/>
           </p:nvPr>
         </p:nvSpPr>
         <p:spPr>
@@ -6872,12 +7105,12 @@
           </a:prstGeom>
         </p:spPr>
         <p:txBody>
-          <a:bodyPr anchorCtr="0" anchor="t" bIns="91425" lIns="91425" spcFirstLastPara="1" rIns="91425" wrap="square" tIns="91425">
+          <a:bodyPr spcFirstLastPara="1" wrap="square" lIns="91425" tIns="91425" rIns="91425" bIns="91425" anchor="t" anchorCtr="0">
             <a:normAutofit/>
           </a:bodyPr>
           <a:lstStyle/>
           <a:p>
-            <a:pPr indent="0" lvl="0" marL="0" rtl="0" algn="ctr">
+            <a:pPr marL="0" lvl="0" indent="0" algn="ctr" rtl="0">
               <a:spcBef>
                 <a:spcPts val="0"/>
               </a:spcBef>
@@ -6903,11 +7136,270 @@
 </file>
 
 <file path=ppt/slides/slide10.xml><?xml version="1.0" encoding="utf-8"?>
-<p:sld xmlns:a="http://schemas.openxmlformats.org/drawingml/2006/main" xmlns:r="http://schemas.openxmlformats.org/officeDocument/2006/relationships" xmlns:mc="http://schemas.openxmlformats.org/markup-compatibility/2006" xmlns:mv="urn:schemas-microsoft-com:mac:vml" xmlns:p="http://schemas.openxmlformats.org/presentationml/2006/main" xmlns:c="http://schemas.openxmlformats.org/drawingml/2006/chart" xmlns:dgm="http://schemas.openxmlformats.org/drawingml/2006/diagram" xmlns:o="urn:schemas-microsoft-com:office:office" xmlns:v="urn:schemas-microsoft-com:vml" xmlns:pvml="urn:schemas-microsoft-com:office:powerpoint" xmlns:com="http://schemas.openxmlformats.org/drawingml/2006/compatibility" xmlns:p14="http://schemas.microsoft.com/office/powerpoint/2010/main" xmlns:p15="http://schemas.microsoft.com/office/powerpoint/2012/main" xmlns:ahyp="http://schemas.microsoft.com/office/drawing/2018/hyperlinkcolor">
+<p:sld xmlns:a="http://schemas.openxmlformats.org/drawingml/2006/main" xmlns:r="http://schemas.openxmlformats.org/officeDocument/2006/relationships" xmlns:p="http://schemas.openxmlformats.org/presentationml/2006/main">
   <p:cSld>
     <p:spTree>
       <p:nvGrpSpPr>
-        <p:cNvPr id="106" name="Shape 106"/>
+        <p:cNvPr id="1" name="Shape 98"/>
+        <p:cNvGrpSpPr/>
+        <p:nvPr/>
+      </p:nvGrpSpPr>
+      <p:grpSpPr>
+        <a:xfrm>
+          <a:off x="0" y="0"/>
+          <a:ext cx="0" cy="0"/>
+          <a:chOff x="0" y="0"/>
+          <a:chExt cx="0" cy="0"/>
+        </a:xfrm>
+      </p:grpSpPr>
+      <p:sp>
+        <p:nvSpPr>
+          <p:cNvPr id="99" name="Google Shape;99;p21"/>
+          <p:cNvSpPr txBox="1">
+            <a:spLocks noGrp="1"/>
+          </p:cNvSpPr>
+          <p:nvPr>
+            <p:ph type="title"/>
+          </p:nvPr>
+        </p:nvSpPr>
+        <p:spPr>
+          <a:xfrm>
+            <a:off x="311700" y="445025"/>
+            <a:ext cx="8520600" cy="572700"/>
+          </a:xfrm>
+          <a:prstGeom prst="rect">
+            <a:avLst/>
+          </a:prstGeom>
+        </p:spPr>
+        <p:txBody>
+          <a:bodyPr spcFirstLastPara="1" wrap="square" lIns="91425" tIns="91425" rIns="91425" bIns="91425" anchor="t" anchorCtr="0">
+            <a:normAutofit fontScale="90000"/>
+          </a:bodyPr>
+          <a:lstStyle/>
+          <a:p>
+            <a:pPr marL="0" lvl="0" indent="0" algn="l" rtl="0">
+              <a:spcBef>
+                <a:spcPts val="0"/>
+              </a:spcBef>
+              <a:spcAft>
+                <a:spcPts val="0"/>
+              </a:spcAft>
+              <a:buNone/>
+            </a:pPr>
+            <a:r>
+              <a:rPr lang="en"/>
+              <a:t>Example</a:t>
+            </a:r>
+            <a:endParaRPr/>
+          </a:p>
+        </p:txBody>
+      </p:sp>
+      <p:sp>
+        <p:nvSpPr>
+          <p:cNvPr id="100" name="Google Shape;100;p21"/>
+          <p:cNvSpPr txBox="1">
+            <a:spLocks noGrp="1"/>
+          </p:cNvSpPr>
+          <p:nvPr>
+            <p:ph type="body" idx="1"/>
+          </p:nvPr>
+        </p:nvSpPr>
+        <p:spPr>
+          <a:xfrm>
+            <a:off x="311700" y="1152475"/>
+            <a:ext cx="4322700" cy="2395500"/>
+          </a:xfrm>
+          <a:prstGeom prst="rect">
+            <a:avLst/>
+          </a:prstGeom>
+        </p:spPr>
+        <p:txBody>
+          <a:bodyPr spcFirstLastPara="1" wrap="square" lIns="91425" tIns="91425" rIns="91425" bIns="91425" anchor="t" anchorCtr="0">
+            <a:normAutofit/>
+          </a:bodyPr>
+          <a:lstStyle/>
+          <a:p>
+            <a:pPr marL="0" lvl="0" indent="0" algn="l" rtl="0">
+              <a:spcBef>
+                <a:spcPts val="0"/>
+              </a:spcBef>
+              <a:spcAft>
+                <a:spcPts val="0"/>
+              </a:spcAft>
+              <a:buNone/>
+            </a:pPr>
+            <a:r>
+              <a:rPr lang="en"/>
+              <a:t>Zebra Pattern:</a:t>
+            </a:r>
+            <a:endParaRPr/>
+          </a:p>
+          <a:p>
+            <a:pPr marL="0" lvl="0" indent="0" algn="l" rtl="0">
+              <a:spcBef>
+                <a:spcPts val="1200"/>
+              </a:spcBef>
+              <a:spcAft>
+                <a:spcPts val="0"/>
+              </a:spcAft>
+              <a:buNone/>
+            </a:pPr>
+            <a:r>
+              <a:rPr lang="en"/>
+              <a:t>01010101 01010101</a:t>
+            </a:r>
+            <a:endParaRPr/>
+          </a:p>
+          <a:p>
+            <a:pPr marL="0" lvl="0" indent="0" algn="l" rtl="0">
+              <a:spcBef>
+                <a:spcPts val="1200"/>
+              </a:spcBef>
+              <a:spcAft>
+                <a:spcPts val="0"/>
+              </a:spcAft>
+              <a:buNone/>
+            </a:pPr>
+            <a:r>
+              <a:rPr lang="en"/>
+              <a:t>01010101 01010101</a:t>
+            </a:r>
+            <a:endParaRPr/>
+          </a:p>
+          <a:p>
+            <a:pPr marL="0" lvl="0" indent="0" algn="l" rtl="0">
+              <a:spcBef>
+                <a:spcPts val="1200"/>
+              </a:spcBef>
+              <a:spcAft>
+                <a:spcPts val="0"/>
+              </a:spcAft>
+              <a:buNone/>
+            </a:pPr>
+            <a:r>
+              <a:rPr lang="en"/>
+              <a:t>01010101 01010101</a:t>
+            </a:r>
+            <a:endParaRPr/>
+          </a:p>
+          <a:p>
+            <a:pPr marL="0" lvl="0" indent="0" algn="l" rtl="0">
+              <a:spcBef>
+                <a:spcPts val="1200"/>
+              </a:spcBef>
+              <a:spcAft>
+                <a:spcPts val="1200"/>
+              </a:spcAft>
+              <a:buNone/>
+            </a:pPr>
+            <a:r>
+              <a:rPr lang="en"/>
+              <a:t>01010101 01010101</a:t>
+            </a:r>
+            <a:endParaRPr/>
+          </a:p>
+        </p:txBody>
+      </p:sp>
+      <p:sp>
+        <p:nvSpPr>
+          <p:cNvPr id="101" name="Google Shape;101;p21"/>
+          <p:cNvSpPr txBox="1">
+            <a:spLocks noGrp="1"/>
+          </p:cNvSpPr>
+          <p:nvPr>
+            <p:ph type="body" idx="1"/>
+          </p:nvPr>
+        </p:nvSpPr>
+        <p:spPr>
+          <a:xfrm>
+            <a:off x="311700" y="3547975"/>
+            <a:ext cx="8345700" cy="2395500"/>
+          </a:xfrm>
+          <a:prstGeom prst="rect">
+            <a:avLst/>
+          </a:prstGeom>
+        </p:spPr>
+        <p:txBody>
+          <a:bodyPr spcFirstLastPara="1" wrap="square" lIns="91425" tIns="91425" rIns="91425" bIns="91425" anchor="t" anchorCtr="0">
+            <a:normAutofit/>
+          </a:bodyPr>
+          <a:lstStyle/>
+          <a:p>
+            <a:pPr marL="0" lvl="0" indent="0" algn="l" rtl="0">
+              <a:spcBef>
+                <a:spcPts val="0"/>
+              </a:spcBef>
+              <a:spcAft>
+                <a:spcPts val="0"/>
+              </a:spcAft>
+              <a:buNone/>
+            </a:pPr>
+            <a:r>
+              <a:rPr lang="en"/>
+              <a:t>In Frame Buffer: 64 bits can all be done in one iteration/store-instruction.</a:t>
+            </a:r>
+            <a:endParaRPr/>
+          </a:p>
+          <a:p>
+            <a:pPr marL="0" lvl="0" indent="0" algn="l" rtl="0">
+              <a:spcBef>
+                <a:spcPts val="1200"/>
+              </a:spcBef>
+              <a:spcAft>
+                <a:spcPts val="1200"/>
+              </a:spcAft>
+              <a:buNone/>
+            </a:pPr>
+            <a:r>
+              <a:rPr lang="en"/>
+              <a:t>0101010101010101010101010101010101010101010101010101010101010101 </a:t>
+            </a:r>
+            <a:endParaRPr/>
+          </a:p>
+        </p:txBody>
+      </p:sp>
+      <p:pic>
+        <p:nvPicPr>
+          <p:cNvPr id="102" name="Google Shape;102;p21"/>
+          <p:cNvPicPr preferRelativeResize="0"/>
+          <p:nvPr/>
+        </p:nvPicPr>
+        <p:blipFill>
+          <a:blip r:embed="rId3">
+            <a:alphaModFix/>
+          </a:blip>
+          <a:stretch>
+            <a:fillRect/>
+          </a:stretch>
+        </p:blipFill>
+        <p:spPr>
+          <a:xfrm>
+            <a:off x="4163659" y="1152475"/>
+            <a:ext cx="2340683" cy="2225449"/>
+          </a:xfrm>
+          <a:prstGeom prst="rect">
+            <a:avLst/>
+          </a:prstGeom>
+          <a:noFill/>
+          <a:ln>
+            <a:noFill/>
+          </a:ln>
+        </p:spPr>
+      </p:pic>
+    </p:spTree>
+  </p:cSld>
+  <p:clrMapOvr>
+    <a:masterClrMapping/>
+  </p:clrMapOvr>
+</p:sld>
+</file>
+
+<file path=ppt/slides/slide11.xml><?xml version="1.0" encoding="utf-8"?>
+<p:sld xmlns:a="http://schemas.openxmlformats.org/drawingml/2006/main" xmlns:r="http://schemas.openxmlformats.org/officeDocument/2006/relationships" xmlns:p="http://schemas.openxmlformats.org/presentationml/2006/main">
+  <p:cSld>
+    <p:spTree>
+      <p:nvGrpSpPr>
+        <p:cNvPr id="1" name="Shape 106"/>
         <p:cNvGrpSpPr/>
         <p:nvPr/>
       </p:nvGrpSpPr>
@@ -6922,7 +7414,9 @@
       <p:sp>
         <p:nvSpPr>
           <p:cNvPr id="107" name="Google Shape;107;p22"/>
-          <p:cNvSpPr txBox="1"/>
+          <p:cNvSpPr txBox="1">
+            <a:spLocks noGrp="1"/>
+          </p:cNvSpPr>
           <p:nvPr>
             <p:ph type="title"/>
           </p:nvPr>
@@ -6937,12 +7431,12 @@
           </a:prstGeom>
         </p:spPr>
         <p:txBody>
-          <a:bodyPr anchorCtr="0" anchor="t" bIns="91425" lIns="91425" spcFirstLastPara="1" rIns="91425" wrap="square" tIns="91425">
+          <a:bodyPr spcFirstLastPara="1" wrap="square" lIns="91425" tIns="91425" rIns="91425" bIns="91425" anchor="t" anchorCtr="0">
             <a:normAutofit fontScale="90000"/>
           </a:bodyPr>
           <a:lstStyle/>
           <a:p>
-            <a:pPr indent="0" lvl="0" marL="0" rtl="0" algn="l">
+            <a:pPr marL="0" lvl="0" indent="0" algn="l" rtl="0">
               <a:spcBef>
                 <a:spcPts val="0"/>
               </a:spcBef>
@@ -6962,9 +7456,11 @@
       <p:sp>
         <p:nvSpPr>
           <p:cNvPr id="108" name="Google Shape;108;p22"/>
-          <p:cNvSpPr txBox="1"/>
+          <p:cNvSpPr txBox="1">
+            <a:spLocks noGrp="1"/>
+          </p:cNvSpPr>
           <p:nvPr>
-            <p:ph idx="1" type="body"/>
+            <p:ph type="body" idx="1"/>
           </p:nvPr>
         </p:nvSpPr>
         <p:spPr>
@@ -6977,12 +7473,12 @@
           </a:prstGeom>
         </p:spPr>
         <p:txBody>
-          <a:bodyPr anchorCtr="0" anchor="t" bIns="91425" lIns="91425" spcFirstLastPara="1" rIns="91425" wrap="square" tIns="91425">
+          <a:bodyPr spcFirstLastPara="1" wrap="square" lIns="91425" tIns="91425" rIns="91425" bIns="91425" anchor="t" anchorCtr="0">
             <a:normAutofit/>
           </a:bodyPr>
           <a:lstStyle/>
           <a:p>
-            <a:pPr indent="0" lvl="0" marL="0" rtl="0" algn="l">
+            <a:pPr marL="0" lvl="0" indent="0" algn="l" rtl="0">
               <a:spcBef>
                 <a:spcPts val="0"/>
               </a:spcBef>
@@ -6993,16 +7489,12 @@
             </a:pPr>
             <a:r>
               <a:rPr lang="en"/>
-              <a:t>Checkerboard</a:t>
-            </a:r>
-            <a:r>
-              <a:rPr lang="en"/>
-              <a:t> Pattern:</a:t>
+              <a:t>Checkerboard Pattern:</a:t>
             </a:r>
             <a:endParaRPr/>
           </a:p>
           <a:p>
-            <a:pPr indent="0" lvl="0" marL="0" rtl="0" algn="l">
+            <a:pPr marL="0" lvl="0" indent="0" algn="l" rtl="0">
               <a:spcBef>
                 <a:spcPts val="1200"/>
               </a:spcBef>
@@ -7018,7 +7510,7 @@
             <a:endParaRPr/>
           </a:p>
           <a:p>
-            <a:pPr indent="0" lvl="0" marL="0" rtl="0" algn="l">
+            <a:pPr marL="0" lvl="0" indent="0" algn="l" rtl="0">
               <a:spcBef>
                 <a:spcPts val="1200"/>
               </a:spcBef>
@@ -7034,7 +7526,7 @@
             <a:endParaRPr/>
           </a:p>
           <a:p>
-            <a:pPr indent="0" lvl="0" marL="0" rtl="0" algn="l">
+            <a:pPr marL="0" lvl="0" indent="0" algn="l" rtl="0">
               <a:spcBef>
                 <a:spcPts val="1200"/>
               </a:spcBef>
@@ -7050,7 +7542,7 @@
             <a:endParaRPr/>
           </a:p>
           <a:p>
-            <a:pPr indent="0" lvl="0" marL="0" rtl="0" algn="l">
+            <a:pPr marL="0" lvl="0" indent="0" algn="l" rtl="0">
               <a:spcBef>
                 <a:spcPts val="1200"/>
               </a:spcBef>
@@ -7070,9 +7562,11 @@
       <p:sp>
         <p:nvSpPr>
           <p:cNvPr id="109" name="Google Shape;109;p22"/>
-          <p:cNvSpPr txBox="1"/>
+          <p:cNvSpPr txBox="1">
+            <a:spLocks noGrp="1"/>
+          </p:cNvSpPr>
           <p:nvPr>
-            <p:ph idx="1" type="body"/>
+            <p:ph type="body" idx="1"/>
           </p:nvPr>
         </p:nvSpPr>
         <p:spPr>
@@ -7085,12 +7579,12 @@
           </a:prstGeom>
         </p:spPr>
         <p:txBody>
-          <a:bodyPr anchorCtr="0" anchor="t" bIns="91425" lIns="91425" spcFirstLastPara="1" rIns="91425" wrap="square" tIns="91425">
+          <a:bodyPr spcFirstLastPara="1" wrap="square" lIns="91425" tIns="91425" rIns="91425" bIns="91425" anchor="t" anchorCtr="0">
             <a:normAutofit/>
           </a:bodyPr>
           <a:lstStyle/>
           <a:p>
-            <a:pPr indent="0" lvl="0" marL="0" rtl="0" algn="l">
+            <a:pPr marL="0" lvl="0" indent="0" algn="l" rtl="0">
               <a:spcBef>
                 <a:spcPts val="0"/>
               </a:spcBef>
@@ -7106,7 +7600,7 @@
             <a:endParaRPr/>
           </a:p>
           <a:p>
-            <a:pPr indent="0" lvl="0" marL="0" rtl="0" algn="l">
+            <a:pPr marL="0" lvl="0" indent="0" algn="l" rtl="0">
               <a:spcBef>
                 <a:spcPts val="1200"/>
               </a:spcBef>
@@ -7199,12 +7693,12 @@
 </p:sld>
 </file>
 
-<file path=ppt/slides/slide11.xml><?xml version="1.0" encoding="utf-8"?>
-<p:sld xmlns:a="http://schemas.openxmlformats.org/drawingml/2006/main" xmlns:r="http://schemas.openxmlformats.org/officeDocument/2006/relationships" xmlns:mc="http://schemas.openxmlformats.org/markup-compatibility/2006" xmlns:mv="urn:schemas-microsoft-com:mac:vml" xmlns:p="http://schemas.openxmlformats.org/presentationml/2006/main" xmlns:c="http://schemas.openxmlformats.org/drawingml/2006/chart" xmlns:dgm="http://schemas.openxmlformats.org/drawingml/2006/diagram" xmlns:o="urn:schemas-microsoft-com:office:office" xmlns:v="urn:schemas-microsoft-com:vml" xmlns:pvml="urn:schemas-microsoft-com:office:powerpoint" xmlns:com="http://schemas.openxmlformats.org/drawingml/2006/compatibility" xmlns:p14="http://schemas.microsoft.com/office/powerpoint/2010/main" xmlns:p15="http://schemas.microsoft.com/office/powerpoint/2012/main" xmlns:ahyp="http://schemas.microsoft.com/office/drawing/2018/hyperlinkcolor">
+<file path=ppt/slides/slide12.xml><?xml version="1.0" encoding="utf-8"?>
+<p:sld xmlns:a="http://schemas.openxmlformats.org/drawingml/2006/main" xmlns:r="http://schemas.openxmlformats.org/officeDocument/2006/relationships" xmlns:p="http://schemas.openxmlformats.org/presentationml/2006/main">
   <p:cSld>
     <p:spTree>
       <p:nvGrpSpPr>
-        <p:cNvPr id="114" name="Shape 114"/>
+        <p:cNvPr id="1" name="Shape 114"/>
         <p:cNvGrpSpPr/>
         <p:nvPr/>
       </p:nvGrpSpPr>
@@ -7219,7 +7713,9 @@
       <p:sp>
         <p:nvSpPr>
           <p:cNvPr id="115" name="Google Shape;115;p23"/>
-          <p:cNvSpPr txBox="1"/>
+          <p:cNvSpPr txBox="1">
+            <a:spLocks noGrp="1"/>
+          </p:cNvSpPr>
           <p:nvPr>
             <p:ph type="ctrTitle"/>
           </p:nvPr>
@@ -7234,12 +7730,12 @@
           </a:prstGeom>
         </p:spPr>
         <p:txBody>
-          <a:bodyPr anchorCtr="0" anchor="b" bIns="91425" lIns="91425" spcFirstLastPara="1" rIns="91425" wrap="square" tIns="91425">
+          <a:bodyPr spcFirstLastPara="1" wrap="square" lIns="91425" tIns="91425" rIns="91425" bIns="91425" anchor="b" anchorCtr="0">
             <a:normAutofit/>
           </a:bodyPr>
           <a:lstStyle/>
           <a:p>
-            <a:pPr indent="0" lvl="0" marL="0" rtl="0" algn="ctr">
+            <a:pPr marL="0" lvl="0" indent="0" algn="ctr" rtl="0">
               <a:spcBef>
                 <a:spcPts val="0"/>
               </a:spcBef>
@@ -7264,12 +7760,12 @@
 </p:sld>
 </file>
 
-<file path=ppt/slides/slide12.xml><?xml version="1.0" encoding="utf-8"?>
-<p:sld xmlns:a="http://schemas.openxmlformats.org/drawingml/2006/main" xmlns:r="http://schemas.openxmlformats.org/officeDocument/2006/relationships" xmlns:mc="http://schemas.openxmlformats.org/markup-compatibility/2006" xmlns:mv="urn:schemas-microsoft-com:mac:vml" xmlns:p="http://schemas.openxmlformats.org/presentationml/2006/main" xmlns:c="http://schemas.openxmlformats.org/drawingml/2006/chart" xmlns:dgm="http://schemas.openxmlformats.org/drawingml/2006/diagram" xmlns:o="urn:schemas-microsoft-com:office:office" xmlns:v="urn:schemas-microsoft-com:vml" xmlns:pvml="urn:schemas-microsoft-com:office:powerpoint" xmlns:com="http://schemas.openxmlformats.org/drawingml/2006/compatibility" xmlns:p14="http://schemas.microsoft.com/office/powerpoint/2010/main" xmlns:p15="http://schemas.microsoft.com/office/powerpoint/2012/main" xmlns:ahyp="http://schemas.microsoft.com/office/drawing/2018/hyperlinkcolor">
+<file path=ppt/slides/slide13.xml><?xml version="1.0" encoding="utf-8"?>
+<p:sld xmlns:a="http://schemas.openxmlformats.org/drawingml/2006/main" xmlns:r="http://schemas.openxmlformats.org/officeDocument/2006/relationships" xmlns:p="http://schemas.openxmlformats.org/presentationml/2006/main">
   <p:cSld>
     <p:spTree>
       <p:nvGrpSpPr>
-        <p:cNvPr id="119" name="Shape 119"/>
+        <p:cNvPr id="1" name="Shape 119"/>
         <p:cNvGrpSpPr/>
         <p:nvPr/>
       </p:nvGrpSpPr>
@@ -7284,7 +7780,9 @@
       <p:sp>
         <p:nvSpPr>
           <p:cNvPr id="120" name="Google Shape;120;p24"/>
-          <p:cNvSpPr txBox="1"/>
+          <p:cNvSpPr txBox="1">
+            <a:spLocks noGrp="1"/>
+          </p:cNvSpPr>
           <p:nvPr>
             <p:ph type="title"/>
           </p:nvPr>
@@ -7299,12 +7797,12 @@
           </a:prstGeom>
         </p:spPr>
         <p:txBody>
-          <a:bodyPr anchorCtr="0" anchor="t" bIns="91425" lIns="91425" spcFirstLastPara="1" rIns="91425" wrap="square" tIns="91425">
+          <a:bodyPr spcFirstLastPara="1" wrap="square" lIns="91425" tIns="91425" rIns="91425" bIns="91425" anchor="t" anchorCtr="0">
             <a:normAutofit fontScale="90000"/>
           </a:bodyPr>
           <a:lstStyle/>
           <a:p>
-            <a:pPr indent="0" lvl="0" marL="0" rtl="0" algn="l">
+            <a:pPr marL="0" lvl="0" indent="0" algn="l" rtl="0">
               <a:spcBef>
                 <a:spcPts val="0"/>
               </a:spcBef>
@@ -7324,9 +7822,11 @@
       <p:sp>
         <p:nvSpPr>
           <p:cNvPr id="121" name="Google Shape;121;p24"/>
-          <p:cNvSpPr txBox="1"/>
+          <p:cNvSpPr txBox="1">
+            <a:spLocks noGrp="1"/>
+          </p:cNvSpPr>
           <p:nvPr>
-            <p:ph idx="1" type="body"/>
+            <p:ph type="body" idx="1"/>
           </p:nvPr>
         </p:nvSpPr>
         <p:spPr>
@@ -7339,12 +7839,12 @@
           </a:prstGeom>
         </p:spPr>
         <p:txBody>
-          <a:bodyPr anchorCtr="0" anchor="t" bIns="91425" lIns="91425" spcFirstLastPara="1" rIns="91425" wrap="square" tIns="91425">
+          <a:bodyPr spcFirstLastPara="1" wrap="square" lIns="91425" tIns="91425" rIns="91425" bIns="91425" anchor="t" anchorCtr="0">
             <a:normAutofit/>
           </a:bodyPr>
           <a:lstStyle/>
           <a:p>
-            <a:pPr indent="0" lvl="0" marL="0" rtl="0" algn="l">
+            <a:pPr marL="0" lvl="0" indent="0" algn="l" rtl="0">
               <a:spcBef>
                 <a:spcPts val="0"/>
               </a:spcBef>
@@ -7360,7 +7860,7 @@
             <a:endParaRPr/>
           </a:p>
           <a:p>
-            <a:pPr indent="-342900" lvl="0" marL="457200" rtl="0" algn="l">
+            <a:pPr marL="457200" lvl="0" indent="-342900" algn="l" rtl="0">
               <a:spcBef>
                 <a:spcPts val="1200"/>
               </a:spcBef>
@@ -7372,20 +7872,12 @@
             </a:pPr>
             <a:r>
               <a:rPr lang="en"/>
-              <a:t>Current System: x86 </a:t>
-            </a:r>
-            <a:r>
-              <a:rPr lang="en"/>
-              <a:t>architecture</a:t>
-            </a:r>
-            <a:r>
-              <a:rPr lang="en"/>
-              <a:t> running an Ubuntu VM</a:t>
+              <a:t>Current System: x86 architecture running an Ubuntu VM</a:t>
             </a:r>
             <a:endParaRPr/>
           </a:p>
           <a:p>
-            <a:pPr indent="-342900" lvl="0" marL="457200" rtl="0" algn="l">
+            <a:pPr marL="457200" lvl="0" indent="-342900" algn="l" rtl="0">
               <a:spcBef>
                 <a:spcPts val="0"/>
               </a:spcBef>
@@ -7402,7 +7894,7 @@
             <a:endParaRPr/>
           </a:p>
           <a:p>
-            <a:pPr indent="-342900" lvl="0" marL="457200" rtl="0" algn="l">
+            <a:pPr marL="457200" lvl="0" indent="-342900" algn="l" rtl="0">
               <a:spcBef>
                 <a:spcPts val="0"/>
               </a:spcBef>
@@ -7414,36 +7906,12 @@
             </a:pPr>
             <a:r>
               <a:rPr lang="en"/>
-              <a:t>QEMU User Mode doesn’t emulate the entire system, only CPU actions, meaning to draw a GUI using only ARM would require either moving to QEMU System Mode, using a library to act as a middle man </a:t>
-            </a:r>
-            <a:r>
-              <a:rPr lang="en"/>
-              <a:t>between</a:t>
-            </a:r>
-            <a:r>
-              <a:rPr lang="en"/>
-              <a:t> </a:t>
-            </a:r>
-            <a:r>
-              <a:rPr lang="en"/>
-              <a:t>the</a:t>
-            </a:r>
-            <a:r>
-              <a:rPr lang="en"/>
-              <a:t> emulation and the OS’s display, or switching to an ARM </a:t>
-            </a:r>
-            <a:r>
-              <a:rPr lang="en"/>
-              <a:t>architecture</a:t>
-            </a:r>
-            <a:r>
-              <a:rPr lang="en"/>
-              <a:t>.</a:t>
+              <a:t>QEMU User Mode doesn’t emulate the entire system, only CPU actions, meaning to draw a GUI using only ARM would require either moving to QEMU System Mode, using a library to act as a middle man between the emulation and the OS’s display, or switching to an ARM architecture.</a:t>
             </a:r>
             <a:endParaRPr/>
           </a:p>
           <a:p>
-            <a:pPr indent="-342900" lvl="0" marL="457200" rtl="0" algn="l">
+            <a:pPr marL="457200" lvl="0" indent="-342900" algn="l" rtl="0">
               <a:spcBef>
                 <a:spcPts val="0"/>
               </a:spcBef>
@@ -7469,12 +7937,12 @@
 </p:sld>
 </file>
 
-<file path=ppt/slides/slide13.xml><?xml version="1.0" encoding="utf-8"?>
-<p:sld xmlns:a="http://schemas.openxmlformats.org/drawingml/2006/main" xmlns:r="http://schemas.openxmlformats.org/officeDocument/2006/relationships" xmlns:mc="http://schemas.openxmlformats.org/markup-compatibility/2006" xmlns:mv="urn:schemas-microsoft-com:mac:vml" xmlns:p="http://schemas.openxmlformats.org/presentationml/2006/main" xmlns:c="http://schemas.openxmlformats.org/drawingml/2006/chart" xmlns:dgm="http://schemas.openxmlformats.org/drawingml/2006/diagram" xmlns:o="urn:schemas-microsoft-com:office:office" xmlns:v="urn:schemas-microsoft-com:vml" xmlns:pvml="urn:schemas-microsoft-com:office:powerpoint" xmlns:com="http://schemas.openxmlformats.org/drawingml/2006/compatibility" xmlns:p14="http://schemas.microsoft.com/office/powerpoint/2010/main" xmlns:p15="http://schemas.microsoft.com/office/powerpoint/2012/main" xmlns:ahyp="http://schemas.microsoft.com/office/drawing/2018/hyperlinkcolor">
+<file path=ppt/slides/slide14.xml><?xml version="1.0" encoding="utf-8"?>
+<p:sld xmlns:a="http://schemas.openxmlformats.org/drawingml/2006/main" xmlns:r="http://schemas.openxmlformats.org/officeDocument/2006/relationships" xmlns:p="http://schemas.openxmlformats.org/presentationml/2006/main">
   <p:cSld>
     <p:spTree>
       <p:nvGrpSpPr>
-        <p:cNvPr id="125" name="Shape 125"/>
+        <p:cNvPr id="1" name="Shape 125"/>
         <p:cNvGrpSpPr/>
         <p:nvPr/>
       </p:nvGrpSpPr>
@@ -7489,7 +7957,9 @@
       <p:sp>
         <p:nvSpPr>
           <p:cNvPr id="126" name="Google Shape;126;p25"/>
-          <p:cNvSpPr txBox="1"/>
+          <p:cNvSpPr txBox="1">
+            <a:spLocks noGrp="1"/>
+          </p:cNvSpPr>
           <p:nvPr>
             <p:ph type="title"/>
           </p:nvPr>
@@ -7504,12 +7974,12 @@
           </a:prstGeom>
         </p:spPr>
         <p:txBody>
-          <a:bodyPr anchorCtr="0" anchor="t" bIns="91425" lIns="91425" spcFirstLastPara="1" rIns="91425" wrap="square" tIns="91425">
+          <a:bodyPr spcFirstLastPara="1" wrap="square" lIns="91425" tIns="91425" rIns="91425" bIns="91425" anchor="t" anchorCtr="0">
             <a:normAutofit fontScale="90000"/>
           </a:bodyPr>
           <a:lstStyle/>
           <a:p>
-            <a:pPr indent="0" lvl="0" marL="0" rtl="0" algn="l">
+            <a:pPr marL="0" lvl="0" indent="0" algn="l" rtl="0">
               <a:spcBef>
                 <a:spcPts val="0"/>
               </a:spcBef>
@@ -7562,12 +8032,79 @@
 </p:sld>
 </file>
 
-<file path=ppt/slides/slide14.xml><?xml version="1.0" encoding="utf-8"?>
-<p:sld xmlns:a="http://schemas.openxmlformats.org/drawingml/2006/main" xmlns:r="http://schemas.openxmlformats.org/officeDocument/2006/relationships" xmlns:mc="http://schemas.openxmlformats.org/markup-compatibility/2006" xmlns:mv="urn:schemas-microsoft-com:mac:vml" xmlns:p="http://schemas.openxmlformats.org/presentationml/2006/main" xmlns:c="http://schemas.openxmlformats.org/drawingml/2006/chart" xmlns:dgm="http://schemas.openxmlformats.org/drawingml/2006/diagram" xmlns:o="urn:schemas-microsoft-com:office:office" xmlns:v="urn:schemas-microsoft-com:vml" xmlns:pvml="urn:schemas-microsoft-com:office:powerpoint" xmlns:com="http://schemas.openxmlformats.org/drawingml/2006/compatibility" xmlns:p14="http://schemas.microsoft.com/office/powerpoint/2010/main" xmlns:p15="http://schemas.microsoft.com/office/powerpoint/2012/main" xmlns:ahyp="http://schemas.microsoft.com/office/drawing/2018/hyperlinkcolor">
+<file path=ppt/slides/slide2.xml><?xml version="1.0" encoding="utf-8"?>
+<p:sld xmlns:a="http://schemas.openxmlformats.org/drawingml/2006/main" xmlns:r="http://schemas.openxmlformats.org/officeDocument/2006/relationships" xmlns:p="http://schemas.openxmlformats.org/presentationml/2006/main">
   <p:cSld>
     <p:spTree>
       <p:nvGrpSpPr>
-        <p:cNvPr id="131" name="Shape 131"/>
+        <p:cNvPr id="1" name="Shape 59"/>
+        <p:cNvGrpSpPr/>
+        <p:nvPr/>
+      </p:nvGrpSpPr>
+      <p:grpSpPr>
+        <a:xfrm>
+          <a:off x="0" y="0"/>
+          <a:ext cx="0" cy="0"/>
+          <a:chOff x="0" y="0"/>
+          <a:chExt cx="0" cy="0"/>
+        </a:xfrm>
+      </p:grpSpPr>
+      <p:sp>
+        <p:nvSpPr>
+          <p:cNvPr id="60" name="Google Shape;60;p14"/>
+          <p:cNvSpPr txBox="1">
+            <a:spLocks noGrp="1"/>
+          </p:cNvSpPr>
+          <p:nvPr>
+            <p:ph type="ctrTitle"/>
+          </p:nvPr>
+        </p:nvSpPr>
+        <p:spPr>
+          <a:xfrm>
+            <a:off x="311700" y="2020500"/>
+            <a:ext cx="8520600" cy="1102500"/>
+          </a:xfrm>
+          <a:prstGeom prst="rect">
+            <a:avLst/>
+          </a:prstGeom>
+        </p:spPr>
+        <p:txBody>
+          <a:bodyPr spcFirstLastPara="1" wrap="square" lIns="91425" tIns="91425" rIns="91425" bIns="91425" anchor="b" anchorCtr="0">
+            <a:normAutofit/>
+          </a:bodyPr>
+          <a:lstStyle/>
+          <a:p>
+            <a:pPr marL="0" lvl="0" indent="0" algn="ctr" rtl="0">
+              <a:spcBef>
+                <a:spcPts val="0"/>
+              </a:spcBef>
+              <a:spcAft>
+                <a:spcPts val="0"/>
+              </a:spcAft>
+              <a:buNone/>
+            </a:pPr>
+            <a:r>
+              <a:rPr lang="en"/>
+              <a:t>Live Demo</a:t>
+            </a:r>
+            <a:endParaRPr/>
+          </a:p>
+        </p:txBody>
+      </p:sp>
+    </p:spTree>
+  </p:cSld>
+  <p:clrMapOvr>
+    <a:masterClrMapping/>
+  </p:clrMapOvr>
+</p:sld>
+</file>
+
+<file path=ppt/slides/slide3.xml><?xml version="1.0" encoding="utf-8"?>
+<p:sld xmlns:a="http://schemas.openxmlformats.org/drawingml/2006/main" xmlns:r="http://schemas.openxmlformats.org/officeDocument/2006/relationships" xmlns:p="http://schemas.openxmlformats.org/presentationml/2006/main">
+  <p:cSld>
+    <p:spTree>
+      <p:nvGrpSpPr>
+        <p:cNvPr id="1" name="Shape 131"/>
         <p:cNvGrpSpPr/>
         <p:nvPr/>
       </p:nvGrpSpPr>
@@ -7582,7 +8119,9 @@
       <p:sp>
         <p:nvSpPr>
           <p:cNvPr id="132" name="Google Shape;132;p26"/>
-          <p:cNvSpPr txBox="1"/>
+          <p:cNvSpPr txBox="1">
+            <a:spLocks noGrp="1"/>
+          </p:cNvSpPr>
           <p:nvPr>
             <p:ph type="title"/>
           </p:nvPr>
@@ -7597,12 +8136,12 @@
           </a:prstGeom>
         </p:spPr>
         <p:txBody>
-          <a:bodyPr anchorCtr="0" anchor="t" bIns="91425" lIns="91425" spcFirstLastPara="1" rIns="91425" wrap="square" tIns="91425">
+          <a:bodyPr spcFirstLastPara="1" wrap="square" lIns="91425" tIns="91425" rIns="91425" bIns="91425" anchor="t" anchorCtr="0">
             <a:normAutofit fontScale="90000"/>
           </a:bodyPr>
           <a:lstStyle/>
           <a:p>
-            <a:pPr indent="0" lvl="0" marL="0" rtl="0" algn="l">
+            <a:pPr marL="0" lvl="0" indent="0" algn="l" rtl="0">
               <a:spcBef>
                 <a:spcPts val="0"/>
               </a:spcBef>
@@ -7655,77 +8194,12 @@
 </p:sld>
 </file>
 
-<file path=ppt/slides/slide2.xml><?xml version="1.0" encoding="utf-8"?>
-<p:sld xmlns:a="http://schemas.openxmlformats.org/drawingml/2006/main" xmlns:r="http://schemas.openxmlformats.org/officeDocument/2006/relationships" xmlns:mc="http://schemas.openxmlformats.org/markup-compatibility/2006" xmlns:mv="urn:schemas-microsoft-com:mac:vml" xmlns:p="http://schemas.openxmlformats.org/presentationml/2006/main" xmlns:c="http://schemas.openxmlformats.org/drawingml/2006/chart" xmlns:dgm="http://schemas.openxmlformats.org/drawingml/2006/diagram" xmlns:o="urn:schemas-microsoft-com:office:office" xmlns:v="urn:schemas-microsoft-com:vml" xmlns:pvml="urn:schemas-microsoft-com:office:powerpoint" xmlns:com="http://schemas.openxmlformats.org/drawingml/2006/compatibility" xmlns:p14="http://schemas.microsoft.com/office/powerpoint/2010/main" xmlns:p15="http://schemas.microsoft.com/office/powerpoint/2012/main" xmlns:ahyp="http://schemas.microsoft.com/office/drawing/2018/hyperlinkcolor">
+<file path=ppt/slides/slide4.xml><?xml version="1.0" encoding="utf-8"?>
+<p:sld xmlns:a="http://schemas.openxmlformats.org/drawingml/2006/main" xmlns:r="http://schemas.openxmlformats.org/officeDocument/2006/relationships" xmlns:p="http://schemas.openxmlformats.org/presentationml/2006/main">
   <p:cSld>
     <p:spTree>
       <p:nvGrpSpPr>
-        <p:cNvPr id="59" name="Shape 59"/>
-        <p:cNvGrpSpPr/>
-        <p:nvPr/>
-      </p:nvGrpSpPr>
-      <p:grpSpPr>
-        <a:xfrm>
-          <a:off x="0" y="0"/>
-          <a:ext cx="0" cy="0"/>
-          <a:chOff x="0" y="0"/>
-          <a:chExt cx="0" cy="0"/>
-        </a:xfrm>
-      </p:grpSpPr>
-      <p:sp>
-        <p:nvSpPr>
-          <p:cNvPr id="60" name="Google Shape;60;p14"/>
-          <p:cNvSpPr txBox="1"/>
-          <p:nvPr>
-            <p:ph type="ctrTitle"/>
-          </p:nvPr>
-        </p:nvSpPr>
-        <p:spPr>
-          <a:xfrm>
-            <a:off x="311700" y="2020500"/>
-            <a:ext cx="8520600" cy="1102500"/>
-          </a:xfrm>
-          <a:prstGeom prst="rect">
-            <a:avLst/>
-          </a:prstGeom>
-        </p:spPr>
-        <p:txBody>
-          <a:bodyPr anchorCtr="0" anchor="b" bIns="91425" lIns="91425" spcFirstLastPara="1" rIns="91425" wrap="square" tIns="91425">
-            <a:normAutofit/>
-          </a:bodyPr>
-          <a:lstStyle/>
-          <a:p>
-            <a:pPr indent="0" lvl="0" marL="0" rtl="0" algn="ctr">
-              <a:spcBef>
-                <a:spcPts val="0"/>
-              </a:spcBef>
-              <a:spcAft>
-                <a:spcPts val="0"/>
-              </a:spcAft>
-              <a:buNone/>
-            </a:pPr>
-            <a:r>
-              <a:rPr lang="en"/>
-              <a:t>Live Demo</a:t>
-            </a:r>
-            <a:endParaRPr/>
-          </a:p>
-        </p:txBody>
-      </p:sp>
-    </p:spTree>
-  </p:cSld>
-  <p:clrMapOvr>
-    <a:masterClrMapping/>
-  </p:clrMapOvr>
-</p:sld>
-</file>
-
-<file path=ppt/slides/slide3.xml><?xml version="1.0" encoding="utf-8"?>
-<p:sld xmlns:a="http://schemas.openxmlformats.org/drawingml/2006/main" xmlns:r="http://schemas.openxmlformats.org/officeDocument/2006/relationships" xmlns:mc="http://schemas.openxmlformats.org/markup-compatibility/2006" xmlns:mv="urn:schemas-microsoft-com:mac:vml" xmlns:p="http://schemas.openxmlformats.org/presentationml/2006/main" xmlns:c="http://schemas.openxmlformats.org/drawingml/2006/chart" xmlns:dgm="http://schemas.openxmlformats.org/drawingml/2006/diagram" xmlns:o="urn:schemas-microsoft-com:office:office" xmlns:v="urn:schemas-microsoft-com:vml" xmlns:pvml="urn:schemas-microsoft-com:office:powerpoint" xmlns:com="http://schemas.openxmlformats.org/drawingml/2006/compatibility" xmlns:p14="http://schemas.microsoft.com/office/powerpoint/2010/main" xmlns:p15="http://schemas.microsoft.com/office/powerpoint/2012/main" xmlns:ahyp="http://schemas.microsoft.com/office/drawing/2018/hyperlinkcolor">
-  <p:cSld>
-    <p:spTree>
-      <p:nvGrpSpPr>
-        <p:cNvPr id="64" name="Shape 64"/>
+        <p:cNvPr id="1" name="Shape 64"/>
         <p:cNvGrpSpPr/>
         <p:nvPr/>
       </p:nvGrpSpPr>
@@ -7740,7 +8214,9 @@
       <p:sp>
         <p:nvSpPr>
           <p:cNvPr id="65" name="Google Shape;65;p15"/>
-          <p:cNvSpPr txBox="1"/>
+          <p:cNvSpPr txBox="1">
+            <a:spLocks noGrp="1"/>
+          </p:cNvSpPr>
           <p:nvPr>
             <p:ph type="ctrTitle"/>
           </p:nvPr>
@@ -7755,12 +8231,12 @@
           </a:prstGeom>
         </p:spPr>
         <p:txBody>
-          <a:bodyPr anchorCtr="0" anchor="b" bIns="91425" lIns="91425" spcFirstLastPara="1" rIns="91425" wrap="square" tIns="91425">
+          <a:bodyPr spcFirstLastPara="1" wrap="square" lIns="91425" tIns="91425" rIns="91425" bIns="91425" anchor="b" anchorCtr="0">
             <a:normAutofit/>
           </a:bodyPr>
           <a:lstStyle/>
           <a:p>
-            <a:pPr indent="0" lvl="0" marL="0" rtl="0" algn="ctr">
+            <a:pPr marL="0" lvl="0" indent="0" algn="ctr" rtl="0">
               <a:spcBef>
                 <a:spcPts val="0"/>
               </a:spcBef>
@@ -7785,12 +8261,12 @@
 </p:sld>
 </file>
 
-<file path=ppt/slides/slide4.xml><?xml version="1.0" encoding="utf-8"?>
-<p:sld xmlns:a="http://schemas.openxmlformats.org/drawingml/2006/main" xmlns:r="http://schemas.openxmlformats.org/officeDocument/2006/relationships" xmlns:mc="http://schemas.openxmlformats.org/markup-compatibility/2006" xmlns:mv="urn:schemas-microsoft-com:mac:vml" xmlns:p="http://schemas.openxmlformats.org/presentationml/2006/main" xmlns:c="http://schemas.openxmlformats.org/drawingml/2006/chart" xmlns:dgm="http://schemas.openxmlformats.org/drawingml/2006/diagram" xmlns:o="urn:schemas-microsoft-com:office:office" xmlns:v="urn:schemas-microsoft-com:vml" xmlns:pvml="urn:schemas-microsoft-com:office:powerpoint" xmlns:com="http://schemas.openxmlformats.org/drawingml/2006/compatibility" xmlns:p14="http://schemas.microsoft.com/office/powerpoint/2010/main" xmlns:p15="http://schemas.microsoft.com/office/powerpoint/2012/main" xmlns:ahyp="http://schemas.microsoft.com/office/drawing/2018/hyperlinkcolor">
+<file path=ppt/slides/slide5.xml><?xml version="1.0" encoding="utf-8"?>
+<p:sld xmlns:a="http://schemas.openxmlformats.org/drawingml/2006/main" xmlns:r="http://schemas.openxmlformats.org/officeDocument/2006/relationships" xmlns:p="http://schemas.openxmlformats.org/presentationml/2006/main">
   <p:cSld>
     <p:spTree>
       <p:nvGrpSpPr>
-        <p:cNvPr id="69" name="Shape 69"/>
+        <p:cNvPr id="1" name="Shape 69"/>
         <p:cNvGrpSpPr/>
         <p:nvPr/>
       </p:nvGrpSpPr>
@@ -7805,7 +8281,9 @@
       <p:sp>
         <p:nvSpPr>
           <p:cNvPr id="70" name="Google Shape;70;p16"/>
-          <p:cNvSpPr txBox="1"/>
+          <p:cNvSpPr txBox="1">
+            <a:spLocks noGrp="1"/>
+          </p:cNvSpPr>
           <p:nvPr>
             <p:ph type="title"/>
           </p:nvPr>
@@ -7820,12 +8298,12 @@
           </a:prstGeom>
         </p:spPr>
         <p:txBody>
-          <a:bodyPr anchorCtr="0" anchor="t" bIns="91425" lIns="91425" spcFirstLastPara="1" rIns="91425" wrap="square" tIns="91425">
+          <a:bodyPr spcFirstLastPara="1" wrap="square" lIns="91425" tIns="91425" rIns="91425" bIns="91425" anchor="t" anchorCtr="0">
             <a:normAutofit fontScale="90000"/>
           </a:bodyPr>
           <a:lstStyle/>
           <a:p>
-            <a:pPr indent="0" lvl="0" marL="0" rtl="0" algn="l">
+            <a:pPr marL="0" lvl="0" indent="0" algn="l" rtl="0">
               <a:spcBef>
                 <a:spcPts val="0"/>
               </a:spcBef>
@@ -7845,9 +8323,11 @@
       <p:sp>
         <p:nvSpPr>
           <p:cNvPr id="71" name="Google Shape;71;p16"/>
-          <p:cNvSpPr txBox="1"/>
+          <p:cNvSpPr txBox="1">
+            <a:spLocks noGrp="1"/>
+          </p:cNvSpPr>
           <p:nvPr>
-            <p:ph idx="1" type="body"/>
+            <p:ph type="body" idx="1"/>
           </p:nvPr>
         </p:nvSpPr>
         <p:spPr>
@@ -7860,12 +8340,12 @@
           </a:prstGeom>
         </p:spPr>
         <p:txBody>
-          <a:bodyPr anchorCtr="0" anchor="t" bIns="91425" lIns="91425" spcFirstLastPara="1" rIns="91425" wrap="square" tIns="91425">
+          <a:bodyPr spcFirstLastPara="1" wrap="square" lIns="91425" tIns="91425" rIns="91425" bIns="91425" anchor="t" anchorCtr="0">
             <a:normAutofit/>
           </a:bodyPr>
           <a:lstStyle/>
           <a:p>
-            <a:pPr indent="0" lvl="0" marL="0" rtl="0" algn="l">
+            <a:pPr marL="0" lvl="0" indent="0" algn="l" rtl="0">
               <a:spcBef>
                 <a:spcPts val="0"/>
               </a:spcBef>
@@ -7881,7 +8361,7 @@
             <a:endParaRPr/>
           </a:p>
           <a:p>
-            <a:pPr indent="0" lvl="0" marL="0" rtl="0" algn="l">
+            <a:pPr marL="0" lvl="0" indent="0" algn="l" rtl="0">
               <a:spcBef>
                 <a:spcPts val="1200"/>
               </a:spcBef>
@@ -7892,20 +8372,12 @@
             </a:pPr>
             <a:r>
               <a:rPr lang="en"/>
-              <a:t>The frame buffer can be </a:t>
-            </a:r>
-            <a:r>
-              <a:rPr lang="en"/>
-              <a:t>thought</a:t>
-            </a:r>
-            <a:r>
-              <a:rPr lang="en"/>
-              <a:t> of as being</a:t>
+              <a:t>The frame buffer can be thought of as being</a:t>
             </a:r>
             <a:endParaRPr/>
           </a:p>
           <a:p>
-            <a:pPr indent="0" lvl="0" marL="0" rtl="0" algn="l">
+            <a:pPr marL="0" lvl="0" indent="0" algn="l" rtl="0">
               <a:spcBef>
                 <a:spcPts val="1200"/>
               </a:spcBef>
@@ -7921,7 +8393,7 @@
             <a:endParaRPr/>
           </a:p>
           <a:p>
-            <a:pPr indent="0" lvl="0" marL="0" rtl="0" algn="l">
+            <a:pPr marL="0" lvl="0" indent="0" algn="l" rtl="0">
               <a:spcBef>
                 <a:spcPts val="1200"/>
               </a:spcBef>
@@ -7937,7 +8409,7 @@
             <a:endParaRPr/>
           </a:p>
           <a:p>
-            <a:pPr indent="0" lvl="0" marL="0" rtl="0" algn="l">
+            <a:pPr marL="0" lvl="0" indent="0" algn="l" rtl="0">
               <a:spcBef>
                 <a:spcPts val="1200"/>
               </a:spcBef>
@@ -7953,7 +8425,7 @@
             <a:endParaRPr/>
           </a:p>
           <a:p>
-            <a:pPr indent="0" lvl="0" marL="0" rtl="0" algn="l">
+            <a:pPr marL="0" lvl="0" indent="0" algn="l" rtl="0">
               <a:spcBef>
                 <a:spcPts val="1200"/>
               </a:spcBef>
@@ -7972,29 +8444,32 @@
       </p:sp>
       <p:pic>
         <p:nvPicPr>
-          <p:cNvPr id="72" name="Google Shape;72;p16"/>
-          <p:cNvPicPr preferRelativeResize="0"/>
+          <p:cNvPr id="3" name="Picture 2">
+            <a:extLst>
+              <a:ext uri="{FF2B5EF4-FFF2-40B4-BE49-F238E27FC236}">
+                <a16:creationId xmlns:a16="http://schemas.microsoft.com/office/drawing/2014/main" id="{1907078C-6959-98D9-24C4-67C55CA7A8FC}"/>
+              </a:ext>
+            </a:extLst>
+          </p:cNvPr>
+          <p:cNvPicPr>
+            <a:picLocks noChangeAspect="1"/>
+          </p:cNvPicPr>
           <p:nvPr/>
         </p:nvPicPr>
-        <p:blipFill rotWithShape="1">
-          <a:blip r:embed="rId3">
-            <a:alphaModFix/>
-          </a:blip>
-          <a:srcRect b="6288" l="8792" r="0" t="0"/>
-          <a:stretch/>
+        <p:blipFill>
+          <a:blip r:embed="rId3"/>
+          <a:stretch>
+            <a:fillRect/>
+          </a:stretch>
         </p:blipFill>
         <p:spPr>
           <a:xfrm>
-            <a:off x="5084100" y="1613925"/>
-            <a:ext cx="3900600" cy="3257950"/>
+            <a:off x="5044725" y="1523998"/>
+            <a:ext cx="3927487" cy="2909455"/>
           </a:xfrm>
           <a:prstGeom prst="rect">
             <a:avLst/>
           </a:prstGeom>
-          <a:noFill/>
-          <a:ln>
-            <a:noFill/>
-          </a:ln>
         </p:spPr>
       </p:pic>
     </p:spTree>
@@ -8005,12 +8480,12 @@
 </p:sld>
 </file>
 
-<file path=ppt/slides/slide5.xml><?xml version="1.0" encoding="utf-8"?>
-<p:sld xmlns:a="http://schemas.openxmlformats.org/drawingml/2006/main" xmlns:r="http://schemas.openxmlformats.org/officeDocument/2006/relationships" xmlns:mc="http://schemas.openxmlformats.org/markup-compatibility/2006" xmlns:mv="urn:schemas-microsoft-com:mac:vml" xmlns:p="http://schemas.openxmlformats.org/presentationml/2006/main" xmlns:c="http://schemas.openxmlformats.org/drawingml/2006/chart" xmlns:dgm="http://schemas.openxmlformats.org/drawingml/2006/diagram" xmlns:o="urn:schemas-microsoft-com:office:office" xmlns:v="urn:schemas-microsoft-com:vml" xmlns:pvml="urn:schemas-microsoft-com:office:powerpoint" xmlns:com="http://schemas.openxmlformats.org/drawingml/2006/compatibility" xmlns:p14="http://schemas.microsoft.com/office/powerpoint/2010/main" xmlns:p15="http://schemas.microsoft.com/office/powerpoint/2012/main" xmlns:ahyp="http://schemas.microsoft.com/office/drawing/2018/hyperlinkcolor">
+<file path=ppt/slides/slide6.xml><?xml version="1.0" encoding="utf-8"?>
+<p:sld xmlns:a="http://schemas.openxmlformats.org/drawingml/2006/main" xmlns:r="http://schemas.openxmlformats.org/officeDocument/2006/relationships" xmlns:p="http://schemas.openxmlformats.org/presentationml/2006/main">
   <p:cSld>
     <p:spTree>
       <p:nvGrpSpPr>
-        <p:cNvPr id="76" name="Shape 76"/>
+        <p:cNvPr id="1" name="Shape 76"/>
         <p:cNvGrpSpPr/>
         <p:nvPr/>
       </p:nvGrpSpPr>
@@ -8025,7 +8500,9 @@
       <p:sp>
         <p:nvSpPr>
           <p:cNvPr id="77" name="Google Shape;77;p17"/>
-          <p:cNvSpPr txBox="1"/>
+          <p:cNvSpPr txBox="1">
+            <a:spLocks noGrp="1"/>
+          </p:cNvSpPr>
           <p:nvPr>
             <p:ph type="title"/>
           </p:nvPr>
@@ -8040,12 +8517,12 @@
           </a:prstGeom>
         </p:spPr>
         <p:txBody>
-          <a:bodyPr anchorCtr="0" anchor="t" bIns="91425" lIns="91425" spcFirstLastPara="1" rIns="91425" wrap="square" tIns="91425">
+          <a:bodyPr spcFirstLastPara="1" wrap="square" lIns="91425" tIns="91425" rIns="91425" bIns="91425" anchor="t" anchorCtr="0">
             <a:normAutofit fontScale="90000"/>
           </a:bodyPr>
           <a:lstStyle/>
           <a:p>
-            <a:pPr indent="0" lvl="0" marL="0" rtl="0" algn="l">
+            <a:pPr marL="0" lvl="0" indent="0" algn="l" rtl="0">
               <a:spcBef>
                 <a:spcPts val="0"/>
               </a:spcBef>
@@ -8065,9 +8542,11 @@
       <p:sp>
         <p:nvSpPr>
           <p:cNvPr id="78" name="Google Shape;78;p17"/>
-          <p:cNvSpPr txBox="1"/>
+          <p:cNvSpPr txBox="1">
+            <a:spLocks noGrp="1"/>
+          </p:cNvSpPr>
           <p:nvPr>
-            <p:ph idx="1" type="body"/>
+            <p:ph type="body" idx="1"/>
           </p:nvPr>
         </p:nvSpPr>
         <p:spPr>
@@ -8080,12 +8559,12 @@
           </a:prstGeom>
         </p:spPr>
         <p:txBody>
-          <a:bodyPr anchorCtr="0" anchor="t" bIns="91425" lIns="91425" spcFirstLastPara="1" rIns="91425" wrap="square" tIns="91425">
+          <a:bodyPr spcFirstLastPara="1" wrap="square" lIns="91425" tIns="91425" rIns="91425" bIns="91425" anchor="t" anchorCtr="0">
             <a:normAutofit/>
           </a:bodyPr>
           <a:lstStyle/>
           <a:p>
-            <a:pPr indent="0" lvl="0" marL="0" marR="0" rtl="0" algn="l">
+            <a:pPr marL="0" marR="0" lvl="0" indent="0" algn="l" rtl="0">
               <a:lnSpc>
                 <a:spcPct val="115000"/>
               </a:lnSpc>
@@ -8098,13 +8577,13 @@
               <a:buNone/>
             </a:pPr>
             <a:r>
-              <a:rPr lang="en"/>
+              <a:rPr lang="en" dirty="0"/>
               <a:t>ARM’s load and store instructions are based on bytes, meaning our frame buffer can be thought of as a 288 long array with a byte corresponding to 8 pixels being held in each index. </a:t>
             </a:r>
-            <a:endParaRPr/>
-          </a:p>
-          <a:p>
-            <a:pPr indent="0" lvl="0" marL="0" marR="0" rtl="0" algn="l">
+            <a:endParaRPr dirty="0"/>
+          </a:p>
+          <a:p>
+            <a:pPr marL="0" marR="0" lvl="0" indent="0" algn="l" rtl="0">
               <a:lnSpc>
                 <a:spcPct val="115000"/>
               </a:lnSpc>
@@ -8117,13 +8596,13 @@
               <a:buNone/>
             </a:pPr>
             <a:r>
-              <a:rPr lang="en"/>
+              <a:rPr lang="en" dirty="0"/>
               <a:t>Arr = {byte0, byte1, byte2, byte3, byte4, byte5, byte6, byte7, …}</a:t>
             </a:r>
-            <a:endParaRPr/>
-          </a:p>
-          <a:p>
-            <a:pPr indent="0" lvl="0" marL="0" marR="0" rtl="0" algn="l">
+            <a:endParaRPr dirty="0"/>
+          </a:p>
+          <a:p>
+            <a:pPr marL="0" marR="0" lvl="0" indent="0" algn="l" rtl="0">
               <a:lnSpc>
                 <a:spcPct val="115000"/>
               </a:lnSpc>
@@ -8136,13 +8615,13 @@
               <a:buNone/>
             </a:pPr>
             <a:r>
-              <a:rPr lang="en"/>
+              <a:rPr lang="en" dirty="0"/>
               <a:t>byteIndex = (row * 6) + byteCol                (row : 0-47, byteCol: 0-5)</a:t>
             </a:r>
-            <a:endParaRPr/>
-          </a:p>
-          <a:p>
-            <a:pPr indent="0" lvl="0" marL="0" marR="0" rtl="0" algn="l">
+            <a:endParaRPr dirty="0"/>
+          </a:p>
+          <a:p>
+            <a:pPr marL="0" marR="0" lvl="0" indent="0" algn="l" rtl="0">
               <a:lnSpc>
                 <a:spcPct val="115000"/>
               </a:lnSpc>
@@ -8155,13 +8634,13 @@
               <a:buNone/>
             </a:pPr>
             <a:r>
-              <a:rPr lang="en"/>
+              <a:rPr lang="en" dirty="0"/>
               <a:t>memoryAddress = byteIndex + frameBufferMemoryAddress </a:t>
             </a:r>
-            <a:endParaRPr/>
-          </a:p>
-          <a:p>
-            <a:pPr indent="0" lvl="0" marL="0" marR="0" rtl="0" algn="l">
+            <a:endParaRPr dirty="0"/>
+          </a:p>
+          <a:p>
+            <a:pPr marL="0" marR="0" lvl="0" indent="0" algn="l" rtl="0">
               <a:lnSpc>
                 <a:spcPct val="115000"/>
               </a:lnSpc>
@@ -8173,10 +8652,7 @@
               </a:spcAft>
               <a:buNone/>
             </a:pPr>
-            <a:r>
-              <a:t/>
-            </a:r>
-            <a:endParaRPr/>
+            <a:endParaRPr dirty="0"/>
           </a:p>
         </p:txBody>
       </p:sp>
@@ -8188,12 +8664,12 @@
 </p:sld>
 </file>
 
-<file path=ppt/slides/slide6.xml><?xml version="1.0" encoding="utf-8"?>
-<p:sld xmlns:a="http://schemas.openxmlformats.org/drawingml/2006/main" xmlns:r="http://schemas.openxmlformats.org/officeDocument/2006/relationships" xmlns:mc="http://schemas.openxmlformats.org/markup-compatibility/2006" xmlns:mv="urn:schemas-microsoft-com:mac:vml" xmlns:p="http://schemas.openxmlformats.org/presentationml/2006/main" xmlns:c="http://schemas.openxmlformats.org/drawingml/2006/chart" xmlns:dgm="http://schemas.openxmlformats.org/drawingml/2006/diagram" xmlns:o="urn:schemas-microsoft-com:office:office" xmlns:v="urn:schemas-microsoft-com:vml" xmlns:pvml="urn:schemas-microsoft-com:office:powerpoint" xmlns:com="http://schemas.openxmlformats.org/drawingml/2006/compatibility" xmlns:p14="http://schemas.microsoft.com/office/powerpoint/2010/main" xmlns:p15="http://schemas.microsoft.com/office/powerpoint/2012/main" xmlns:ahyp="http://schemas.microsoft.com/office/drawing/2018/hyperlinkcolor">
+<file path=ppt/slides/slide7.xml><?xml version="1.0" encoding="utf-8"?>
+<p:sld xmlns:a="http://schemas.openxmlformats.org/drawingml/2006/main" xmlns:r="http://schemas.openxmlformats.org/officeDocument/2006/relationships" xmlns:p="http://schemas.openxmlformats.org/presentationml/2006/main">
   <p:cSld>
     <p:spTree>
       <p:nvGrpSpPr>
-        <p:cNvPr id="82" name="Shape 82"/>
+        <p:cNvPr id="1" name="Shape 82"/>
         <p:cNvGrpSpPr/>
         <p:nvPr/>
       </p:nvGrpSpPr>
@@ -8208,7 +8684,9 @@
       <p:sp>
         <p:nvSpPr>
           <p:cNvPr id="83" name="Google Shape;83;p18"/>
-          <p:cNvSpPr txBox="1"/>
+          <p:cNvSpPr txBox="1">
+            <a:spLocks noGrp="1"/>
+          </p:cNvSpPr>
           <p:nvPr>
             <p:ph type="ctrTitle"/>
           </p:nvPr>
@@ -8223,12 +8701,12 @@
           </a:prstGeom>
         </p:spPr>
         <p:txBody>
-          <a:bodyPr anchorCtr="0" anchor="b" bIns="91425" lIns="91425" spcFirstLastPara="1" rIns="91425" wrap="square" tIns="91425">
+          <a:bodyPr spcFirstLastPara="1" wrap="square" lIns="91425" tIns="91425" rIns="91425" bIns="91425" anchor="b" anchorCtr="0">
             <a:normAutofit/>
           </a:bodyPr>
           <a:lstStyle/>
           <a:p>
-            <a:pPr indent="0" lvl="0" marL="0" rtl="0" algn="ctr">
+            <a:pPr marL="0" lvl="0" indent="0" algn="ctr" rtl="0">
               <a:spcBef>
                 <a:spcPts val="0"/>
               </a:spcBef>
@@ -8253,12 +8731,12 @@
 </p:sld>
 </file>
 
-<file path=ppt/slides/slide7.xml><?xml version="1.0" encoding="utf-8"?>
-<p:sld xmlns:a="http://schemas.openxmlformats.org/drawingml/2006/main" xmlns:r="http://schemas.openxmlformats.org/officeDocument/2006/relationships" xmlns:mc="http://schemas.openxmlformats.org/markup-compatibility/2006" xmlns:mv="urn:schemas-microsoft-com:mac:vml" xmlns:p="http://schemas.openxmlformats.org/presentationml/2006/main" xmlns:c="http://schemas.openxmlformats.org/drawingml/2006/chart" xmlns:dgm="http://schemas.openxmlformats.org/drawingml/2006/diagram" xmlns:o="urn:schemas-microsoft-com:office:office" xmlns:v="urn:schemas-microsoft-com:vml" xmlns:pvml="urn:schemas-microsoft-com:office:powerpoint" xmlns:com="http://schemas.openxmlformats.org/drawingml/2006/compatibility" xmlns:p14="http://schemas.microsoft.com/office/powerpoint/2010/main" xmlns:p15="http://schemas.microsoft.com/office/powerpoint/2012/main" xmlns:ahyp="http://schemas.microsoft.com/office/drawing/2018/hyperlinkcolor">
+<file path=ppt/slides/slide8.xml><?xml version="1.0" encoding="utf-8"?>
+<p:sld xmlns:a="http://schemas.openxmlformats.org/drawingml/2006/main" xmlns:r="http://schemas.openxmlformats.org/officeDocument/2006/relationships" xmlns:p="http://schemas.openxmlformats.org/presentationml/2006/main">
   <p:cSld>
     <p:spTree>
       <p:nvGrpSpPr>
-        <p:cNvPr id="87" name="Shape 87"/>
+        <p:cNvPr id="1" name="Shape 87"/>
         <p:cNvGrpSpPr/>
         <p:nvPr/>
       </p:nvGrpSpPr>
@@ -8273,7 +8751,9 @@
       <p:sp>
         <p:nvSpPr>
           <p:cNvPr id="88" name="Google Shape;88;p19"/>
-          <p:cNvSpPr txBox="1"/>
+          <p:cNvSpPr txBox="1">
+            <a:spLocks noGrp="1"/>
+          </p:cNvSpPr>
           <p:nvPr>
             <p:ph type="title"/>
           </p:nvPr>
@@ -8288,12 +8768,12 @@
           </a:prstGeom>
         </p:spPr>
         <p:txBody>
-          <a:bodyPr anchorCtr="0" anchor="t" bIns="91425" lIns="91425" spcFirstLastPara="1" rIns="91425" wrap="square" tIns="91425">
+          <a:bodyPr spcFirstLastPara="1" wrap="square" lIns="91425" tIns="91425" rIns="91425" bIns="91425" anchor="t" anchorCtr="0">
             <a:normAutofit fontScale="90000"/>
           </a:bodyPr>
           <a:lstStyle/>
           <a:p>
-            <a:pPr indent="0" lvl="0" marL="0" rtl="0" algn="l">
+            <a:pPr marL="0" lvl="0" indent="0" algn="l" rtl="0">
               <a:spcBef>
                 <a:spcPts val="0"/>
               </a:spcBef>
@@ -8313,9 +8793,11 @@
       <p:sp>
         <p:nvSpPr>
           <p:cNvPr id="89" name="Google Shape;89;p19"/>
-          <p:cNvSpPr txBox="1"/>
+          <p:cNvSpPr txBox="1">
+            <a:spLocks noGrp="1"/>
+          </p:cNvSpPr>
           <p:nvPr>
-            <p:ph idx="1" type="body"/>
+            <p:ph type="body" idx="1"/>
           </p:nvPr>
         </p:nvSpPr>
         <p:spPr>
@@ -8328,12 +8810,12 @@
           </a:prstGeom>
         </p:spPr>
         <p:txBody>
-          <a:bodyPr anchorCtr="0" anchor="t" bIns="91425" lIns="91425" spcFirstLastPara="1" rIns="91425" wrap="square" tIns="91425">
+          <a:bodyPr spcFirstLastPara="1" wrap="square" lIns="91425" tIns="91425" rIns="91425" bIns="91425" anchor="t" anchorCtr="0">
             <a:normAutofit fontScale="92500" lnSpcReduction="20000"/>
           </a:bodyPr>
           <a:lstStyle/>
           <a:p>
-            <a:pPr indent="-334328" lvl="0" marL="457200" rtl="0" algn="l">
+            <a:pPr marL="457200" lvl="0" indent="-334328" algn="l" rtl="0">
               <a:spcBef>
                 <a:spcPts val="0"/>
               </a:spcBef>
@@ -8350,7 +8832,7 @@
             <a:endParaRPr/>
           </a:p>
           <a:p>
-            <a:pPr indent="-334328" lvl="0" marL="457200" rtl="0" algn="l">
+            <a:pPr marL="457200" lvl="0" indent="-334328" algn="l" rtl="0">
               <a:spcBef>
                 <a:spcPts val="0"/>
               </a:spcBef>
@@ -8367,7 +8849,7 @@
             <a:endParaRPr/>
           </a:p>
           <a:p>
-            <a:pPr indent="-334328" lvl="0" marL="457200" rtl="0" algn="l">
+            <a:pPr marL="457200" lvl="0" indent="-334328" algn="l" rtl="0">
               <a:spcBef>
                 <a:spcPts val="0"/>
               </a:spcBef>
@@ -8384,7 +8866,7 @@
             <a:endParaRPr/>
           </a:p>
           <a:p>
-            <a:pPr indent="-334328" lvl="0" marL="457200" rtl="0" algn="l">
+            <a:pPr marL="457200" lvl="0" indent="-334328" algn="l" rtl="0">
               <a:spcBef>
                 <a:spcPts val="0"/>
               </a:spcBef>
@@ -8401,7 +8883,7 @@
             <a:endParaRPr/>
           </a:p>
           <a:p>
-            <a:pPr indent="-334328" lvl="0" marL="457200" rtl="0" algn="l">
+            <a:pPr marL="457200" lvl="0" indent="-334328" algn="l" rtl="0">
               <a:spcBef>
                 <a:spcPts val="0"/>
               </a:spcBef>
@@ -8418,7 +8900,7 @@
             <a:endParaRPr/>
           </a:p>
           <a:p>
-            <a:pPr indent="-334328" lvl="0" marL="457200" rtl="0" algn="l">
+            <a:pPr marL="457200" lvl="0" indent="-334328" algn="l" rtl="0">
               <a:spcBef>
                 <a:spcPts val="0"/>
               </a:spcBef>
@@ -8435,7 +8917,7 @@
             <a:endParaRPr/>
           </a:p>
           <a:p>
-            <a:pPr indent="-334328" lvl="0" marL="457200" rtl="0" algn="l">
+            <a:pPr marL="457200" lvl="0" indent="-334328" algn="l" rtl="0">
               <a:spcBef>
                 <a:spcPts val="0"/>
               </a:spcBef>
@@ -8461,12 +8943,12 @@
 </p:sld>
 </file>
 
-<file path=ppt/slides/slide8.xml><?xml version="1.0" encoding="utf-8"?>
-<p:sld xmlns:a="http://schemas.openxmlformats.org/drawingml/2006/main" xmlns:r="http://schemas.openxmlformats.org/officeDocument/2006/relationships" xmlns:mc="http://schemas.openxmlformats.org/markup-compatibility/2006" xmlns:mv="urn:schemas-microsoft-com:mac:vml" xmlns:p="http://schemas.openxmlformats.org/presentationml/2006/main" xmlns:c="http://schemas.openxmlformats.org/drawingml/2006/chart" xmlns:dgm="http://schemas.openxmlformats.org/drawingml/2006/diagram" xmlns:o="urn:schemas-microsoft-com:office:office" xmlns:v="urn:schemas-microsoft-com:vml" xmlns:pvml="urn:schemas-microsoft-com:office:powerpoint" xmlns:com="http://schemas.openxmlformats.org/drawingml/2006/compatibility" xmlns:p14="http://schemas.microsoft.com/office/powerpoint/2010/main" xmlns:p15="http://schemas.microsoft.com/office/powerpoint/2012/main" xmlns:ahyp="http://schemas.microsoft.com/office/drawing/2018/hyperlinkcolor">
+<file path=ppt/slides/slide9.xml><?xml version="1.0" encoding="utf-8"?>
+<p:sld xmlns:a="http://schemas.openxmlformats.org/drawingml/2006/main" xmlns:r="http://schemas.openxmlformats.org/officeDocument/2006/relationships" xmlns:p="http://schemas.openxmlformats.org/presentationml/2006/main">
   <p:cSld>
     <p:spTree>
       <p:nvGrpSpPr>
-        <p:cNvPr id="93" name="Shape 93"/>
+        <p:cNvPr id="1" name="Shape 93"/>
         <p:cNvGrpSpPr/>
         <p:nvPr/>
       </p:nvGrpSpPr>
@@ -8514,261 +8996,8 @@
 </p:sld>
 </file>
 
-<file path=ppt/slides/slide9.xml><?xml version="1.0" encoding="utf-8"?>
-<p:sld xmlns:a="http://schemas.openxmlformats.org/drawingml/2006/main" xmlns:r="http://schemas.openxmlformats.org/officeDocument/2006/relationships" xmlns:mc="http://schemas.openxmlformats.org/markup-compatibility/2006" xmlns:mv="urn:schemas-microsoft-com:mac:vml" xmlns:p="http://schemas.openxmlformats.org/presentationml/2006/main" xmlns:c="http://schemas.openxmlformats.org/drawingml/2006/chart" xmlns:dgm="http://schemas.openxmlformats.org/drawingml/2006/diagram" xmlns:o="urn:schemas-microsoft-com:office:office" xmlns:v="urn:schemas-microsoft-com:vml" xmlns:pvml="urn:schemas-microsoft-com:office:powerpoint" xmlns:com="http://schemas.openxmlformats.org/drawingml/2006/compatibility" xmlns:p14="http://schemas.microsoft.com/office/powerpoint/2010/main" xmlns:p15="http://schemas.microsoft.com/office/powerpoint/2012/main" xmlns:ahyp="http://schemas.microsoft.com/office/drawing/2018/hyperlinkcolor">
-  <p:cSld>
-    <p:spTree>
-      <p:nvGrpSpPr>
-        <p:cNvPr id="98" name="Shape 98"/>
-        <p:cNvGrpSpPr/>
-        <p:nvPr/>
-      </p:nvGrpSpPr>
-      <p:grpSpPr>
-        <a:xfrm>
-          <a:off x="0" y="0"/>
-          <a:ext cx="0" cy="0"/>
-          <a:chOff x="0" y="0"/>
-          <a:chExt cx="0" cy="0"/>
-        </a:xfrm>
-      </p:grpSpPr>
-      <p:sp>
-        <p:nvSpPr>
-          <p:cNvPr id="99" name="Google Shape;99;p21"/>
-          <p:cNvSpPr txBox="1"/>
-          <p:nvPr>
-            <p:ph type="title"/>
-          </p:nvPr>
-        </p:nvSpPr>
-        <p:spPr>
-          <a:xfrm>
-            <a:off x="311700" y="445025"/>
-            <a:ext cx="8520600" cy="572700"/>
-          </a:xfrm>
-          <a:prstGeom prst="rect">
-            <a:avLst/>
-          </a:prstGeom>
-        </p:spPr>
-        <p:txBody>
-          <a:bodyPr anchorCtr="0" anchor="t" bIns="91425" lIns="91425" spcFirstLastPara="1" rIns="91425" wrap="square" tIns="91425">
-            <a:normAutofit fontScale="90000"/>
-          </a:bodyPr>
-          <a:lstStyle/>
-          <a:p>
-            <a:pPr indent="0" lvl="0" marL="0" rtl="0" algn="l">
-              <a:spcBef>
-                <a:spcPts val="0"/>
-              </a:spcBef>
-              <a:spcAft>
-                <a:spcPts val="0"/>
-              </a:spcAft>
-              <a:buNone/>
-            </a:pPr>
-            <a:r>
-              <a:rPr lang="en"/>
-              <a:t>Example</a:t>
-            </a:r>
-            <a:endParaRPr/>
-          </a:p>
-        </p:txBody>
-      </p:sp>
-      <p:sp>
-        <p:nvSpPr>
-          <p:cNvPr id="100" name="Google Shape;100;p21"/>
-          <p:cNvSpPr txBox="1"/>
-          <p:nvPr>
-            <p:ph idx="1" type="body"/>
-          </p:nvPr>
-        </p:nvSpPr>
-        <p:spPr>
-          <a:xfrm>
-            <a:off x="311700" y="1152475"/>
-            <a:ext cx="4322700" cy="2395500"/>
-          </a:xfrm>
-          <a:prstGeom prst="rect">
-            <a:avLst/>
-          </a:prstGeom>
-        </p:spPr>
-        <p:txBody>
-          <a:bodyPr anchorCtr="0" anchor="t" bIns="91425" lIns="91425" spcFirstLastPara="1" rIns="91425" wrap="square" tIns="91425">
-            <a:normAutofit/>
-          </a:bodyPr>
-          <a:lstStyle/>
-          <a:p>
-            <a:pPr indent="0" lvl="0" marL="0" rtl="0" algn="l">
-              <a:spcBef>
-                <a:spcPts val="0"/>
-              </a:spcBef>
-              <a:spcAft>
-                <a:spcPts val="0"/>
-              </a:spcAft>
-              <a:buNone/>
-            </a:pPr>
-            <a:r>
-              <a:rPr lang="en"/>
-              <a:t>Zebra Pattern:</a:t>
-            </a:r>
-            <a:endParaRPr/>
-          </a:p>
-          <a:p>
-            <a:pPr indent="0" lvl="0" marL="0" rtl="0" algn="l">
-              <a:spcBef>
-                <a:spcPts val="1200"/>
-              </a:spcBef>
-              <a:spcAft>
-                <a:spcPts val="0"/>
-              </a:spcAft>
-              <a:buNone/>
-            </a:pPr>
-            <a:r>
-              <a:rPr lang="en"/>
-              <a:t>01010101 01010101</a:t>
-            </a:r>
-            <a:endParaRPr/>
-          </a:p>
-          <a:p>
-            <a:pPr indent="0" lvl="0" marL="0" rtl="0" algn="l">
-              <a:spcBef>
-                <a:spcPts val="1200"/>
-              </a:spcBef>
-              <a:spcAft>
-                <a:spcPts val="0"/>
-              </a:spcAft>
-              <a:buNone/>
-            </a:pPr>
-            <a:r>
-              <a:rPr lang="en"/>
-              <a:t>01010101 01010101</a:t>
-            </a:r>
-            <a:endParaRPr/>
-          </a:p>
-          <a:p>
-            <a:pPr indent="0" lvl="0" marL="0" rtl="0" algn="l">
-              <a:spcBef>
-                <a:spcPts val="1200"/>
-              </a:spcBef>
-              <a:spcAft>
-                <a:spcPts val="0"/>
-              </a:spcAft>
-              <a:buNone/>
-            </a:pPr>
-            <a:r>
-              <a:rPr lang="en"/>
-              <a:t>01010101 01010101</a:t>
-            </a:r>
-            <a:endParaRPr/>
-          </a:p>
-          <a:p>
-            <a:pPr indent="0" lvl="0" marL="0" rtl="0" algn="l">
-              <a:spcBef>
-                <a:spcPts val="1200"/>
-              </a:spcBef>
-              <a:spcAft>
-                <a:spcPts val="1200"/>
-              </a:spcAft>
-              <a:buNone/>
-            </a:pPr>
-            <a:r>
-              <a:rPr lang="en"/>
-              <a:t>01010101 01010101</a:t>
-            </a:r>
-            <a:endParaRPr/>
-          </a:p>
-        </p:txBody>
-      </p:sp>
-      <p:sp>
-        <p:nvSpPr>
-          <p:cNvPr id="101" name="Google Shape;101;p21"/>
-          <p:cNvSpPr txBox="1"/>
-          <p:nvPr>
-            <p:ph idx="1" type="body"/>
-          </p:nvPr>
-        </p:nvSpPr>
-        <p:spPr>
-          <a:xfrm>
-            <a:off x="311700" y="3547975"/>
-            <a:ext cx="8345700" cy="2395500"/>
-          </a:xfrm>
-          <a:prstGeom prst="rect">
-            <a:avLst/>
-          </a:prstGeom>
-        </p:spPr>
-        <p:txBody>
-          <a:bodyPr anchorCtr="0" anchor="t" bIns="91425" lIns="91425" spcFirstLastPara="1" rIns="91425" wrap="square" tIns="91425">
-            <a:normAutofit/>
-          </a:bodyPr>
-          <a:lstStyle/>
-          <a:p>
-            <a:pPr indent="0" lvl="0" marL="0" rtl="0" algn="l">
-              <a:spcBef>
-                <a:spcPts val="0"/>
-              </a:spcBef>
-              <a:spcAft>
-                <a:spcPts val="0"/>
-              </a:spcAft>
-              <a:buNone/>
-            </a:pPr>
-            <a:r>
-              <a:rPr lang="en"/>
-              <a:t>In Frame Buffer: 64 bits can all be done in one iteration/store-instruction.</a:t>
-            </a:r>
-            <a:endParaRPr/>
-          </a:p>
-          <a:p>
-            <a:pPr indent="0" lvl="0" marL="0" rtl="0" algn="l">
-              <a:spcBef>
-                <a:spcPts val="1200"/>
-              </a:spcBef>
-              <a:spcAft>
-                <a:spcPts val="1200"/>
-              </a:spcAft>
-              <a:buNone/>
-            </a:pPr>
-            <a:r>
-              <a:rPr lang="en"/>
-              <a:t>0101010101010101010101010101010101010101010101010101010101010101 </a:t>
-            </a:r>
-            <a:endParaRPr/>
-          </a:p>
-        </p:txBody>
-      </p:sp>
-      <p:pic>
-        <p:nvPicPr>
-          <p:cNvPr id="102" name="Google Shape;102;p21"/>
-          <p:cNvPicPr preferRelativeResize="0"/>
-          <p:nvPr/>
-        </p:nvPicPr>
-        <p:blipFill>
-          <a:blip r:embed="rId3">
-            <a:alphaModFix/>
-          </a:blip>
-          <a:stretch>
-            <a:fillRect/>
-          </a:stretch>
-        </p:blipFill>
-        <p:spPr>
-          <a:xfrm>
-            <a:off x="4163659" y="1152475"/>
-            <a:ext cx="2340683" cy="2225449"/>
-          </a:xfrm>
-          <a:prstGeom prst="rect">
-            <a:avLst/>
-          </a:prstGeom>
-          <a:noFill/>
-          <a:ln>
-            <a:noFill/>
-          </a:ln>
-        </p:spPr>
-      </p:pic>
-    </p:spTree>
-  </p:cSld>
-  <p:clrMapOvr>
-    <a:masterClrMapping/>
-  </p:clrMapOvr>
-</p:sld>
-</file>
-
 <file path=ppt/theme/theme1.xml><?xml version="1.0" encoding="utf-8"?>
-<a:theme xmlns:a="http://schemas.openxmlformats.org/drawingml/2006/main" xmlns:r="http://schemas.openxmlformats.org/officeDocument/2006/relationships" name="Simple Dark">
+<a:theme xmlns:a="http://schemas.openxmlformats.org/drawingml/2006/main" name="Simple Dark">
   <a:themeElements>
     <a:clrScheme name="Simple Dark">
       <a:dk1>
@@ -9043,11 +9272,13 @@
       </a:bgFillStyleLst>
     </a:fmtScheme>
   </a:themeElements>
+  <a:objectDefaults/>
+  <a:extraClrSchemeLst/>
 </a:theme>
 </file>
 
 <file path=ppt/theme/theme2.xml><?xml version="1.0" encoding="utf-8"?>
-<a:theme xmlns:a="http://schemas.openxmlformats.org/drawingml/2006/main" xmlns:r="http://schemas.openxmlformats.org/officeDocument/2006/relationships">
+<a:theme xmlns:a="http://schemas.openxmlformats.org/drawingml/2006/main">
   <a:themeElements>
     <a:clrScheme name="Default">
       <a:dk1>
@@ -9322,5 +9553,7 @@
       </a:bgFillStyleLst>
     </a:fmtScheme>
   </a:themeElements>
+  <a:objectDefaults/>
+  <a:extraClrSchemeLst/>
 </a:theme>
 </file>